--- a/livrables/support_reporting_direction.pptx
+++ b/livrables/support_reporting_direction.pptx
@@ -5179,7 +5179,7 @@
                 <a:latin typeface="Segoe UI Semibold"/>
                 <a:cs typeface="Segoe UI Semibold"/>
               </a:rPr>
-              <a:t>● VERT · VERT · VERT · VERT · VERT · VERT · VERT · VERT · VERT · VERT · VERT · VERT · VERT · VERT · VERT · VERT · VERT · VERT · VERT · VERT · VERT · VERT · VERT · VERT · VERT · VERT · VERT · VERT · VERT · VERT · VERT · VERT · VERT · VERT · VERT · VERT · VERT · VERT · VERT · VERT · VERT · VERT · VERT · VERT · VERT · VERT · VERT · VERT · VERT · VERT · prêt à lancer</a:t>
+              <a:t>● VERT · prêt à lancer</a:t>
             </a:r>
           </a:p>
         </p:txBody>
@@ -15842,24 +15842,6 @@
 </file>
 
 <file path=customXml/item1.xml><?xml version="1.0" encoding="utf-8"?>
-<p:properties xmlns:p="http://schemas.microsoft.com/office/2006/metadata/properties" xmlns:xsi="http://www.w3.org/2001/XMLSchema-instance" xmlns:pc="http://schemas.microsoft.com/office/infopath/2007/PartnerControls">
-  <documentManagement>
-    <Document_x0020_Purpose xmlns="f577acbf-5b0b-4b4f-9948-268e97f8d3a4">Informational</Document_x0020_Purpose>
-    <Initiatives xmlns="f577acbf-5b0b-4b4f-9948-268e97f8d3a4"/>
-  </documentManagement>
-</p:properties>
-</file>
-
-<file path=customXml/item2.xml><?xml version="1.0" encoding="utf-8"?>
-<?mso-contentType ?>
-<FormTemplates xmlns="http://schemas.microsoft.com/sharepoint/v3/contenttype/forms">
-  <Display>DocumentLibraryForm</Display>
-  <Edit>DocumentLibraryForm</Edit>
-  <New>DocumentLibraryForm</New>
-</FormTemplates>
-</file>
-
-<file path=customXml/item3.xml><?xml version="1.0" encoding="utf-8"?>
 <ct:contentTypeSchema xmlns:ct="http://schemas.microsoft.com/office/2006/metadata/contentType" xmlns:ma="http://schemas.microsoft.com/office/2006/metadata/properties/metaAttributes" ct:_="" ma:_="" ma:contentTypeName="Document" ma:contentTypeID="0x010100CD401524DC532D42A0E0ED886331A72B" ma:contentTypeVersion="13" ma:contentTypeDescription="Create a new document." ma:contentTypeScope="" ma:versionID="d936d863d335d354da51eb78ca1ae338">
   <xsd:schema xmlns:xsd="http://www.w3.org/2001/XMLSchema" xmlns:xs="http://www.w3.org/2001/XMLSchema" xmlns:p="http://schemas.microsoft.com/office/2006/metadata/properties" xmlns:ns2="f577acbf-5b0b-4b4f-9948-268e97f8d3a4" xmlns:ns3="b1e4d6ee-9f6f-43f8-a618-24f3d84da28f" targetNamespace="http://schemas.microsoft.com/office/2006/metadata/properties" ma:root="true" ma:fieldsID="5fbac08d56b1b04aa33acbc31e882ce9" ns2:_="" ns3:_="">
     <xsd:import namespace="f577acbf-5b0b-4b4f-9948-268e97f8d3a4"/>
@@ -16103,32 +16085,25 @@
 </ct:contentTypeSchema>
 </file>
 
-<file path=customXml/itemProps1.xml><?xml version="1.0" encoding="utf-8"?>
-<ds:datastoreItem xmlns:ds="http://schemas.openxmlformats.org/officeDocument/2006/customXml" ds:itemID="{617AB1FA-2F28-4684-9230-02ACEB6C0B0A}">
-  <ds:schemaRefs>
-    <ds:schemaRef ds:uri="b1e4d6ee-9f6f-43f8-a618-24f3d84da28f"/>
-    <ds:schemaRef ds:uri="http://purl.org/dc/terms/"/>
-    <ds:schemaRef ds:uri="http://schemas.openxmlformats.org/package/2006/metadata/core-properties"/>
-    <ds:schemaRef ds:uri="f577acbf-5b0b-4b4f-9948-268e97f8d3a4"/>
-    <ds:schemaRef ds:uri="http://schemas.microsoft.com/office/2006/documentManagement/types"/>
-    <ds:schemaRef ds:uri="http://schemas.microsoft.com/office/infopath/2007/PartnerControls"/>
-    <ds:schemaRef ds:uri="http://purl.org/dc/elements/1.1/"/>
-    <ds:schemaRef ds:uri="http://schemas.microsoft.com/office/2006/metadata/properties"/>
-    <ds:schemaRef ds:uri="http://www.w3.org/XML/1998/namespace"/>
-    <ds:schemaRef ds:uri="http://purl.org/dc/dcmitype/"/>
-  </ds:schemaRefs>
-</ds:datastoreItem>
+<file path=customXml/item2.xml><?xml version="1.0" encoding="utf-8"?>
+<?mso-contentType ?>
+<FormTemplates xmlns="http://schemas.microsoft.com/sharepoint/v3/contenttype/forms">
+  <Display>DocumentLibraryForm</Display>
+  <Edit>DocumentLibraryForm</Edit>
+  <New>DocumentLibraryForm</New>
+</FormTemplates>
 </file>
 
-<file path=customXml/itemProps2.xml><?xml version="1.0" encoding="utf-8"?>
-<ds:datastoreItem xmlns:ds="http://schemas.openxmlformats.org/officeDocument/2006/customXml" ds:itemID="{E21AFCC0-734A-4A90-A597-A1CB34860DCD}">
-  <ds:schemaRefs>
-    <ds:schemaRef ds:uri="http://schemas.microsoft.com/sharepoint/v3/contenttype/forms"/>
-  </ds:schemaRefs>
-</ds:datastoreItem>
+<file path=customXml/item3.xml><?xml version="1.0" encoding="utf-8"?>
+<p:properties xmlns:p="http://schemas.microsoft.com/office/2006/metadata/properties" xmlns:xsi="http://www.w3.org/2001/XMLSchema-instance" xmlns:pc="http://schemas.microsoft.com/office/infopath/2007/PartnerControls">
+  <documentManagement>
+    <Document_x0020_Purpose xmlns="f577acbf-5b0b-4b4f-9948-268e97f8d3a4">Informational</Document_x0020_Purpose>
+    <Initiatives xmlns="f577acbf-5b0b-4b4f-9948-268e97f8d3a4"/>
+  </documentManagement>
+</p:properties>
 </file>
 
-<file path=customXml/itemProps3.xml><?xml version="1.0" encoding="utf-8"?>
+<file path=customXml/itemProps1.xml><?xml version="1.0" encoding="utf-8"?>
 <ds:datastoreItem xmlns:ds="http://schemas.openxmlformats.org/officeDocument/2006/customXml" ds:itemID="{A79EAE08-AAD0-49B9-BF66-164C225CC523}">
   <ds:schemaRefs>
     <ds:schemaRef ds:uri="http://schemas.microsoft.com/office/2006/metadata/contentType"/>
@@ -16145,4 +16120,29 @@
     <ds:schemaRef ds:uri="http://schemas.microsoft.com/internal/obd"/>
   </ds:schemaRefs>
 </ds:datastoreItem>
+</file>
+
+<file path=customXml/itemProps2.xml><?xml version="1.0" encoding="utf-8"?>
+<ds:datastoreItem xmlns:ds="http://schemas.openxmlformats.org/officeDocument/2006/customXml" ds:itemID="{E21AFCC0-734A-4A90-A597-A1CB34860DCD}">
+  <ds:schemaRefs>
+    <ds:schemaRef ds:uri="http://schemas.microsoft.com/sharepoint/v3/contenttype/forms"/>
+  </ds:schemaRefs>
+</ds:datastoreItem>
+</file>
+
+<file path=customXml/itemProps3.xml><?xml version="1.0" encoding="utf-8"?>
+<ds:datastoreItem xmlns:ds="http://schemas.openxmlformats.org/officeDocument/2006/customXml" ds:itemID="{617AB1FA-2F28-4684-9230-02ACEB6C0B0A}">
+  <ds:schemaRefs>
+    <ds:schemaRef ds:uri="b1e4d6ee-9f6f-43f8-a618-24f3d84da28f"/>
+    <ds:schemaRef ds:uri="http://purl.org/dc/terms/"/>
+    <ds:schemaRef ds:uri="http://schemas.openxmlformats.org/package/2006/metadata/core-properties"/>
+    <ds:schemaRef ds:uri="f577acbf-5b0b-4b4f-9948-268e97f8d3a4"/>
+    <ds:schemaRef ds:uri="http://schemas.microsoft.com/office/2006/documentManagement/types"/>
+    <ds:schemaRef ds:uri="http://schemas.microsoft.com/office/infopath/2007/PartnerControls"/>
+    <ds:schemaRef ds:uri="http://purl.org/dc/elements/1.1/"/>
+    <ds:schemaRef ds:uri="http://schemas.microsoft.com/office/2006/metadata/properties"/>
+    <ds:schemaRef ds:uri="http://www.w3.org/XML/1998/namespace"/>
+    <ds:schemaRef ds:uri="http://purl.org/dc/dcmitype/"/>
+  </ds:schemaRefs>
+</ds:datastoreItem>
 </file>
--- a/livrables/support_reporting_direction.pptx
+++ b/livrables/support_reporting_direction.pptx
@@ -5,7 +5,7 @@
     <p:sldMasterId id="2147483660" r:id="rId4"/>
   </p:sldMasterIdLst>
   <p:notesMasterIdLst>
-    <p:notesMasterId r:id="rId13"/>
+    <p:notesMasterId r:id="rId14"/>
   </p:notesMasterIdLst>
   <p:sldIdLst>
     <p:sldId id="261" r:id="rId5"/>
@@ -16,6 +16,7 @@
     <p:sldId id="267" r:id="rId10"/>
     <p:sldId id="272" r:id="rId11"/>
     <p:sldId id="273" r:id="rId12"/>
+    <p:sldId id="274" r:id="rId13"/>
   </p:sldIdLst>
   <p:sldSz cx="12192000" cy="6858000"/>
   <p:notesSz cx="6858000" cy="9144000"/>
@@ -1535,6 +1536,99 @@
     <p:extLst>
       <p:ext uri="{BB962C8B-B14F-4D97-AF65-F5344CB8AC3E}">
         <p14:creationId xmlns:p14="http://schemas.microsoft.com/office/powerpoint/2010/main" val="1223989853"/>
+      </p:ext>
+    </p:extLst>
+  </p:cSld>
+  <p:clrMapOvr>
+    <a:masterClrMapping/>
+  </p:clrMapOvr>
+</p:notes>
+</file>
+
+<file path=ppt/notesSlides/notesSlide9.xml><?xml version="1.0" encoding="utf-8"?>
+<p:notes xmlns:a="http://schemas.openxmlformats.org/drawingml/2006/main" xmlns:r="http://schemas.openxmlformats.org/officeDocument/2006/relationships" xmlns:p="http://schemas.openxmlformats.org/presentationml/2006/main">
+  <p:cSld>
+    <p:spTree>
+      <p:nvGrpSpPr>
+        <p:cNvPr id="1" name=""/>
+        <p:cNvGrpSpPr/>
+        <p:nvPr/>
+      </p:nvGrpSpPr>
+      <p:grpSpPr>
+        <a:xfrm>
+          <a:off x="0" y="0"/>
+          <a:ext cx="0" cy="0"/>
+          <a:chOff x="0" y="0"/>
+          <a:chExt cx="0" cy="0"/>
+        </a:xfrm>
+      </p:grpSpPr>
+      <p:sp>
+        <p:nvSpPr>
+          <p:cNvPr id="2" name="Espace réservé de l'image des diapositives 1"/>
+          <p:cNvSpPr>
+            <a:spLocks noGrp="1" noRot="1" noChangeAspect="1"/>
+          </p:cNvSpPr>
+          <p:nvPr>
+            <p:ph type="sldImg"/>
+          </p:nvPr>
+        </p:nvSpPr>
+        <p:spPr/>
+      </p:sp>
+      <p:sp>
+        <p:nvSpPr>
+          <p:cNvPr id="3" name="Espace réservé des notes 2"/>
+          <p:cNvSpPr>
+            <a:spLocks noGrp="1"/>
+          </p:cNvSpPr>
+          <p:nvPr>
+            <p:ph type="body" idx="1"/>
+          </p:nvPr>
+        </p:nvSpPr>
+        <p:spPr/>
+        <p:txBody>
+          <a:bodyPr/>
+          <a:lstStyle/>
+          <a:p>
+            <a:r>
+              <a:rPr lang="fr-FR"/>
+              <a:t>[SLIDE ANNEXE : NE PAS PRESENTER DANS LES 10 MINUTES. L'afficher seulement si le jury pose une question technique.]
+QUAND L'UTILISER : questions du type "parlez-moi de l'architecture", "qu'avez-vous fait techniquement", "comment garantissez-vous la qualité des données", "d'où viennent les données".
+REPONSE TYPE (mot a mot) :
+"Volontairement, je n'ai pas mis de technique dans le reporting : la charte impose un vocabulaire non technique pour la direction. Mais bien sûr, en tant que Lead Data, je pilote le socle : permettez-moi de vous montrer l'annexe.
+La chaîne collecte les signaux de mobilité et les centralise dans un entrepôt de données. Mon équipe garantit la qualité : contrôles automatisés de complétude et de cohérence, car sans qualité data, aucun indicateur n'est fiable. Le modèle de détection d'anomalies est surveillé par le MLOps, et je pilote le réglage des seuils : c'est comme ça qu'on fera passer les fausses alertes de 28 à 15 %. Côté restitution : une API de consultation, le tableau de bord interne et les exports CSV avec gestion des permissions.
+Et mon rôle transverse : chaque KPI a sa formule documentée et son owner, le canal de feedback est structuré, et l'empreinte numérique est estimée par run pour l'indicateur RSE.
+Le développement lui-même relève des épreuves E2 et E3 : ici, mon travail est de piloter la qualité, la fiabilité et l'exploitation de ce socle."</a:t>
+            </a:r>
+          </a:p>
+        </p:txBody>
+      </p:sp>
+      <p:sp>
+        <p:nvSpPr>
+          <p:cNvPr id="4" name="Espace réservé du numéro de diapositive 3"/>
+          <p:cNvSpPr>
+            <a:spLocks noGrp="1"/>
+          </p:cNvSpPr>
+          <p:nvPr>
+            <p:ph type="sldNum" sz="quarter" idx="5"/>
+          </p:nvPr>
+        </p:nvSpPr>
+        <p:spPr/>
+        <p:txBody>
+          <a:bodyPr/>
+          <a:lstStyle/>
+          <a:p>
+            <a:fld id="{A3CC0119-F7B7-4A0B-8522-9FAF141D766A}" type="slidenum">
+              <a:rPr lang="fr-FR" smtClean="0"/>
+              <a:t>9</a:t>
+            </a:fld>
+            <a:endParaRPr lang="fr-FR"/>
+          </a:p>
+        </p:txBody>
+      </p:sp>
+    </p:spTree>
+    <p:extLst>
+      <p:ext uri="{BB962C8B-B14F-4D97-AF65-F5344CB8AC3E}">
+        <p14:creationId xmlns:p14="http://schemas.microsoft.com/office/powerpoint/2010/main" val="1289061042"/>
       </p:ext>
     </p:extLst>
   </p:cSld>
@@ -5019,21 +5113,28 @@
         </p:spPr>
         <p:txBody>
           <a:bodyPr vertOverflow="overflow" vert="horz" wrap="square" rtlCol="0" anchor="t">
-            <a:spAutoFit/>
+            <a:normAutofit/>
           </a:bodyPr>
           <a:lstStyle/>
           <a:p>
             <a:pPr algn="l"/>
             <a:r>
-              <a:rPr lang="fr-FR" sz="1700" dirty="0">
+              <a:rPr lang="fr-FR" sz="1700">
                 <a:solidFill>
                   <a:srgbClr val="1B2A38"/>
                 </a:solidFill>
                 <a:latin typeface="Segoe UI"/>
                 <a:cs typeface="Segoe UI"/>
               </a:rPr>
-              <a:t>Sécuriser l'adoption d'un prototype existant : organisation, gouvernance, accompagnement.</a:t>
-            </a:r>
+              <a:t>La solution existe déjà en prototype : ma mission n'est pas de la développer, mais d'organiser son adoption en 12 semaines.</a:t>
+            </a:r>
+            <a:endParaRPr lang="fr-FR" sz="1700" dirty="0">
+              <a:solidFill>
+                <a:srgbClr val="1B2A38"/>
+              </a:solidFill>
+              <a:latin typeface="Segoe UI"/>
+              <a:cs typeface="Segoe UI"/>
+            </a:endParaRPr>
           </a:p>
         </p:txBody>
       </p:sp>
@@ -5199,7 +5300,7 @@
         <p:spPr>
           <a:xfrm>
             <a:off x="9194800" y="2794000"/>
-            <a:ext cx="2082800" cy="254000"/>
+            <a:ext cx="2082800" cy="646331"/>
           </a:xfrm>
           <a:prstGeom prst="rect">
             <a:avLst/>
@@ -5208,19 +5309,24 @@
         </p:spPr>
         <p:txBody>
           <a:bodyPr vertOverflow="overflow" vert="horz" wrap="square" rtlCol="0" anchor="t">
-            <a:spAutoFit/>
+            <a:normAutofit/>
           </a:bodyPr>
           <a:lstStyle/>
           <a:p>
             <a:pPr algn="l"/>
             <a:r>
-              <a:rPr lang="fr-FR" sz="1200" i="1" dirty="0">
+              <a:rPr lang="fr-FR" sz="1200" i="1">
                 <a:solidFill>
                   <a:srgbClr val="5D6D7E"/>
                 </a:solidFill>
               </a:rPr>
-              <a:t>Aucun obstacle bloquant</a:t>
-            </a:r>
+              <a:t>Aucun obstacle bloquant : lancement conforme au calendrier</a:t>
+            </a:r>
+            <a:endParaRPr lang="fr-FR" sz="1200" i="1" dirty="0">
+              <a:solidFill>
+                <a:srgbClr val="5D6D7E"/>
+              </a:solidFill>
+            </a:endParaRPr>
           </a:p>
         </p:txBody>
       </p:sp>
@@ -5440,7 +5546,7 @@
         <p:spPr>
           <a:xfrm>
             <a:off x="1828800" y="5740400"/>
-            <a:ext cx="2489200" cy="228600"/>
+            <a:ext cx="2489200" cy="600164"/>
           </a:xfrm>
           <a:prstGeom prst="rect">
             <a:avLst/>
@@ -5449,7 +5555,7 @@
         </p:spPr>
         <p:txBody>
           <a:bodyPr vertOverflow="overflow" vert="horz" wrap="square" rtlCol="0" anchor="t">
-            <a:spAutoFit/>
+            <a:normAutofit/>
           </a:bodyPr>
           <a:lstStyle/>
           <a:p>
@@ -5460,7 +5566,7 @@
                   <a:srgbClr val="5D6D7E"/>
                 </a:solidFill>
               </a:rPr>
-              <a:t>Un plan projet en 12 semaines</a:t>
+              <a:t>Un plan projet en 12 semaines : 4 phases, 5 jalons, dépendances maîtrisées</a:t>
             </a:r>
           </a:p>
         </p:txBody>
@@ -5641,7 +5747,7 @@
         <p:spPr>
           <a:xfrm>
             <a:off x="5207000" y="5740400"/>
-            <a:ext cx="2489200" cy="228600"/>
+            <a:ext cx="2489200" cy="430887"/>
           </a:xfrm>
           <a:prstGeom prst="rect">
             <a:avLst/>
@@ -5650,7 +5756,7 @@
         </p:spPr>
         <p:txBody>
           <a:bodyPr vertOverflow="overflow" vert="horz" wrap="square" rtlCol="0" anchor="t">
-            <a:spAutoFit/>
+            <a:normAutofit/>
           </a:bodyPr>
           <a:lstStyle/>
           <a:p>
@@ -5661,7 +5767,7 @@
                   <a:srgbClr val="5D6D7E"/>
                 </a:solidFill>
               </a:rPr>
-              <a:t>Des rôles clairs, un arbitrage</a:t>
+              <a:t>Des rôles clairs (RACI) et un comité d'arbitrage hebdomadaire</a:t>
             </a:r>
           </a:p>
         </p:txBody>
@@ -5842,7 +5948,7 @@
         <p:spPr>
           <a:xfrm>
             <a:off x="8585200" y="5740400"/>
-            <a:ext cx="2489200" cy="228600"/>
+            <a:ext cx="2489200" cy="430887"/>
           </a:xfrm>
           <a:prstGeom prst="rect">
             <a:avLst/>
@@ -5851,7 +5957,7 @@
         </p:spPr>
         <p:txBody>
           <a:bodyPr vertOverflow="overflow" vert="horz" wrap="square" rtlCol="0" anchor="t">
-            <a:spAutoFit/>
+            <a:normAutofit/>
           </a:bodyPr>
           <a:lstStyle/>
           <a:p>
@@ -5862,7 +5968,7 @@
                   <a:srgbClr val="5D6D7E"/>
                 </a:solidFill>
               </a:rPr>
-              <a:t>Une formation par profil</a:t>
+              <a:t>Une formation courte et accessible, adaptée aux 4 profils d'utilisateurs</a:t>
             </a:r>
           </a:p>
         </p:txBody>
@@ -7734,7 +7840,9 @@
           </a:fontRef>
         </p:style>
         <p:txBody>
-          <a:bodyPr vertOverflow="clip" horzOverflow="clip" rtlCol="0" anchor="ctr" anchorCtr="0"/>
+          <a:bodyPr vertOverflow="clip" horzOverflow="clip" rtlCol="0" anchor="ctr" anchorCtr="0">
+            <a:normAutofit/>
+          </a:bodyPr>
           <a:lstStyle/>
           <a:p>
             <a:pPr algn="l"/>
@@ -7746,7 +7854,7 @@
                 <a:latin typeface="Segoe UI Semibold"/>
                 <a:cs typeface="Segoe UI Semibold"/>
               </a:rPr>
-              <a:t>✓  Les formations se terminent avant le début du pilote.</a:t>
+              <a:t>✓  Les formations se terminent avant le pilote (S10) : un pilote avec des utilisateurs non formés mesurerait l'échec de la formation, pas la valeur de l'outil. L'ordre suit les dépendances réelles : les rôles avant la procédure d'escalade, les indicateurs avant le reporting.</a:t>
             </a:r>
           </a:p>
         </p:txBody>
@@ -8072,7 +8180,7 @@
         <p:spPr>
           <a:xfrm>
             <a:off x="1346200" y="2235200"/>
-            <a:ext cx="4356100" cy="276999"/>
+            <a:ext cx="4356100" cy="461665"/>
           </a:xfrm>
           <a:prstGeom prst="rect">
             <a:avLst/>
@@ -8081,7 +8189,7 @@
         </p:spPr>
         <p:txBody>
           <a:bodyPr vertOverflow="overflow" vert="horz" wrap="square" rtlCol="0" anchor="t">
-            <a:spAutoFit/>
+            <a:normAutofit/>
           </a:bodyPr>
           <a:lstStyle/>
           <a:p>
@@ -8094,7 +8202,7 @@
                 <a:latin typeface="Segoe UI"/>
                 <a:cs typeface="Segoe UI"/>
               </a:rPr>
-              <a:t>Produit · évolutions planifiables, cadence lisible</a:t>
+              <a:t>Produit · les évolutions sont planifiables : 3 sprints de 2 semaines, cadence lisible pour la direction</a:t>
             </a:r>
           </a:p>
         </p:txBody>
@@ -8212,7 +8320,7 @@
         <p:spPr>
           <a:xfrm>
             <a:off x="6362700" y="2235200"/>
-            <a:ext cx="4356100" cy="276999"/>
+            <a:ext cx="4356100" cy="461665"/>
           </a:xfrm>
           <a:prstGeom prst="rect">
             <a:avLst/>
@@ -8221,7 +8329,7 @@
         </p:spPr>
         <p:txBody>
           <a:bodyPr vertOverflow="overflow" vert="horz" wrap="square" rtlCol="0" anchor="t">
-            <a:spAutoFit/>
+            <a:normAutofit/>
           </a:bodyPr>
           <a:lstStyle/>
           <a:p>
@@ -8234,7 +8342,7 @@
                 <a:latin typeface="Segoe UI"/>
                 <a:cs typeface="Segoe UI"/>
               </a:rPr>
-              <a:t>Support · flux imprévisible, file de priorités</a:t>
+              <a:t>Support · demandes imprévisibles : traitement en continu avec une file de priorités limitée</a:t>
             </a:r>
           </a:p>
         </p:txBody>
@@ -8352,7 +8460,7 @@
         <p:spPr>
           <a:xfrm>
             <a:off x="1346200" y="3276600"/>
-            <a:ext cx="9398000" cy="276999"/>
+            <a:ext cx="9398000" cy="461665"/>
           </a:xfrm>
           <a:prstGeom prst="rect">
             <a:avLst/>
@@ -8361,7 +8469,7 @@
         </p:spPr>
         <p:txBody>
           <a:bodyPr vertOverflow="overflow" vert="horz" wrap="square" rtlCol="0" anchor="t">
-            <a:spAutoFit/>
+            <a:normAutofit/>
           </a:bodyPr>
           <a:lstStyle/>
           <a:p>
@@ -8374,7 +8482,7 @@
                 <a:latin typeface="Segoe UI"/>
                 <a:cs typeface="Segoe UI"/>
               </a:rPr>
-              <a:t>Product Owner  ·  Lead Data  ·  référent métier  ·  règle les conflits de priorités en jours, pas en mois.</a:t>
+              <a:t>Product Owner  ·  Lead Data  ·  référent métier  ·  règle les conflits de priorités en jours, pas en mois. Exemple : export CSV ou alertes lisibles en premier ? Le PO tranche chaque lundi en 30 minutes, éclairé par la charge et les dépendances techniques.</a:t>
             </a:r>
           </a:p>
         </p:txBody>
@@ -8532,7 +8640,7 @@
         <p:spPr>
           <a:xfrm>
             <a:off x="1320800" y="4521200"/>
-            <a:ext cx="2819400" cy="508000"/>
+            <a:ext cx="2819400" cy="461665"/>
           </a:xfrm>
           <a:prstGeom prst="rect">
             <a:avLst/>
@@ -8541,7 +8649,7 @@
         </p:spPr>
         <p:txBody>
           <a:bodyPr vertOverflow="overflow" vert="horz" wrap="square" rtlCol="0" anchor="t">
-            <a:spAutoFit/>
+            <a:normAutofit/>
           </a:bodyPr>
           <a:lstStyle/>
           <a:p>
@@ -8554,7 +8662,7 @@
                 <a:latin typeface="Segoe UI"/>
                 <a:cs typeface="Segoe UI"/>
               </a:rPr>
-              <a:t>Priorisation du backlog</a:t>
+              <a:t>Priorise le backlog et porte la valeur métier</a:t>
             </a:r>
           </a:p>
         </p:txBody>
@@ -8670,7 +8778,7 @@
         <p:spPr>
           <a:xfrm>
             <a:off x="4622800" y="4521200"/>
-            <a:ext cx="2819400" cy="508000"/>
+            <a:ext cx="2819400" cy="646331"/>
           </a:xfrm>
           <a:prstGeom prst="rect">
             <a:avLst/>
@@ -8679,7 +8787,7 @@
         </p:spPr>
         <p:txBody>
           <a:bodyPr vertOverflow="overflow" vert="horz" wrap="square" rtlCol="0" anchor="t">
-            <a:spAutoFit/>
+            <a:normAutofit/>
           </a:bodyPr>
           <a:lstStyle/>
           <a:p>
@@ -8692,7 +8800,7 @@
                 <a:latin typeface="Segoe UI"/>
                 <a:cs typeface="Segoe UI"/>
               </a:rPr>
-              <a:t>Planification · fiabilité des KPI · reporting</a:t>
+              <a:t>Planifie le projet, garantit la fiabilité des indicateurs, rend compte à la direction</a:t>
             </a:r>
           </a:p>
         </p:txBody>
@@ -8810,7 +8918,7 @@
         <p:spPr>
           <a:xfrm>
             <a:off x="7924800" y="4521200"/>
-            <a:ext cx="2819400" cy="508000"/>
+            <a:ext cx="2819400" cy="461665"/>
           </a:xfrm>
           <a:prstGeom prst="rect">
             <a:avLst/>
@@ -8819,7 +8927,7 @@
         </p:spPr>
         <p:txBody>
           <a:bodyPr vertOverflow="overflow" vert="horz" wrap="square" rtlCol="0" anchor="t">
-            <a:spAutoFit/>
+            <a:normAutofit/>
           </a:bodyPr>
           <a:lstStyle/>
           <a:p>
@@ -8832,7 +8940,7 @@
                 <a:latin typeface="Segoe UI"/>
                 <a:cs typeface="Segoe UI"/>
               </a:rPr>
-              <a:t>Validation de chaque support</a:t>
+              <a:t>Valide l'accessibilité de chaque support avant toute diffusion</a:t>
             </a:r>
           </a:p>
         </p:txBody>
@@ -9808,7 +9916,7 @@
         <p:spPr>
           <a:xfrm>
             <a:off x="8216900" y="4457700"/>
-            <a:ext cx="1905000" cy="304800"/>
+            <a:ext cx="1905000" cy="784830"/>
           </a:xfrm>
           <a:prstGeom prst="rect">
             <a:avLst/>
@@ -9817,7 +9925,7 @@
         </p:spPr>
         <p:txBody>
           <a:bodyPr vertOverflow="overflow" vert="horz" wrap="square" rtlCol="0" anchor="t">
-            <a:spAutoFit/>
+            <a:normAutofit/>
           </a:bodyPr>
           <a:lstStyle/>
           <a:p>
@@ -9830,7 +9938,7 @@
                 <a:latin typeface="Segoe UI Semibold"/>
                 <a:cs typeface="Segoe UI Semibold"/>
               </a:rPr>
-              <a:t>Définie S4 · suivi mensuel</a:t>
+              <a:t>Formule définie en S4, puis suivi mensuel</a:t>
             </a:r>
           </a:p>
         </p:txBody>
@@ -9946,7 +10054,9 @@
           </a:fontRef>
         </p:style>
         <p:txBody>
-          <a:bodyPr vertOverflow="clip" horzOverflow="clip" wrap="square" rtlCol="0" anchor="ctr" anchorCtr="0"/>
+          <a:bodyPr vertOverflow="clip" horzOverflow="clip" wrap="square" rtlCol="0" anchor="ctr" anchorCtr="0">
+            <a:normAutofit/>
+          </a:bodyPr>
           <a:lstStyle/>
           <a:p>
             <a:pPr algn="l"/>
@@ -9958,7 +10068,7 @@
                 <a:latin typeface="Segoe UI Semibold"/>
                 <a:cs typeface="Segoe UI Semibold"/>
               </a:rPr>
-              <a:t>Chaque indicateur a un responsable, une formule documentée, et une action prévue en cas de dérive.</a:t>
+              <a:t>Adoption : de 35 % à 75 % · Compréhension d'une alerte : de 5 à 2 minutes · Fausses alertes : de 28 % à 15 %. Chaque indicateur a un responsable, une formule documentée au glossaire et une action prévue en cas de dérive. Tous les chiffres proviennent du dossier fourni par la direction.</a:t>
             </a:r>
           </a:p>
         </p:txBody>
@@ -11130,7 +11240,9 @@
           </a:fontRef>
         </p:style>
         <p:txBody>
-          <a:bodyPr vertOverflow="clip" horzOverflow="clip" wrap="square" rtlCol="0" anchor="t" anchorCtr="0"/>
+          <a:bodyPr vertOverflow="clip" horzOverflow="clip" wrap="square" rtlCol="0" anchor="t" anchorCtr="0">
+            <a:normAutofit/>
+          </a:bodyPr>
           <a:lstStyle/>
           <a:p>
             <a:pPr algn="l"/>
@@ -11142,7 +11254,7 @@
                 <a:latin typeface="Segoe UI Semibold"/>
                 <a:cs typeface="Segoe UI Semibold"/>
               </a:rPr>
-              <a:t>Chaque risque a un plan B avec un seuil déclencheur défini à l'avance.</a:t>
+              <a:t>Chaque risque a un plan B avec un seuil déclencheur défini à l'avance : la décision difficile est préparée à froid, pas dans la panique.</a:t>
             </a:r>
           </a:p>
         </p:txBody>
@@ -12673,7 +12785,9 @@
           </a:fontRef>
         </p:style>
         <p:txBody>
-          <a:bodyPr vertOverflow="clip" horzOverflow="clip" wrap="square" rtlCol="0" anchor="ctr" anchorCtr="0"/>
+          <a:bodyPr vertOverflow="clip" horzOverflow="clip" wrap="square" rtlCol="0" anchor="ctr" anchorCtr="0">
+            <a:normAutofit/>
+          </a:bodyPr>
           <a:lstStyle/>
           <a:p>
             <a:pPr algn="l"/>
@@ -12685,7 +12799,7 @@
                 <a:latin typeface="Segoe UI Semibold"/>
                 <a:cs typeface="Segoe UI Semibold"/>
               </a:rPr>
-              <a:t>L'ordre des sprints reflète directement ces priorités.   ·   2 autres retours suivis au registre.</a:t>
+              <a:t>Trois retours cumulent impact fort et fréquence élevée : ils passent en premier. L'accessibilité est remontée en priorité, exigence d'inclusion. L'ordre des sprints reflète directement ces priorités.   ·   2 autres retours suivis au registre.</a:t>
             </a:r>
           </a:p>
         </p:txBody>
@@ -12969,7 +13083,7 @@
         <p:spPr>
           <a:xfrm>
             <a:off x="1066800" y="2514600"/>
-            <a:ext cx="2044700" cy="508000"/>
+            <a:ext cx="2044700" cy="646331"/>
           </a:xfrm>
           <a:prstGeom prst="rect">
             <a:avLst/>
@@ -12978,7 +13092,7 @@
         </p:spPr>
         <p:txBody>
           <a:bodyPr vertOverflow="overflow" vert="horz" wrap="square" rtlCol="0" anchor="t">
-            <a:spAutoFit/>
+            <a:normAutofit/>
           </a:bodyPr>
           <a:lstStyle/>
           <a:p>
@@ -12991,7 +13105,7 @@
                 <a:latin typeface="Segoe UI"/>
                 <a:cs typeface="Segoe UI"/>
               </a:rPr>
-              <a:t>Atelier 45 min, cas réels</a:t>
+              <a:t>Atelier 45 min sur cas réels + fiche réflexe des indicateurs critiques</a:t>
             </a:r>
           </a:p>
         </p:txBody>
@@ -13109,7 +13223,7 @@
         <p:spPr>
           <a:xfrm>
             <a:off x="3619500" y="2514600"/>
-            <a:ext cx="2044700" cy="508000"/>
+            <a:ext cx="2044700" cy="646331"/>
           </a:xfrm>
           <a:prstGeom prst="rect">
             <a:avLst/>
@@ -13118,7 +13232,7 @@
         </p:spPr>
         <p:txBody>
           <a:bodyPr vertOverflow="overflow" vert="horz" wrap="square" rtlCol="0" anchor="t">
-            <a:spAutoFit/>
+            <a:normAutofit/>
           </a:bodyPr>
           <a:lstStyle/>
           <a:p>
@@ -13131,7 +13245,7 @@
                 <a:latin typeface="Segoe UI"/>
                 <a:cs typeface="Segoe UI"/>
               </a:rPr>
-              <a:t>Prise en main en binôme, sur poste</a:t>
+              <a:t>Binôme sur poste : 2 sessions de 30 min sur alertes réelles</a:t>
             </a:r>
           </a:p>
         </p:txBody>
@@ -13249,7 +13363,7 @@
         <p:spPr>
           <a:xfrm>
             <a:off x="6172200" y="2514600"/>
-            <a:ext cx="2044700" cy="508000"/>
+            <a:ext cx="2044700" cy="461665"/>
           </a:xfrm>
           <a:prstGeom prst="rect">
             <a:avLst/>
@@ -13258,7 +13372,7 @@
         </p:spPr>
         <p:txBody>
           <a:bodyPr vertOverflow="overflow" vert="horz" wrap="square" rtlCol="0" anchor="t">
-            <a:spAutoFit/>
+            <a:normAutofit/>
           </a:bodyPr>
           <a:lstStyle/>
           <a:p>
@@ -13271,7 +13385,7 @@
                 <a:latin typeface="Segoe UI"/>
                 <a:cs typeface="Segoe UI"/>
               </a:rPr>
-              <a:t>Atelier 45 min, cas réels</a:t>
+              <a:t>Atelier 45 min + glossaire des indicateurs et exports</a:t>
             </a:r>
           </a:p>
         </p:txBody>
@@ -13389,7 +13503,7 @@
         <p:spPr>
           <a:xfrm>
             <a:off x="8724900" y="2514600"/>
-            <a:ext cx="2044700" cy="508000"/>
+            <a:ext cx="2044700" cy="646331"/>
           </a:xfrm>
           <a:prstGeom prst="rect">
             <a:avLst/>
@@ -13398,7 +13512,7 @@
         </p:spPr>
         <p:txBody>
           <a:bodyPr vertOverflow="overflow" vert="horz" wrap="square" rtlCol="0" anchor="t">
-            <a:spAutoFit/>
+            <a:normAutofit/>
           </a:bodyPr>
           <a:lstStyle/>
           <a:p>
@@ -13411,7 +13525,7 @@
                 <a:latin typeface="Segoe UI"/>
                 <a:cs typeface="Segoe UI"/>
               </a:rPr>
-              <a:t>Session dédiée, rythme adapté</a:t>
+              <a:t>Session dédiée : lecteur d'écran, sous-titres, rythme adapté</a:t>
             </a:r>
           </a:p>
         </p:txBody>
@@ -13636,7 +13750,7 @@
         <p:spPr>
           <a:xfrm>
             <a:off x="1066800" y="4241800"/>
-            <a:ext cx="5791200" cy="304800"/>
+            <a:ext cx="5791200" cy="492443"/>
           </a:xfrm>
           <a:prstGeom prst="rect">
             <a:avLst/>
@@ -13645,7 +13759,7 @@
         </p:spPr>
         <p:txBody>
           <a:bodyPr vertOverflow="overflow" vert="horz" wrap="square" rtlCol="0" anchor="t">
-            <a:spAutoFit/>
+            <a:normAutofit/>
           </a:bodyPr>
           <a:lstStyle/>
           <a:p>
@@ -13658,7 +13772,7 @@
                 <a:latin typeface="Segoe UI"/>
                 <a:cs typeface="Segoe UI"/>
               </a:rPr>
-              <a:t>Support en 2 niveaux avec procédure d'escalade claire</a:t>
+              <a:t>Support niveau 1 (FAQ, réponse sous 4 h ouvrées) puis niveau 2 (équipe data), avec procédure d'escalade claire</a:t>
             </a:r>
           </a:p>
         </p:txBody>
@@ -13776,7 +13890,7 @@
         <p:spPr>
           <a:xfrm>
             <a:off x="7366000" y="4241800"/>
-            <a:ext cx="3403600" cy="492443"/>
+            <a:ext cx="3403600" cy="692497"/>
           </a:xfrm>
           <a:prstGeom prst="rect">
             <a:avLst/>
@@ -13785,7 +13899,7 @@
         </p:spPr>
         <p:txBody>
           <a:bodyPr vertOverflow="overflow" vert="horz" wrap="square" rtlCol="0" anchor="t">
-            <a:spAutoFit/>
+            <a:normAutofit/>
           </a:bodyPr>
           <a:lstStyle/>
           <a:p>
@@ -13798,7 +13912,7 @@
                 <a:latin typeface="Segoe UI"/>
                 <a:cs typeface="Segoe UI"/>
               </a:rPr>
-              <a:t>100 % formés avant le pilote · satisfaction 4/5 min.</a:t>
+              <a:t>100 % des profils formés avant le pilote · satisfaction 4/5 min. · participation 90 % min.</a:t>
             </a:r>
           </a:p>
         </p:txBody>
@@ -15138,7 +15252,9 @@
           </a:fontRef>
         </p:style>
         <p:txBody>
-          <a:bodyPr vertOverflow="clip" horzOverflow="clip" wrap="square" rtlCol="0" anchor="ctr" anchorCtr="0"/>
+          <a:bodyPr vertOverflow="clip" horzOverflow="clip" wrap="square" rtlCol="0" anchor="ctr" anchorCtr="0">
+            <a:normAutofit/>
+          </a:bodyPr>
           <a:lstStyle/>
           <a:p>
             <a:pPr algn="l"/>
@@ -15150,7 +15266,7 @@
                 <a:latin typeface="Segoe UI Semibold"/>
                 <a:cs typeface="Segoe UI Semibold"/>
               </a:rPr>
-              <a:t>Prochaines étapes :  lancement du cadrage  ·  1er reporting hebdomadaire en S3  ·  jalon J1 en fin de S2.</a:t>
+              <a:t>Prochaines étapes :  si vous validez aujourd'hui, le cadrage démarre immédiatement et le premier comité d'arbitrage se tient dès lundi  ·  1er reporting hebdomadaire en S3  ·  jalon J1 en fin de S2.</a:t>
             </a:r>
           </a:p>
         </p:txBody>
@@ -15201,6 +15317,150 @@
     <p:extLst>
       <p:ext uri="{BB962C8B-B14F-4D97-AF65-F5344CB8AC3E}">
         <p14:creationId xmlns:p14="http://schemas.microsoft.com/office/powerpoint/2010/main" val="890942716"/>
+      </p:ext>
+    </p:extLst>
+  </p:cSld>
+  <p:clrMapOvr>
+    <a:masterClrMapping/>
+  </p:clrMapOvr>
+</p:sld>
+</file>
+
+<file path=ppt/slides/slide9.xml><?xml version="1.0" encoding="utf-8"?>
+<p:sld xmlns:a="http://schemas.openxmlformats.org/drawingml/2006/main" xmlns:r="http://schemas.openxmlformats.org/officeDocument/2006/relationships" xmlns:p="http://schemas.openxmlformats.org/presentationml/2006/main">
+  <p:cSld>
+    <p:spTree>
+      <p:nvGrpSpPr>
+        <p:cNvPr id="1" name=""/>
+        <p:cNvGrpSpPr/>
+        <p:nvPr/>
+      </p:nvGrpSpPr>
+      <p:grpSpPr>
+        <a:xfrm>
+          <a:off x="0" y="0"/>
+          <a:ext cx="0" cy="0"/>
+          <a:chOff x="0" y="0"/>
+          <a:chExt cx="0" cy="0"/>
+        </a:xfrm>
+      </p:grpSpPr>
+      <p:sp>
+        <p:nvSpPr>
+          <p:cNvPr id="2" name="ZoneTexte 1">
+            <a:extLst>
+              <a:ext uri="{FF2B5EF4-FFF2-40B4-BE49-F238E27FC236}">
+                <a16:creationId xmlns:a16="http://schemas.microsoft.com/office/drawing/2014/main" id="{E6F033A6-6BED-F3AC-37B9-269849BBF2C0}"/>
+              </a:ext>
+            </a:extLst>
+          </p:cNvPr>
+          <p:cNvSpPr txBox="1"/>
+          <p:nvPr/>
+        </p:nvSpPr>
+        <p:spPr>
+          <a:xfrm>
+            <a:off x="508000" y="317500"/>
+            <a:ext cx="11176000" cy="492443"/>
+          </a:xfrm>
+          <a:prstGeom prst="rect">
+            <a:avLst/>
+          </a:prstGeom>
+          <a:noFill/>
+        </p:spPr>
+        <p:txBody>
+          <a:bodyPr vert="horz" rtlCol="0">
+            <a:spAutoFit/>
+          </a:bodyPr>
+          <a:lstStyle/>
+          <a:p>
+            <a:r>
+              <a:rPr lang="fr-FR" sz="2600" b="1">
+                <a:solidFill>
+                  <a:srgbClr val="1A5276"/>
+                </a:solidFill>
+              </a:rPr>
+              <a:t>ANNEXE · Socle data et périmètre technique du Lead Data</a:t>
+            </a:r>
+          </a:p>
+        </p:txBody>
+      </p:sp>
+      <p:sp>
+        <p:nvSpPr>
+          <p:cNvPr id="3" name="ZoneTexte 2">
+            <a:extLst>
+              <a:ext uri="{FF2B5EF4-FFF2-40B4-BE49-F238E27FC236}">
+                <a16:creationId xmlns:a16="http://schemas.microsoft.com/office/drawing/2014/main" id="{FC94B1A7-6846-EFE3-4645-BAB741E9017C}"/>
+              </a:ext>
+            </a:extLst>
+          </p:cNvPr>
+          <p:cNvSpPr txBox="1"/>
+          <p:nvPr/>
+        </p:nvSpPr>
+        <p:spPr>
+          <a:xfrm>
+            <a:off x="508000" y="863600"/>
+            <a:ext cx="11176000" cy="292388"/>
+          </a:xfrm>
+          <a:prstGeom prst="rect">
+            <a:avLst/>
+          </a:prstGeom>
+          <a:noFill/>
+        </p:spPr>
+        <p:txBody>
+          <a:bodyPr vert="horz" rtlCol="0">
+            <a:spAutoFit/>
+          </a:bodyPr>
+          <a:lstStyle/>
+          <a:p>
+            <a:r>
+              <a:rPr lang="fr-FR" sz="1300" i="1"/>
+              <a:t>Présentée uniquement en réponse aux questions du jury · hors des 10 minutes de reporting</a:t>
+            </a:r>
+          </a:p>
+        </p:txBody>
+      </p:sp>
+      <p:sp>
+        <p:nvSpPr>
+          <p:cNvPr id="4" name="ZoneTexte 3">
+            <a:extLst>
+              <a:ext uri="{FF2B5EF4-FFF2-40B4-BE49-F238E27FC236}">
+                <a16:creationId xmlns:a16="http://schemas.microsoft.com/office/drawing/2014/main" id="{011E6270-0E63-8BBB-1C4F-7B2224AB157F}"/>
+              </a:ext>
+            </a:extLst>
+          </p:cNvPr>
+          <p:cNvSpPr txBox="1"/>
+          <p:nvPr/>
+        </p:nvSpPr>
+        <p:spPr>
+          <a:xfrm>
+            <a:off x="508000" y="1270000"/>
+            <a:ext cx="11176000" cy="3293209"/>
+          </a:xfrm>
+          <a:prstGeom prst="rect">
+            <a:avLst/>
+          </a:prstGeom>
+          <a:noFill/>
+        </p:spPr>
+        <p:txBody>
+          <a:bodyPr vert="horz" rtlCol="0">
+            <a:normAutofit/>
+          </a:bodyPr>
+          <a:lstStyle/>
+          <a:p>
+            <a:r>
+              <a:rPr lang="fr-FR" sz="1300"/>
+              <a:t>CHAINE DE DONNEES : collecte des signaux de mobilité (bus, tramways, vélos en libre-service, capteurs de trafic), ingestion en continu et centralisation dans un entrepôt de données. Je garantis la disponibilité et la fraîcheur des données.
+QUALITE DES DONNEES : contrôles automatisés (complétude, cohérence, doublons) et référentiels partagés. C'est le prérequis des tendances par ligne (B06) : sans qualité data, pas d'indicateur fiable.
+DETECTION D'ANOMALIES : modèle statistique surveillé par le MLOps ; je pilote le réglage des seuils pour réduire les fausses alertes de 28 % à 15 %, condition de la confiance des agents.
+RESTITUTION : API de consultation, tableau de bord interne, exports CSV pour les analystes (B05) avec gestion des permissions d'accès.
+MON PILOTAGE DE LEAD DATA : formules et owners des 7 KPI documentés au glossaire (réponse au risque R06), canal de feedback structuré (B10), estimation de l'empreinte numérique par run (indicateur RSE défini en S4).
+PERIMETRE : le développement relève des épreuves E2/E3. Dans ce projet, je pilote la qualité, la fiabilité et l'exploitation de ce socle : c'est ce qui fonde ma légitimité de Lead Data sur les indicateurs présentés.</a:t>
+            </a:r>
+          </a:p>
+        </p:txBody>
+      </p:sp>
+    </p:spTree>
+    <p:extLst>
+      <p:ext uri="{BB962C8B-B14F-4D97-AF65-F5344CB8AC3E}">
+        <p14:creationId xmlns:p14="http://schemas.microsoft.com/office/powerpoint/2010/main" val="605658703"/>
       </p:ext>
     </p:extLst>
   </p:cSld>

--- a/livrables/support_reporting_direction.pptx
+++ b/livrables/support_reporting_direction.pptx
@@ -198,7 +198,7 @@
             </a:lvl1pPr>
           </a:lstStyle>
           <a:p>
-            <a:fld id="{9FDD991C-C385-4F94-8008-D179E645D8E1}" type="datetimeFigureOut">
+            <a:fld id="{95913C9E-D2CD-4DC9-AAB1-39FD6CF37F58}" type="datetimeFigureOut">
               <a:rPr lang="fr-FR" smtClean="0"/>
               <a:t>21/07/2026</a:t>
             </a:fld>
@@ -356,7 +356,7 @@
             </a:lvl1pPr>
           </a:lstStyle>
           <a:p>
-            <a:fld id="{2EC29819-6A53-48D2-9DB0-EAF56D28E8F9}" type="slidenum">
+            <a:fld id="{10508356-4CDE-4E03-A342-AF460C750D3C}" type="slidenum">
               <a:rPr lang="fr-FR" smtClean="0"/>
               <a:t>‹N°›</a:t>
             </a:fld>
@@ -367,7 +367,7 @@
     </p:spTree>
     <p:extLst>
       <p:ext uri="{BB962C8B-B14F-4D97-AF65-F5344CB8AC3E}">
-        <p14:creationId xmlns:p14="http://schemas.microsoft.com/office/powerpoint/2010/main" val="4061289738"/>
+        <p14:creationId xmlns:p14="http://schemas.microsoft.com/office/powerpoint/2010/main" val="3122306594"/>
       </p:ext>
     </p:extLst>
   </p:cSld>
@@ -515,10 +515,10 @@
               <a:rPr lang="fr-FR"/>
               <a:t>[DUREE : 1 min 30 - STATUT GLOBAL : VERT]
 PITCH MOT A MOT :
-Bonjour a tous. Je suis Ouassim Megrad, Lead Data de l'equipe Megslab. La direction de NovaVille a confie le passage a l'echelle de MobilityPulse a l'equipe Data Engineering, dont je suis le responsable. Ma mission : securiser le deploiement pilote sur 12 semaines.
-Un point important avant de commencer : la solution existe deja, sous forme de prototype qui collecte les signaux de mobilite, detecte les anomalies et affiche des indicateurs. Mon travail n'est donc pas de la developper, mais d'organiser son adoption.
-La direction a constate trois limites : personne ne sait organiser le passage a l'echelle, les roles entre les equipes ne sont pas formalises, et les utilisateurs demandent de la formation et du support. Mon dossier repond a ces trois limites, point par point : un plan projet, une gouvernance claire, et un accompagnement par profil.
-Le statut global du projet est vert. Je vous presente le dispositif en huit points, et je terminerai par les quatre decisions que j'attends de ce comite.
+Bonjour a tous. Je suis Ouassim Megrad, Lead Data de l'équipe Megslab. La direction de NovaVille a confie le passage à l'échelle de MobilityPulse a l'équipe Data Engineering, dont je suis le responsable. Ma mission : sécuriser le déploiement pilote sur 12 semaines.
+Un point important avant de commencer : la solution existe déjà, sous forme de prototype qui collecte les signaux de mobilité, détecte les anomalies et affiche des indicateurs. Mon travail n'est donc pas de la développer, mais d'organiser son adoption.
+La direction a constate trois limites : personne ne sait organiser le passage à l'échelle, les rôles entre les équipes ne sont pas formalises, et les utilisateurs demandent de la formation et du support. Mon dossier repond a ces trois limites, point par point : un plan projet, une gouvernance claire, et un accompagnement par profil.
+Le statut global du projet est vert. Je vous presente le dispositif en huit points, et je terminerai par les quatre décisions que j'attends de ce comité.
 TRANSITION : "Commencons par le calendrier."</a:t>
             </a:r>
           </a:p>
@@ -539,7 +539,7 @@
           <a:bodyPr/>
           <a:lstStyle/>
           <a:p>
-            <a:fld id="{2EC29819-6A53-48D2-9DB0-EAF56D28E8F9}" type="slidenum">
+            <a:fld id="{10508356-4CDE-4E03-A342-AF460C750D3C}" type="slidenum">
               <a:rPr lang="fr-FR" smtClean="0"/>
               <a:t>1</a:t>
             </a:fld>
@@ -550,7 +550,7 @@
     </p:spTree>
     <p:extLst>
       <p:ext uri="{BB962C8B-B14F-4D97-AF65-F5344CB8AC3E}">
-        <p14:creationId xmlns:p14="http://schemas.microsoft.com/office/powerpoint/2010/main" val="3569691613"/>
+        <p14:creationId xmlns:p14="http://schemas.microsoft.com/office/powerpoint/2010/main" val="2172617741"/>
       </p:ext>
     </p:extLst>
   </p:cSld>
@@ -608,11 +608,11 @@
               <a:rPr lang="fr-FR"/>
               <a:t>[DUREE : 1 min 15]
 PITCH MOT A MOT :
-Le deploiement tient en 12 semaines, decoupe en quatre phases et cinq jalons. Deux semaines de cadrage pour installer la gouvernance. Puis six semaines de travail produit, en trois sprints de deux semaines. En parallele, a partir de la semaine 6, l'accompagnement des utilisateurs demarre. Et les deux dernieres semaines sont le deploiement pilote en conditions reelles.
-Vous remarquez que les phases produit et formation se chevauchent : c'est volontaire. Les agents ont peu de temps disponible, donc j'etale les formations sur cinq semaines. Et surtout, tout le monde est forme avant le pilote : un pilote avec des utilisateurs non formes mesurerait l'echec de la formation, pas la valeur de l'outil.
+Le déploiement tient en 12 semaines, decoupe en quatre phases et cinq jalons. Deux semaines de cadrage pour installer la gouvernance. Puis six semaines de travail produit, en trois sprints de deux semaines. En parallele, a partir de la semaine 6, l'accompagnement des utilisateurs demarre. Et les deux dernieres semaines sont le déploiement pilote en conditions réelles.
+Vous remarquez que les phases produit et formation se chevauchent : c'est volontaire. Les agents ont peu de temps disponible, donc j'etale les formations sur cinq semaines. Et surtout, tout le monde est forme avant le pilote : un pilote avec des utilisateurs non formés mesurerait l'échec de la formation, pas la valeur de l'outil.
 CAS CONCRET A RACONTER :
-"Pourquoi cet ordre de travail ? Un exemple : le support reclame une procedure d'escalade des incidents. Impossible de l'ecrire tant qu'on ne sait pas qui fait quoi : a qui on escalade ? C'est pour ca que la definition des roles se fait en semaines 1 et 2, et la procedure juste apres, au sprint 1."
-TRANSITION : "Justement, parlons des roles."</a:t>
+"Pourquoi cet ordre de travail ? Un exemple : le support reclame une procédure d'escalade des incidents. Impossible de l'ecrire tant qu'on ne sait pas qui fait quoi : a qui on escalade ? C'est pour ca que la definition des rôles se fait en semaines 1 et 2, et la procédure juste apres, au sprint 1."
+TRANSITION : "Justement, parlons des rôles."</a:t>
             </a:r>
           </a:p>
         </p:txBody>
@@ -632,7 +632,7 @@
           <a:bodyPr/>
           <a:lstStyle/>
           <a:p>
-            <a:fld id="{2EC29819-6A53-48D2-9DB0-EAF56D28E8F9}" type="slidenum">
+            <a:fld id="{10508356-4CDE-4E03-A342-AF460C750D3C}" type="slidenum">
               <a:rPr lang="fr-FR" smtClean="0"/>
               <a:t>2</a:t>
             </a:fld>
@@ -643,7 +643,7 @@
     </p:spTree>
     <p:extLst>
       <p:ext uri="{BB962C8B-B14F-4D97-AF65-F5344CB8AC3E}">
-        <p14:creationId xmlns:p14="http://schemas.microsoft.com/office/powerpoint/2010/main" val="3188521252"/>
+        <p14:creationId xmlns:p14="http://schemas.microsoft.com/office/powerpoint/2010/main" val="2182484842"/>
       </p:ext>
     </p:extLst>
   </p:cSld>
@@ -701,11 +701,11 @@
               <a:rPr lang="fr-FR"/>
               <a:t>[DUREE : 1 min 15 - DECISION ATTENDUE No1]
 PITCH MOT A MOT :
-Pour la gouvernance, j'ai choisi une methode hybride. Les evolutions du produit sont planifiables : je les organise en sprints de deux semaines, ce qui donne une cadence lisible pour vous, la direction. Le support, lui, est un flux imprevisible : je le gere en continu avec une file de priorites. Deux natures de travail, deux modes adaptes.
-Le point central du dispositif, c'est le comite d'arbitrage hebdomadaire. Chaque activite a un seul responsable : le Product Owner priorise, moi je planifie, je garantis la fiabilite des indicateurs et je vous rends compte, et le referent accessibilite valide chaque support.
-Premiere decision que je vous demande : valider ce mode de gouvernance.
+Pour la gouvernance, j'ai choisi une méthode hybride. Les evolutions du produit sont planifiables : je les organise en sprints de deux semaines, ce qui donne une cadence lisible pour vous, la direction. Le support, lui, est un flux imprévisible : je le gere en continu avec une file de priorités. Deux natures de travail, deux modes adaptés.
+Le point central du dispositif, c'est le comité d'arbitrage hebdomadaire. Chaque activité a un seul responsable : le Product Owner priorise, moi je planifie, je garantis la fiabilité des indicateurs et je vous rends compte, et le référent accessibilité valide chaque support.
+Premiere décision que je vous demande : valider ce mode de gouvernance.
 CAS CONCRET A RACONTER :
-"Imaginez la semaine 4. L'equipe technique veut livrer l'export CSV pour les analystes. Le centre de supervision reclame d'abord des alertes comprehensibles. Sans gouvernance, ce desaccord traine des semaines. Chez nous : comite du lundi, 30 minutes. Le Product Owner tranche, les alertes d'abord, parce que la non-adoption des agents est notre risque numero un, et moi j'eclaire la decision avec la charge et les dependances techniques."
+"Imaginez la semaine 4. L'équipe technique veut livrer l'export CSV pour les analystes. Le centre de supervision reclame d'abord des alertes comprehensibles. Sans gouvernance, ce desaccord traine des semaines. Chez nous : comité du lundi, 30 minutes. Le Product Owner tranche, les alertes d'abord, parce que la non-adoption des agents est notre risque numero un, et moi j'eclaire la décision avec la charge et les dépendances techniques."
 TRANSITION : "Une gouvernance pilote avec des chiffres. Voici les notres."</a:t>
             </a:r>
           </a:p>
@@ -726,7 +726,7 @@
           <a:bodyPr/>
           <a:lstStyle/>
           <a:p>
-            <a:fld id="{2EC29819-6A53-48D2-9DB0-EAF56D28E8F9}" type="slidenum">
+            <a:fld id="{10508356-4CDE-4E03-A342-AF460C750D3C}" type="slidenum">
               <a:rPr lang="fr-FR" smtClean="0"/>
               <a:t>3</a:t>
             </a:fld>
@@ -737,7 +737,7 @@
     </p:spTree>
     <p:extLst>
       <p:ext uri="{BB962C8B-B14F-4D97-AF65-F5344CB8AC3E}">
-        <p14:creationId xmlns:p14="http://schemas.microsoft.com/office/powerpoint/2010/main" val="1300305459"/>
+        <p14:creationId xmlns:p14="http://schemas.microsoft.com/office/powerpoint/2010/main" val="2917847999"/>
       </p:ext>
     </p:extLst>
   </p:cSld>
@@ -795,11 +795,11 @@
               <a:rPr lang="fr-FR"/>
               <a:t>[DUREE : 1 min 30 - LA SLIDE DU LEAD DATA]
 PITCH MOT A MOT :
-Le pilotage repose sur des indicateurs en quatre categories : le projet, le produit, l'adoption et l'impact environnemental. Tous les chiffres que vous voyez viennent du dossier fourni par la direction, je n'ai rien invente.
+Le pilotage repose sur des indicateurs en quatre categories : le projet, le produit, l'adoption et l'impact environnemental. Tous les chiffres que vous voyez viennent du dossier fourni par la direction, je n'ai rien inventé.
 Trois chiffres a retenir. L'adoption d'abord : 35 % des utilisateurs cibles utilisent l'outil aujourd'hui, l'objectif est 75 % en fin de pilote. Le temps de comprehension d'une alerte ensuite : 5 minutes aujourd'hui, 2 minutes en cible. Et les fausses alertes : 28 % aujourd'hui, 15 % en cible, parce que la confiance dans l'outil conditionne son adoption.
-En tant que Lead Data, c'est mon coeur de metier : chaque indicateur a un responsable designe, une formule documentee dans un glossaire, et une action prevue si la mesure derive.
+En tant que Lead Data, c'est mon coeur de métier : chaque indicateur a un responsable désigné, une formule documentee dans un glossaire, et une action prevue si la mesure derive.
 CAS CONCRET A RACONTER :
-"Prenons Malik, agent au centre de supervision. Aujourd'hui, en pleine heure de pointe, il recoit une alerte du genre 'anomalie de flux detectee, score 3,2'. Il met 5 minutes a comprendre, 5 minutes pendant lesquelles il ne decide rien. Notre travail : la meme alerte devient 'retard inhabituel sur la ligne de bus 12, secteur gare', avec une aide contextuelle. Objectif : 2 minutes."
+"Prenons Malik, agent au centre de supervision. Aujourd'hui, en pleine heure de pointe, il recoit une alerte du genre 'anomalie de flux detectee, score 3,2'. Il met 5 minutes a comprendre, 5 minutes pendant lesquelles il ne décide rien. Notre travail : la meme alerte devient 'retard inhabituel sur la ligne de bus 12, secteur gare', avec une aide contextuelle. Objectif : 2 minutes."
 TRANSITION : "Des chiffres pour piloter, et des risques sous controle."</a:t>
             </a:r>
           </a:p>
@@ -820,7 +820,7 @@
           <a:bodyPr/>
           <a:lstStyle/>
           <a:p>
-            <a:fld id="{2EC29819-6A53-48D2-9DB0-EAF56D28E8F9}" type="slidenum">
+            <a:fld id="{10508356-4CDE-4E03-A342-AF460C750D3C}" type="slidenum">
               <a:rPr lang="fr-FR" smtClean="0"/>
               <a:t>4</a:t>
             </a:fld>
@@ -831,7 +831,7 @@
     </p:spTree>
     <p:extLst>
       <p:ext uri="{BB962C8B-B14F-4D97-AF65-F5344CB8AC3E}">
-        <p14:creationId xmlns:p14="http://schemas.microsoft.com/office/powerpoint/2010/main" val="2797222067"/>
+        <p14:creationId xmlns:p14="http://schemas.microsoft.com/office/powerpoint/2010/main" val="3323416032"/>
       </p:ext>
     </p:extLst>
   </p:cSld>
@@ -889,10 +889,10 @@
               <a:rPr lang="fr-FR"/>
               <a:t>[DUREE : 1 min 15]
 PITCH MOT A MOT :
-Six risques sont documentes au registre, je vous presente les trois majeurs. Le premier, c'est la non-adoption par les agents : c'est le risque qui tuerait le projet. Mes parades : des formations courtes, de la co-construction avec le terrain, et un canal de retours structure. Le deuxieme, ce sont les conflits de priorites entre l'IT et le metier : c'est le comite d'arbitrage hebdomadaire qui le traite. Le troisieme, c'est une accessibilite insuffisante : chaque support est valide par le referent accessibilite avant diffusion, pas apres coup.
-Et j'insiste : chaque risque a aussi un plan de contingence avec un seuil defini a l'avance. Pas d'improvisation en cours de pilote : les decisions difficiles sont preparees avant.
+Six risques sont documentés au registre, je vous presente les trois majeurs. Le premier, c'est la non-adoption par les agents : c'est le risque qui tuerait le projet. Mes parades : des formations courtes, de la co-construction avec le terrain, et un canal de retours structuré. Le deuxieme, ce sont les conflits de priorités entre l'IT et le métier : c'est le comité d'arbitrage hebdomadaire qui le traite. Le troisieme, c'est une accessibilité insuffisante : chaque support est valide par le référent accessibilité avant diffusion, pas apres coup.
+Et j'insiste : chaque risque a aussi un plan de contingence avec un seuil défini à l'avance. Pas d'improvisation en cours de pilote : les décisions difficiles sont préparées avant.
 CAS CONCRET A RACONTER :
-"Concretement : nous sommes en semaine 8, le tableau de bord affiche 48 % d'adoption alors qu'on devrait etre autour de 55. Le seuil des 50 % est franchi : je n'improvise pas, je declenche le plan prepare, ateliers cibles, accompagnement en binome, et je passe le statut a l'orange dans mon reporting avec la decision que je vous demande."
+"Concretement : nous sommes en semaine 8, le tableau de bord affiche 48 % d'adoption alors qu'on devrait etre autour de 55. Le seuil des 50 % est franchi : je n'improvise pas, je declenche le plan prepare, ateliers cibles, accompagnement en binome, et je passe le statut a l'orange dans mon reporting avec la décision que je vous demande."
 TRANSITION : "Ces risques, ce sont aussi les utilisateurs qui nous les signalent."</a:t>
             </a:r>
           </a:p>
@@ -913,7 +913,7 @@
           <a:bodyPr/>
           <a:lstStyle/>
           <a:p>
-            <a:fld id="{2EC29819-6A53-48D2-9DB0-EAF56D28E8F9}" type="slidenum">
+            <a:fld id="{10508356-4CDE-4E03-A342-AF460C750D3C}" type="slidenum">
               <a:rPr lang="fr-FR" smtClean="0"/>
               <a:t>5</a:t>
             </a:fld>
@@ -924,7 +924,7 @@
     </p:spTree>
     <p:extLst>
       <p:ext uri="{BB962C8B-B14F-4D97-AF65-F5344CB8AC3E}">
-        <p14:creationId xmlns:p14="http://schemas.microsoft.com/office/powerpoint/2010/main" val="56700075"/>
+        <p14:creationId xmlns:p14="http://schemas.microsoft.com/office/powerpoint/2010/main" val="790475392"/>
       </p:ext>
     </p:extLst>
   </p:cSld>
@@ -982,10 +982,10 @@
               <a:rPr lang="fr-FR"/>
               <a:t>[DUREE : 1 min]
 PITCH MOT A MOT :
-Six retours utilisateurs ont ete recueillis sur le prototype. Je les ai priorises en croisant deux criteres : l'impact et la frequence.
-Trois retours cumulent impact fort et frequence elevee : le vocabulaire des alertes est trop technique, il n'existe aucune procedure en cas de mauvaise alerte, et les definitions des indicateurs sont imprecises. Ils sont traites en premier.
-Le retour sur les graphiques illisibles au lecteur d'ecran est moins frequent, mais je l'ai remonte en priorite : l'accessibilite est une exigence d'inclusion de ce projet, pas une option.
-Ce que je veux que vous reteniez : l'ordre de mes sprints n'est pas arbitraire, il reflete directement ce que le terrain nous a dit.
+Six retours utilisateurs ont ete recueillis sur le prototype. Je les ai priorises en croisant deux criteres : l'impact et la fréquence.
+Trois retours cumulent impact fort et fréquence élevée : le vocabulaire des alertes est trop technique, il n'existe aucune procédure en cas de mauvaise alerte, et les définitions des indicateurs sont imprécises. Ils sont traites en premier.
+Le retour sur les graphiques illisibles au lecteur d'écran est moins frequent, mais je l'ai remonte en priorité : l'accessibilité est une exigence d'inclusion de ce projet, pas une option.
+Ce que je veux que vous reteniez : l'ordre de mes sprints n'est pas arbitraire, il reflète directement ce que le terrain nous a dit.
 TRANSITION : "Ecouter le terrain, c'est aussi le former."</a:t>
             </a:r>
           </a:p>
@@ -1006,7 +1006,7 @@
           <a:bodyPr/>
           <a:lstStyle/>
           <a:p>
-            <a:fld id="{2EC29819-6A53-48D2-9DB0-EAF56D28E8F9}" type="slidenum">
+            <a:fld id="{10508356-4CDE-4E03-A342-AF460C750D3C}" type="slidenum">
               <a:rPr lang="fr-FR" smtClean="0"/>
               <a:t>6</a:t>
             </a:fld>
@@ -1017,7 +1017,7 @@
     </p:spTree>
     <p:extLst>
       <p:ext uri="{BB962C8B-B14F-4D97-AF65-F5344CB8AC3E}">
-        <p14:creationId xmlns:p14="http://schemas.microsoft.com/office/powerpoint/2010/main" val="4195953941"/>
+        <p14:creationId xmlns:p14="http://schemas.microsoft.com/office/powerpoint/2010/main" val="2273255256"/>
       </p:ext>
     </p:extLst>
   </p:cSld>
@@ -1075,10 +1075,10 @@
               <a:rPr lang="fr-FR"/>
               <a:t>[DUREE : 1 min 15 - DECISION ATTENDUE No2]
 PITCH MOT A MOT :
-L'accompagnement suit une logique simple : informer, former, accompagner sur le poste, puis rendre autonome. Quatre profils, quatre parcours adaptes : le superviseur presse, l'agent en salle operationnelle, l'analyste, et l'utilisateur en situation de handicap.
+L'accompagnement suit une logique simple : informer, former, accompagner sur le poste, puis rendre autonome. Quatre profils, quatre parcours adaptes : le superviseur presse, l'agent en salle opérationnelle, l'analyste, et l'utilisateur en situation de handicap.
 La contrainte principale, c'est le temps : les agents en ont tres peu. Donc tout est court : un seul atelier de 45 minutes par profil, des tutoriels de 3 a 5 minutes, et la prise en main se fait en binome, sur leur poste, pendant leur travail reel.
-Pour l'accessibilite : une session dediee a rythme adapte, des supports compatibles lecteur d'ecran, des videos sous-titrees, et chaque support est valide avant diffusion. Apres le deploiement, un support en deux niveaux prend le relais. La formation cree l'adoption, le support l'empeche de retomber.
-La cible : 100 % des profils formes avant le pilote, satisfaction de 4 sur 5 minimum. C'est ma deuxieme demande de validation.
+Pour l'accessibilité : une session dédiée a rythme adapte, des supports compatibles lecteur d'écran, des videos sous-titrees, et chaque support est valide avant diffusion. Apres le déploiement, un support en deux niveaux prend le relais. La formation crée l'adoption, le support l'empêche de retomber.
+La cible : 100 % des profils formés avant le pilote, satisfaction de 4 sur 5 minimum. C'est ma deuxieme demande de validation.
 CAS CONCRET A RACONTER :
 "Suivons Malik sur les 12 semaines. Semaine 6 : il recoit l'annonce et une demo de 15 minutes. Semaine 8 : il suit SON atelier de 45 minutes, construit sur de vraies alertes de son quotidien. Semaines 9 et 10 : quelqu'un vient a son poste, deux fois 30 minutes. Semaine 11, le pilote demarre : Malik est autonome."
 TRANSITION : "Je recapitule ce que j'attends de vous."</a:t>
@@ -1101,7 +1101,7 @@
           <a:bodyPr/>
           <a:lstStyle/>
           <a:p>
-            <a:fld id="{2EC29819-6A53-48D2-9DB0-EAF56D28E8F9}" type="slidenum">
+            <a:fld id="{10508356-4CDE-4E03-A342-AF460C750D3C}" type="slidenum">
               <a:rPr lang="fr-FR" smtClean="0"/>
               <a:t>7</a:t>
             </a:fld>
@@ -1112,7 +1112,7 @@
     </p:spTree>
     <p:extLst>
       <p:ext uri="{BB962C8B-B14F-4D97-AF65-F5344CB8AC3E}">
-        <p14:creationId xmlns:p14="http://schemas.microsoft.com/office/powerpoint/2010/main" val="1727048328"/>
+        <p14:creationId xmlns:p14="http://schemas.microsoft.com/office/powerpoint/2010/main" val="1044791970"/>
       </p:ext>
     </p:extLst>
   </p:cSld>
@@ -1170,10 +1170,10 @@
               <a:rPr lang="fr-FR"/>
               <a:t>[DUREE : 1 min - NE JAMAIS SAUTER CETTE SLIDE]
 PITCH MOT A MOT :
-Pour conclure, voici les quatre decisions que j'attends de ce comite. Deux des cette semaine : valider le mode de gouvernance, et valider le calendrier en quatre phases et cinq jalons. Ensuite : arbitrer les priorites du backlog que je vous ai proposees, et d'ici la semaine 4, valider le dispositif d'accompagnement des utilisateurs.
-Si vous validez aujourd'hui, le cadrage demarre immediatement, vous recevez le premier reporting hebdomadaire en semaine 3, et nous nous retrouvons au jalon 1 en fin de semaine 2 pour constater que la gouvernance est en place.
+Pour conclure, voici les quatre décisions que j'attends de ce comité. Deux dès cette semaine : valider le mode de gouvernance, et valider le calendrier en quatre phases et cinq jalons. Ensuite : arbitrer les priorités du backlog que je vous ai proposées, et d'ici la semaine 4, valider le dispositif d'accompagnement des utilisateurs.
+Si vous validez aujourd'hui, le cadrage démarre immédiatement, vous recevez le premier reporting hebdomadaire en semaine 3, et nous nous retrouvons au jalon 1 en fin de semaine 2 pour constater que la gouvernance est en place.
 Un prototype prometteur, un plan en 12 semaines, des indicateurs fiables et des utilisateurs accompagnes : voila comment nous securisons MobilityPulse.
-Merci de votre attention. Je suis pret a repondre a vos questions.
+Merci de votre attention. Je suis prêt a répondre à vos questions.
 APRES CETTE SLIDE : silence, sourire, laisser le jury ouvrir les questions.</a:t>
             </a:r>
           </a:p>
@@ -1194,7 +1194,7 @@
           <a:bodyPr/>
           <a:lstStyle/>
           <a:p>
-            <a:fld id="{2EC29819-6A53-48D2-9DB0-EAF56D28E8F9}" type="slidenum">
+            <a:fld id="{10508356-4CDE-4E03-A342-AF460C750D3C}" type="slidenum">
               <a:rPr lang="fr-FR" smtClean="0"/>
               <a:t>8</a:t>
             </a:fld>
@@ -1205,7 +1205,7 @@
     </p:spTree>
     <p:extLst>
       <p:ext uri="{BB962C8B-B14F-4D97-AF65-F5344CB8AC3E}">
-        <p14:creationId xmlns:p14="http://schemas.microsoft.com/office/powerpoint/2010/main" val="3975656332"/>
+        <p14:creationId xmlns:p14="http://schemas.microsoft.com/office/powerpoint/2010/main" val="407977747"/>
       </p:ext>
     </p:extLst>
   </p:cSld>
@@ -1262,12 +1262,12 @@
             <a:r>
               <a:rPr lang="fr-FR"/>
               <a:t>[SLIDE ANNEXE : NE PAS PRESENTER DANS LES 10 MINUTES. L'afficher seulement si le jury pose une question technique.]
-QUAND L'UTILISER : questions du type "parlez-moi de l'architecture", "qu'avez-vous fait techniquement", "comment garantissez-vous la qualite des donnees".
+QUAND L'UTILISER : questions du type "parlez-moi de l'architecture", "qu'avez-vous fait techniquement", "comment garantissez-vous la qualité des données".
 REPONSE TYPE (mot a mot) :
 "Volontairement, je n'ai pas mis de technique dans le reporting : la charte impose un vocabulaire non technique pour la direction. Mais bien sur, en tant que Lead Data, je pilote le socle : permettez-moi de vous montrer l'annexe.
-La chaine collecte les signaux de mobilite et les centralise dans un entrepot de donnees. Mon equipe garantit la qualite : controles automatises de completude et de coherence, car sans qualite data, aucun indicateur n'est fiable. Le modele de detection d'anomalies est surveille par le MLOps, et je pilote le reglage des seuils : c'est comme ca qu'on fera passer les fausses alertes de 28 a 15 %. Cote restitution : une API de consultation, le tableau de bord interne et les exports CSV avec gestion des permissions.
+La chaine collecte les signaux de mobilité et les centralise dans un entrepôt de données. Mon équipe garantit la qualite : contrôles automatisés de complétude et de cohérence, car sans qualite data, aucun indicateur n'est fiable. Le modele de detection d'anomalies est surveille par le MLOps, et je pilote le réglage des seuils : c'est comme ca qu'on fera passer les fausses alertes de 28 a 15 %. Cote restitution : une API de consultation, le tableau de bord interne et les exports CSV avec gestion des permissions.
 Et mon role transverse : chaque KPI a sa formule documentee et son owner, le canal de feedback est structure, et l'empreinte numerique est estimee par run pour l'indicateur RSE.
-Le developpement lui-meme releve des epreuves E2 et E3 : ici, mon travail est de piloter la qualite, la fiabilite et l'exploitation de ce socle."</a:t>
+Le developpement lui-meme relève des épreuves E2 et E3 : ici, mon travail est de piloter la qualité, la fiabilité et l'exploitation de ce socle."</a:t>
             </a:r>
           </a:p>
         </p:txBody>
@@ -1287,7 +1287,7 @@
           <a:bodyPr/>
           <a:lstStyle/>
           <a:p>
-            <a:fld id="{2EC29819-6A53-48D2-9DB0-EAF56D28E8F9}" type="slidenum">
+            <a:fld id="{10508356-4CDE-4E03-A342-AF460C750D3C}" type="slidenum">
               <a:rPr lang="fr-FR" smtClean="0"/>
               <a:t>9</a:t>
             </a:fld>
@@ -1298,7 +1298,7 @@
     </p:spTree>
     <p:extLst>
       <p:ext uri="{BB962C8B-B14F-4D97-AF65-F5344CB8AC3E}">
-        <p14:creationId xmlns:p14="http://schemas.microsoft.com/office/powerpoint/2010/main" val="2793444287"/>
+        <p14:creationId xmlns:p14="http://schemas.microsoft.com/office/powerpoint/2010/main" val="1426408219"/>
       </p:ext>
     </p:extLst>
   </p:cSld>
@@ -1330,7 +1330,7 @@
           <p:cNvPr id="2" name="Titre 1">
             <a:extLst>
               <a:ext uri="{FF2B5EF4-FFF2-40B4-BE49-F238E27FC236}">
-                <a16:creationId xmlns:a16="http://schemas.microsoft.com/office/drawing/2014/main" id="{CB425DDE-D9C1-567F-BB08-4B50E5135F50}"/>
+                <a16:creationId xmlns:a16="http://schemas.microsoft.com/office/drawing/2014/main" id="{E9C0AAA3-CF80-211B-D82C-D86BA817722D}"/>
               </a:ext>
             </a:extLst>
           </p:cNvPr>
@@ -1367,7 +1367,7 @@
           <p:cNvPr id="3" name="Sous-titre 2">
             <a:extLst>
               <a:ext uri="{FF2B5EF4-FFF2-40B4-BE49-F238E27FC236}">
-                <a16:creationId xmlns:a16="http://schemas.microsoft.com/office/drawing/2014/main" id="{36320581-C5D6-910F-AA01-35638E956A09}"/>
+                <a16:creationId xmlns:a16="http://schemas.microsoft.com/office/drawing/2014/main" id="{E9707545-F755-E71E-617B-8FD588A632CB}"/>
               </a:ext>
             </a:extLst>
           </p:cNvPr>
@@ -1437,7 +1437,7 @@
           <p:cNvPr id="4" name="Espace réservé de la date 3">
             <a:extLst>
               <a:ext uri="{FF2B5EF4-FFF2-40B4-BE49-F238E27FC236}">
-                <a16:creationId xmlns:a16="http://schemas.microsoft.com/office/drawing/2014/main" id="{50ED7112-1AED-77B3-3564-5FB37120BDC0}"/>
+                <a16:creationId xmlns:a16="http://schemas.microsoft.com/office/drawing/2014/main" id="{26FE0C2D-DFAF-C28B-FA4A-DD100CD3DDDF}"/>
               </a:ext>
             </a:extLst>
           </p:cNvPr>
@@ -1453,7 +1453,7 @@
           <a:bodyPr/>
           <a:lstStyle/>
           <a:p>
-            <a:fld id="{E45C8CDA-69E6-458F-BF50-317D310937B3}" type="datetimeFigureOut">
+            <a:fld id="{4D3F388F-D9A6-40DF-88EF-7FB37B0C17FD}" type="datetimeFigureOut">
               <a:rPr lang="fr-FR" smtClean="0"/>
               <a:t>21/07/2026</a:t>
             </a:fld>
@@ -1466,7 +1466,7 @@
           <p:cNvPr id="5" name="Espace réservé du pied de page 4">
             <a:extLst>
               <a:ext uri="{FF2B5EF4-FFF2-40B4-BE49-F238E27FC236}">
-                <a16:creationId xmlns:a16="http://schemas.microsoft.com/office/drawing/2014/main" id="{1327389F-A3CC-6A3D-E94E-169DDB402081}"/>
+                <a16:creationId xmlns:a16="http://schemas.microsoft.com/office/drawing/2014/main" id="{47A5BAC5-C2A7-9F0F-1550-F3CFA4BCB8FA}"/>
               </a:ext>
             </a:extLst>
           </p:cNvPr>
@@ -1491,7 +1491,7 @@
           <p:cNvPr id="6" name="Espace réservé du numéro de diapositive 5">
             <a:extLst>
               <a:ext uri="{FF2B5EF4-FFF2-40B4-BE49-F238E27FC236}">
-                <a16:creationId xmlns:a16="http://schemas.microsoft.com/office/drawing/2014/main" id="{6E3A7EA7-B28A-787B-3DBC-CA6F1AE355F4}"/>
+                <a16:creationId xmlns:a16="http://schemas.microsoft.com/office/drawing/2014/main" id="{7D6F67B3-C886-D278-E23D-9B6823AB906B}"/>
               </a:ext>
             </a:extLst>
           </p:cNvPr>
@@ -1507,7 +1507,7 @@
           <a:bodyPr/>
           <a:lstStyle/>
           <a:p>
-            <a:fld id="{3AC5600D-0F36-445F-8368-4294C88FAD94}" type="slidenum">
+            <a:fld id="{0B853DBB-3E62-4AD5-99BA-61816D9E2362}" type="slidenum">
               <a:rPr lang="fr-FR" smtClean="0"/>
               <a:t>‹N°›</a:t>
             </a:fld>
@@ -1518,7 +1518,7 @@
     </p:spTree>
     <p:extLst>
       <p:ext uri="{BB962C8B-B14F-4D97-AF65-F5344CB8AC3E}">
-        <p14:creationId xmlns:p14="http://schemas.microsoft.com/office/powerpoint/2010/main" val="3372485763"/>
+        <p14:creationId xmlns:p14="http://schemas.microsoft.com/office/powerpoint/2010/main" val="1409690323"/>
       </p:ext>
     </p:extLst>
   </p:cSld>
@@ -1550,7 +1550,7 @@
           <p:cNvPr id="2" name="Titre 1">
             <a:extLst>
               <a:ext uri="{FF2B5EF4-FFF2-40B4-BE49-F238E27FC236}">
-                <a16:creationId xmlns:a16="http://schemas.microsoft.com/office/drawing/2014/main" id="{A7B155CF-E412-3377-8AD0-59E221CE2EB5}"/>
+                <a16:creationId xmlns:a16="http://schemas.microsoft.com/office/drawing/2014/main" id="{B1650F4C-23FA-91D0-854C-46A1F1486A74}"/>
               </a:ext>
             </a:extLst>
           </p:cNvPr>
@@ -1578,7 +1578,7 @@
           <p:cNvPr id="3" name="Espace réservé du texte vertical 2">
             <a:extLst>
               <a:ext uri="{FF2B5EF4-FFF2-40B4-BE49-F238E27FC236}">
-                <a16:creationId xmlns:a16="http://schemas.microsoft.com/office/drawing/2014/main" id="{04084597-DB1C-496F-918E-A3523D289BC5}"/>
+                <a16:creationId xmlns:a16="http://schemas.microsoft.com/office/drawing/2014/main" id="{5F251622-20C6-7AF0-4E07-B2BED62166FF}"/>
               </a:ext>
             </a:extLst>
           </p:cNvPr>
@@ -1635,7 +1635,7 @@
           <p:cNvPr id="4" name="Espace réservé de la date 3">
             <a:extLst>
               <a:ext uri="{FF2B5EF4-FFF2-40B4-BE49-F238E27FC236}">
-                <a16:creationId xmlns:a16="http://schemas.microsoft.com/office/drawing/2014/main" id="{8B1B51EF-29E4-AA6E-6514-5D71F73B9415}"/>
+                <a16:creationId xmlns:a16="http://schemas.microsoft.com/office/drawing/2014/main" id="{2ABE2733-4708-018E-C6F5-FA329195422F}"/>
               </a:ext>
             </a:extLst>
           </p:cNvPr>
@@ -1651,7 +1651,7 @@
           <a:bodyPr/>
           <a:lstStyle/>
           <a:p>
-            <a:fld id="{E45C8CDA-69E6-458F-BF50-317D310937B3}" type="datetimeFigureOut">
+            <a:fld id="{4D3F388F-D9A6-40DF-88EF-7FB37B0C17FD}" type="datetimeFigureOut">
               <a:rPr lang="fr-FR" smtClean="0"/>
               <a:t>21/07/2026</a:t>
             </a:fld>
@@ -1664,7 +1664,7 @@
           <p:cNvPr id="5" name="Espace réservé du pied de page 4">
             <a:extLst>
               <a:ext uri="{FF2B5EF4-FFF2-40B4-BE49-F238E27FC236}">
-                <a16:creationId xmlns:a16="http://schemas.microsoft.com/office/drawing/2014/main" id="{3963EAED-3564-4017-8EEF-E2DA64884DAA}"/>
+                <a16:creationId xmlns:a16="http://schemas.microsoft.com/office/drawing/2014/main" id="{5E63FDAD-06FF-9183-834B-EE0824F588BC}"/>
               </a:ext>
             </a:extLst>
           </p:cNvPr>
@@ -1689,7 +1689,7 @@
           <p:cNvPr id="6" name="Espace réservé du numéro de diapositive 5">
             <a:extLst>
               <a:ext uri="{FF2B5EF4-FFF2-40B4-BE49-F238E27FC236}">
-                <a16:creationId xmlns:a16="http://schemas.microsoft.com/office/drawing/2014/main" id="{97889915-96DF-C7B9-A9D5-0670F2CE311C}"/>
+                <a16:creationId xmlns:a16="http://schemas.microsoft.com/office/drawing/2014/main" id="{EE385777-E5CD-2825-BFF3-B8E6942E32A7}"/>
               </a:ext>
             </a:extLst>
           </p:cNvPr>
@@ -1705,7 +1705,7 @@
           <a:bodyPr/>
           <a:lstStyle/>
           <a:p>
-            <a:fld id="{3AC5600D-0F36-445F-8368-4294C88FAD94}" type="slidenum">
+            <a:fld id="{0B853DBB-3E62-4AD5-99BA-61816D9E2362}" type="slidenum">
               <a:rPr lang="fr-FR" smtClean="0"/>
               <a:t>‹N°›</a:t>
             </a:fld>
@@ -1716,7 +1716,7 @@
     </p:spTree>
     <p:extLst>
       <p:ext uri="{BB962C8B-B14F-4D97-AF65-F5344CB8AC3E}">
-        <p14:creationId xmlns:p14="http://schemas.microsoft.com/office/powerpoint/2010/main" val="121095921"/>
+        <p14:creationId xmlns:p14="http://schemas.microsoft.com/office/powerpoint/2010/main" val="2478652768"/>
       </p:ext>
     </p:extLst>
   </p:cSld>
@@ -1748,7 +1748,7 @@
           <p:cNvPr id="2" name="Titre vertical 1">
             <a:extLst>
               <a:ext uri="{FF2B5EF4-FFF2-40B4-BE49-F238E27FC236}">
-                <a16:creationId xmlns:a16="http://schemas.microsoft.com/office/drawing/2014/main" id="{7403DC2F-6303-3AC7-19B1-C144D4F61426}"/>
+                <a16:creationId xmlns:a16="http://schemas.microsoft.com/office/drawing/2014/main" id="{A4452C2F-4E5E-0177-8C29-867129B8B303}"/>
               </a:ext>
             </a:extLst>
           </p:cNvPr>
@@ -1781,7 +1781,7 @@
           <p:cNvPr id="3" name="Espace réservé du texte vertical 2">
             <a:extLst>
               <a:ext uri="{FF2B5EF4-FFF2-40B4-BE49-F238E27FC236}">
-                <a16:creationId xmlns:a16="http://schemas.microsoft.com/office/drawing/2014/main" id="{9D1AA7C0-6C86-07FE-CA20-22BDB5FB139E}"/>
+                <a16:creationId xmlns:a16="http://schemas.microsoft.com/office/drawing/2014/main" id="{A9D9B8C8-4698-00AD-AFA5-233B0F5CDF12}"/>
               </a:ext>
             </a:extLst>
           </p:cNvPr>
@@ -1843,7 +1843,7 @@
           <p:cNvPr id="4" name="Espace réservé de la date 3">
             <a:extLst>
               <a:ext uri="{FF2B5EF4-FFF2-40B4-BE49-F238E27FC236}">
-                <a16:creationId xmlns:a16="http://schemas.microsoft.com/office/drawing/2014/main" id="{81900DC8-DCB2-8381-9F45-7420B4B3907E}"/>
+                <a16:creationId xmlns:a16="http://schemas.microsoft.com/office/drawing/2014/main" id="{2D7676B6-6F64-1C7D-CBE9-874A3D36A784}"/>
               </a:ext>
             </a:extLst>
           </p:cNvPr>
@@ -1859,7 +1859,7 @@
           <a:bodyPr/>
           <a:lstStyle/>
           <a:p>
-            <a:fld id="{E45C8CDA-69E6-458F-BF50-317D310937B3}" type="datetimeFigureOut">
+            <a:fld id="{4D3F388F-D9A6-40DF-88EF-7FB37B0C17FD}" type="datetimeFigureOut">
               <a:rPr lang="fr-FR" smtClean="0"/>
               <a:t>21/07/2026</a:t>
             </a:fld>
@@ -1872,7 +1872,7 @@
           <p:cNvPr id="5" name="Espace réservé du pied de page 4">
             <a:extLst>
               <a:ext uri="{FF2B5EF4-FFF2-40B4-BE49-F238E27FC236}">
-                <a16:creationId xmlns:a16="http://schemas.microsoft.com/office/drawing/2014/main" id="{109C0835-6E61-C3B6-2CD8-FC03C58B7561}"/>
+                <a16:creationId xmlns:a16="http://schemas.microsoft.com/office/drawing/2014/main" id="{CFE02649-FBED-881E-FFE6-89AFB02FBDC7}"/>
               </a:ext>
             </a:extLst>
           </p:cNvPr>
@@ -1897,7 +1897,7 @@
           <p:cNvPr id="6" name="Espace réservé du numéro de diapositive 5">
             <a:extLst>
               <a:ext uri="{FF2B5EF4-FFF2-40B4-BE49-F238E27FC236}">
-                <a16:creationId xmlns:a16="http://schemas.microsoft.com/office/drawing/2014/main" id="{0C594790-CEBD-C59D-130E-C9E77E2305B9}"/>
+                <a16:creationId xmlns:a16="http://schemas.microsoft.com/office/drawing/2014/main" id="{0FB9BE71-4D1C-E97D-28A1-DA56AE1065A1}"/>
               </a:ext>
             </a:extLst>
           </p:cNvPr>
@@ -1913,7 +1913,7 @@
           <a:bodyPr/>
           <a:lstStyle/>
           <a:p>
-            <a:fld id="{3AC5600D-0F36-445F-8368-4294C88FAD94}" type="slidenum">
+            <a:fld id="{0B853DBB-3E62-4AD5-99BA-61816D9E2362}" type="slidenum">
               <a:rPr lang="fr-FR" smtClean="0"/>
               <a:t>‹N°›</a:t>
             </a:fld>
@@ -1924,7 +1924,7 @@
     </p:spTree>
     <p:extLst>
       <p:ext uri="{BB962C8B-B14F-4D97-AF65-F5344CB8AC3E}">
-        <p14:creationId xmlns:p14="http://schemas.microsoft.com/office/powerpoint/2010/main" val="889208607"/>
+        <p14:creationId xmlns:p14="http://schemas.microsoft.com/office/powerpoint/2010/main" val="1887596569"/>
       </p:ext>
     </p:extLst>
   </p:cSld>
@@ -1956,7 +1956,7 @@
           <p:cNvPr id="2" name="Titre 1">
             <a:extLst>
               <a:ext uri="{FF2B5EF4-FFF2-40B4-BE49-F238E27FC236}">
-                <a16:creationId xmlns:a16="http://schemas.microsoft.com/office/drawing/2014/main" id="{0F9BAD6B-5B7D-20E6-DB71-B6CED80F4E8A}"/>
+                <a16:creationId xmlns:a16="http://schemas.microsoft.com/office/drawing/2014/main" id="{91F3EC04-CA5A-EAC0-2D1D-2EA1F8BE5F49}"/>
               </a:ext>
             </a:extLst>
           </p:cNvPr>
@@ -1984,7 +1984,7 @@
           <p:cNvPr id="3" name="Espace réservé du contenu 2">
             <a:extLst>
               <a:ext uri="{FF2B5EF4-FFF2-40B4-BE49-F238E27FC236}">
-                <a16:creationId xmlns:a16="http://schemas.microsoft.com/office/drawing/2014/main" id="{8A63E517-0FB3-27B7-06AC-2575A6A2C5EB}"/>
+                <a16:creationId xmlns:a16="http://schemas.microsoft.com/office/drawing/2014/main" id="{34C1BDB3-CD83-0C83-B24D-036FC21C6364}"/>
               </a:ext>
             </a:extLst>
           </p:cNvPr>
@@ -2041,7 +2041,7 @@
           <p:cNvPr id="4" name="Espace réservé de la date 3">
             <a:extLst>
               <a:ext uri="{FF2B5EF4-FFF2-40B4-BE49-F238E27FC236}">
-                <a16:creationId xmlns:a16="http://schemas.microsoft.com/office/drawing/2014/main" id="{019EC7B7-B4E0-245D-0928-0BF7B1911332}"/>
+                <a16:creationId xmlns:a16="http://schemas.microsoft.com/office/drawing/2014/main" id="{EE77B7AF-FA42-BF70-42B0-B53C8DD60B92}"/>
               </a:ext>
             </a:extLst>
           </p:cNvPr>
@@ -2057,7 +2057,7 @@
           <a:bodyPr/>
           <a:lstStyle/>
           <a:p>
-            <a:fld id="{E45C8CDA-69E6-458F-BF50-317D310937B3}" type="datetimeFigureOut">
+            <a:fld id="{4D3F388F-D9A6-40DF-88EF-7FB37B0C17FD}" type="datetimeFigureOut">
               <a:rPr lang="fr-FR" smtClean="0"/>
               <a:t>21/07/2026</a:t>
             </a:fld>
@@ -2070,7 +2070,7 @@
           <p:cNvPr id="5" name="Espace réservé du pied de page 4">
             <a:extLst>
               <a:ext uri="{FF2B5EF4-FFF2-40B4-BE49-F238E27FC236}">
-                <a16:creationId xmlns:a16="http://schemas.microsoft.com/office/drawing/2014/main" id="{2C1A2330-3048-E2AF-AD91-D2A951494B19}"/>
+                <a16:creationId xmlns:a16="http://schemas.microsoft.com/office/drawing/2014/main" id="{B8544ABC-22A3-FA53-430D-C60100C5A476}"/>
               </a:ext>
             </a:extLst>
           </p:cNvPr>
@@ -2095,7 +2095,7 @@
           <p:cNvPr id="6" name="Espace réservé du numéro de diapositive 5">
             <a:extLst>
               <a:ext uri="{FF2B5EF4-FFF2-40B4-BE49-F238E27FC236}">
-                <a16:creationId xmlns:a16="http://schemas.microsoft.com/office/drawing/2014/main" id="{B002EE6D-F43E-4885-4CCA-E43EBD47D323}"/>
+                <a16:creationId xmlns:a16="http://schemas.microsoft.com/office/drawing/2014/main" id="{24B9D532-8442-5556-582C-B782E2A3D911}"/>
               </a:ext>
             </a:extLst>
           </p:cNvPr>
@@ -2111,7 +2111,7 @@
           <a:bodyPr/>
           <a:lstStyle/>
           <a:p>
-            <a:fld id="{3AC5600D-0F36-445F-8368-4294C88FAD94}" type="slidenum">
+            <a:fld id="{0B853DBB-3E62-4AD5-99BA-61816D9E2362}" type="slidenum">
               <a:rPr lang="fr-FR" smtClean="0"/>
               <a:t>‹N°›</a:t>
             </a:fld>
@@ -2122,7 +2122,7 @@
     </p:spTree>
     <p:extLst>
       <p:ext uri="{BB962C8B-B14F-4D97-AF65-F5344CB8AC3E}">
-        <p14:creationId xmlns:p14="http://schemas.microsoft.com/office/powerpoint/2010/main" val="1106401415"/>
+        <p14:creationId xmlns:p14="http://schemas.microsoft.com/office/powerpoint/2010/main" val="484376336"/>
       </p:ext>
     </p:extLst>
   </p:cSld>
@@ -2154,7 +2154,7 @@
           <p:cNvPr id="2" name="Titre 1">
             <a:extLst>
               <a:ext uri="{FF2B5EF4-FFF2-40B4-BE49-F238E27FC236}">
-                <a16:creationId xmlns:a16="http://schemas.microsoft.com/office/drawing/2014/main" id="{F39F312D-E18D-9A92-A4B0-C19625D35D98}"/>
+                <a16:creationId xmlns:a16="http://schemas.microsoft.com/office/drawing/2014/main" id="{AD870B10-7E55-77AA-D741-878F978F7C79}"/>
               </a:ext>
             </a:extLst>
           </p:cNvPr>
@@ -2191,7 +2191,7 @@
           <p:cNvPr id="3" name="Espace réservé du texte 2">
             <a:extLst>
               <a:ext uri="{FF2B5EF4-FFF2-40B4-BE49-F238E27FC236}">
-                <a16:creationId xmlns:a16="http://schemas.microsoft.com/office/drawing/2014/main" id="{BD7D453C-7768-0219-B213-687F3C9469A0}"/>
+                <a16:creationId xmlns:a16="http://schemas.microsoft.com/office/drawing/2014/main" id="{953786E7-EAB3-C7E0-13D8-6D3DCD3A3215}"/>
               </a:ext>
             </a:extLst>
           </p:cNvPr>
@@ -2316,7 +2316,7 @@
           <p:cNvPr id="4" name="Espace réservé de la date 3">
             <a:extLst>
               <a:ext uri="{FF2B5EF4-FFF2-40B4-BE49-F238E27FC236}">
-                <a16:creationId xmlns:a16="http://schemas.microsoft.com/office/drawing/2014/main" id="{D442E774-1ED0-A659-5545-F3776F01AAC6}"/>
+                <a16:creationId xmlns:a16="http://schemas.microsoft.com/office/drawing/2014/main" id="{4F7C1864-921F-EE0D-EABE-B1C7B6EC3F47}"/>
               </a:ext>
             </a:extLst>
           </p:cNvPr>
@@ -2332,7 +2332,7 @@
           <a:bodyPr/>
           <a:lstStyle/>
           <a:p>
-            <a:fld id="{E45C8CDA-69E6-458F-BF50-317D310937B3}" type="datetimeFigureOut">
+            <a:fld id="{4D3F388F-D9A6-40DF-88EF-7FB37B0C17FD}" type="datetimeFigureOut">
               <a:rPr lang="fr-FR" smtClean="0"/>
               <a:t>21/07/2026</a:t>
             </a:fld>
@@ -2345,7 +2345,7 @@
           <p:cNvPr id="5" name="Espace réservé du pied de page 4">
             <a:extLst>
               <a:ext uri="{FF2B5EF4-FFF2-40B4-BE49-F238E27FC236}">
-                <a16:creationId xmlns:a16="http://schemas.microsoft.com/office/drawing/2014/main" id="{23AA9C6A-0634-9ACA-ECC8-D385A185FAF2}"/>
+                <a16:creationId xmlns:a16="http://schemas.microsoft.com/office/drawing/2014/main" id="{083A586B-7A92-F2AC-EDCC-F3904CE509CB}"/>
               </a:ext>
             </a:extLst>
           </p:cNvPr>
@@ -2370,7 +2370,7 @@
           <p:cNvPr id="6" name="Espace réservé du numéro de diapositive 5">
             <a:extLst>
               <a:ext uri="{FF2B5EF4-FFF2-40B4-BE49-F238E27FC236}">
-                <a16:creationId xmlns:a16="http://schemas.microsoft.com/office/drawing/2014/main" id="{54B03C01-0C9C-20F9-D9AF-09A5A70281A4}"/>
+                <a16:creationId xmlns:a16="http://schemas.microsoft.com/office/drawing/2014/main" id="{93D1D458-DB09-EAE4-B65B-BFFD4F2D79DD}"/>
               </a:ext>
             </a:extLst>
           </p:cNvPr>
@@ -2386,7 +2386,7 @@
           <a:bodyPr/>
           <a:lstStyle/>
           <a:p>
-            <a:fld id="{3AC5600D-0F36-445F-8368-4294C88FAD94}" type="slidenum">
+            <a:fld id="{0B853DBB-3E62-4AD5-99BA-61816D9E2362}" type="slidenum">
               <a:rPr lang="fr-FR" smtClean="0"/>
               <a:t>‹N°›</a:t>
             </a:fld>
@@ -2397,7 +2397,7 @@
     </p:spTree>
     <p:extLst>
       <p:ext uri="{BB962C8B-B14F-4D97-AF65-F5344CB8AC3E}">
-        <p14:creationId xmlns:p14="http://schemas.microsoft.com/office/powerpoint/2010/main" val="2435150196"/>
+        <p14:creationId xmlns:p14="http://schemas.microsoft.com/office/powerpoint/2010/main" val="48174927"/>
       </p:ext>
     </p:extLst>
   </p:cSld>
@@ -2429,7 +2429,7 @@
           <p:cNvPr id="2" name="Titre 1">
             <a:extLst>
               <a:ext uri="{FF2B5EF4-FFF2-40B4-BE49-F238E27FC236}">
-                <a16:creationId xmlns:a16="http://schemas.microsoft.com/office/drawing/2014/main" id="{E8732612-F40B-D21D-47A4-D85598E7091D}"/>
+                <a16:creationId xmlns:a16="http://schemas.microsoft.com/office/drawing/2014/main" id="{6EC75E20-8705-0A7C-6019-A97433FEE9E3}"/>
               </a:ext>
             </a:extLst>
           </p:cNvPr>
@@ -2457,7 +2457,7 @@
           <p:cNvPr id="3" name="Espace réservé du contenu 2">
             <a:extLst>
               <a:ext uri="{FF2B5EF4-FFF2-40B4-BE49-F238E27FC236}">
-                <a16:creationId xmlns:a16="http://schemas.microsoft.com/office/drawing/2014/main" id="{DE7BFD56-4FE6-6F22-67F4-49F410BA16D8}"/>
+                <a16:creationId xmlns:a16="http://schemas.microsoft.com/office/drawing/2014/main" id="{62DCF18E-E4D8-69E5-E6B9-1079DCD149F9}"/>
               </a:ext>
             </a:extLst>
           </p:cNvPr>
@@ -2519,7 +2519,7 @@
           <p:cNvPr id="4" name="Espace réservé du contenu 3">
             <a:extLst>
               <a:ext uri="{FF2B5EF4-FFF2-40B4-BE49-F238E27FC236}">
-                <a16:creationId xmlns:a16="http://schemas.microsoft.com/office/drawing/2014/main" id="{E0CCABDF-6540-9A61-78AA-72792C0568D5}"/>
+                <a16:creationId xmlns:a16="http://schemas.microsoft.com/office/drawing/2014/main" id="{5772188B-CCDF-2566-D794-53EB16744747}"/>
               </a:ext>
             </a:extLst>
           </p:cNvPr>
@@ -2581,7 +2581,7 @@
           <p:cNvPr id="5" name="Espace réservé de la date 4">
             <a:extLst>
               <a:ext uri="{FF2B5EF4-FFF2-40B4-BE49-F238E27FC236}">
-                <a16:creationId xmlns:a16="http://schemas.microsoft.com/office/drawing/2014/main" id="{CEBF0822-1DCA-1CA0-25CA-7A8C8C9C16F2}"/>
+                <a16:creationId xmlns:a16="http://schemas.microsoft.com/office/drawing/2014/main" id="{E24EBA52-8DC2-2157-3308-A71B59A70C61}"/>
               </a:ext>
             </a:extLst>
           </p:cNvPr>
@@ -2597,7 +2597,7 @@
           <a:bodyPr/>
           <a:lstStyle/>
           <a:p>
-            <a:fld id="{E45C8CDA-69E6-458F-BF50-317D310937B3}" type="datetimeFigureOut">
+            <a:fld id="{4D3F388F-D9A6-40DF-88EF-7FB37B0C17FD}" type="datetimeFigureOut">
               <a:rPr lang="fr-FR" smtClean="0"/>
               <a:t>21/07/2026</a:t>
             </a:fld>
@@ -2610,7 +2610,7 @@
           <p:cNvPr id="6" name="Espace réservé du pied de page 5">
             <a:extLst>
               <a:ext uri="{FF2B5EF4-FFF2-40B4-BE49-F238E27FC236}">
-                <a16:creationId xmlns:a16="http://schemas.microsoft.com/office/drawing/2014/main" id="{888D9AE8-447B-8DAB-D2B4-812DE7F14F07}"/>
+                <a16:creationId xmlns:a16="http://schemas.microsoft.com/office/drawing/2014/main" id="{F4F8164F-759A-9B7C-0FA7-3340A5FFC18D}"/>
               </a:ext>
             </a:extLst>
           </p:cNvPr>
@@ -2635,7 +2635,7 @@
           <p:cNvPr id="7" name="Espace réservé du numéro de diapositive 6">
             <a:extLst>
               <a:ext uri="{FF2B5EF4-FFF2-40B4-BE49-F238E27FC236}">
-                <a16:creationId xmlns:a16="http://schemas.microsoft.com/office/drawing/2014/main" id="{5C73A3F5-6231-1BFD-F5A0-F6E935704DB8}"/>
+                <a16:creationId xmlns:a16="http://schemas.microsoft.com/office/drawing/2014/main" id="{4CB7F148-949D-763E-B1A2-61A4741580A3}"/>
               </a:ext>
             </a:extLst>
           </p:cNvPr>
@@ -2651,7 +2651,7 @@
           <a:bodyPr/>
           <a:lstStyle/>
           <a:p>
-            <a:fld id="{3AC5600D-0F36-445F-8368-4294C88FAD94}" type="slidenum">
+            <a:fld id="{0B853DBB-3E62-4AD5-99BA-61816D9E2362}" type="slidenum">
               <a:rPr lang="fr-FR" smtClean="0"/>
               <a:t>‹N°›</a:t>
             </a:fld>
@@ -2662,7 +2662,7 @@
     </p:spTree>
     <p:extLst>
       <p:ext uri="{BB962C8B-B14F-4D97-AF65-F5344CB8AC3E}">
-        <p14:creationId xmlns:p14="http://schemas.microsoft.com/office/powerpoint/2010/main" val="2234741494"/>
+        <p14:creationId xmlns:p14="http://schemas.microsoft.com/office/powerpoint/2010/main" val="171278273"/>
       </p:ext>
     </p:extLst>
   </p:cSld>
@@ -2694,7 +2694,7 @@
           <p:cNvPr id="2" name="Titre 1">
             <a:extLst>
               <a:ext uri="{FF2B5EF4-FFF2-40B4-BE49-F238E27FC236}">
-                <a16:creationId xmlns:a16="http://schemas.microsoft.com/office/drawing/2014/main" id="{456F8440-5608-E8A9-3562-F8C3F614112E}"/>
+                <a16:creationId xmlns:a16="http://schemas.microsoft.com/office/drawing/2014/main" id="{2B0C60AD-2AC9-D73B-9CB5-D5B99D7F7E50}"/>
               </a:ext>
             </a:extLst>
           </p:cNvPr>
@@ -2727,7 +2727,7 @@
           <p:cNvPr id="3" name="Espace réservé du texte 2">
             <a:extLst>
               <a:ext uri="{FF2B5EF4-FFF2-40B4-BE49-F238E27FC236}">
-                <a16:creationId xmlns:a16="http://schemas.microsoft.com/office/drawing/2014/main" id="{075C15DD-291C-D07F-609D-F30E9A4DBB91}"/>
+                <a16:creationId xmlns:a16="http://schemas.microsoft.com/office/drawing/2014/main" id="{277164B9-27CA-43C4-4D3D-3D59B99259E6}"/>
               </a:ext>
             </a:extLst>
           </p:cNvPr>
@@ -2798,7 +2798,7 @@
           <p:cNvPr id="4" name="Espace réservé du contenu 3">
             <a:extLst>
               <a:ext uri="{FF2B5EF4-FFF2-40B4-BE49-F238E27FC236}">
-                <a16:creationId xmlns:a16="http://schemas.microsoft.com/office/drawing/2014/main" id="{C7C8BE7D-895D-9142-B137-A2120029E6E5}"/>
+                <a16:creationId xmlns:a16="http://schemas.microsoft.com/office/drawing/2014/main" id="{A1B24E38-B1CC-5F13-EF3E-B7BE9C4FF0A0}"/>
               </a:ext>
             </a:extLst>
           </p:cNvPr>
@@ -2860,7 +2860,7 @@
           <p:cNvPr id="5" name="Espace réservé du texte 4">
             <a:extLst>
               <a:ext uri="{FF2B5EF4-FFF2-40B4-BE49-F238E27FC236}">
-                <a16:creationId xmlns:a16="http://schemas.microsoft.com/office/drawing/2014/main" id="{25AA23EA-3ACE-8034-7C1C-4720FBE497D3}"/>
+                <a16:creationId xmlns:a16="http://schemas.microsoft.com/office/drawing/2014/main" id="{67A8792C-1FF9-96D1-A29C-2188CB802740}"/>
               </a:ext>
             </a:extLst>
           </p:cNvPr>
@@ -2931,7 +2931,7 @@
           <p:cNvPr id="6" name="Espace réservé du contenu 5">
             <a:extLst>
               <a:ext uri="{FF2B5EF4-FFF2-40B4-BE49-F238E27FC236}">
-                <a16:creationId xmlns:a16="http://schemas.microsoft.com/office/drawing/2014/main" id="{8C02566A-EEB3-3298-5F4F-76E4520BC8D0}"/>
+                <a16:creationId xmlns:a16="http://schemas.microsoft.com/office/drawing/2014/main" id="{8C31D688-2ADE-8D9E-3AF1-260EC3DB1C35}"/>
               </a:ext>
             </a:extLst>
           </p:cNvPr>
@@ -2993,7 +2993,7 @@
           <p:cNvPr id="7" name="Espace réservé de la date 6">
             <a:extLst>
               <a:ext uri="{FF2B5EF4-FFF2-40B4-BE49-F238E27FC236}">
-                <a16:creationId xmlns:a16="http://schemas.microsoft.com/office/drawing/2014/main" id="{2974F451-39D2-80FD-C259-6D70341F5B7D}"/>
+                <a16:creationId xmlns:a16="http://schemas.microsoft.com/office/drawing/2014/main" id="{134A4929-F4A3-57E8-93D5-A28443C81862}"/>
               </a:ext>
             </a:extLst>
           </p:cNvPr>
@@ -3009,7 +3009,7 @@
           <a:bodyPr/>
           <a:lstStyle/>
           <a:p>
-            <a:fld id="{E45C8CDA-69E6-458F-BF50-317D310937B3}" type="datetimeFigureOut">
+            <a:fld id="{4D3F388F-D9A6-40DF-88EF-7FB37B0C17FD}" type="datetimeFigureOut">
               <a:rPr lang="fr-FR" smtClean="0"/>
               <a:t>21/07/2026</a:t>
             </a:fld>
@@ -3022,7 +3022,7 @@
           <p:cNvPr id="8" name="Espace réservé du pied de page 7">
             <a:extLst>
               <a:ext uri="{FF2B5EF4-FFF2-40B4-BE49-F238E27FC236}">
-                <a16:creationId xmlns:a16="http://schemas.microsoft.com/office/drawing/2014/main" id="{9CEE1B81-D80F-33E5-1A54-4E11109FFA3E}"/>
+                <a16:creationId xmlns:a16="http://schemas.microsoft.com/office/drawing/2014/main" id="{5983C90E-337B-E954-2188-430E0B63A28E}"/>
               </a:ext>
             </a:extLst>
           </p:cNvPr>
@@ -3047,7 +3047,7 @@
           <p:cNvPr id="9" name="Espace réservé du numéro de diapositive 8">
             <a:extLst>
               <a:ext uri="{FF2B5EF4-FFF2-40B4-BE49-F238E27FC236}">
-                <a16:creationId xmlns:a16="http://schemas.microsoft.com/office/drawing/2014/main" id="{2575DBA5-66FD-E3F4-8CF8-1F5D0ECCAA36}"/>
+                <a16:creationId xmlns:a16="http://schemas.microsoft.com/office/drawing/2014/main" id="{2EC073E9-074B-2F06-8068-88B1670197A3}"/>
               </a:ext>
             </a:extLst>
           </p:cNvPr>
@@ -3063,7 +3063,7 @@
           <a:bodyPr/>
           <a:lstStyle/>
           <a:p>
-            <a:fld id="{3AC5600D-0F36-445F-8368-4294C88FAD94}" type="slidenum">
+            <a:fld id="{0B853DBB-3E62-4AD5-99BA-61816D9E2362}" type="slidenum">
               <a:rPr lang="fr-FR" smtClean="0"/>
               <a:t>‹N°›</a:t>
             </a:fld>
@@ -3074,7 +3074,7 @@
     </p:spTree>
     <p:extLst>
       <p:ext uri="{BB962C8B-B14F-4D97-AF65-F5344CB8AC3E}">
-        <p14:creationId xmlns:p14="http://schemas.microsoft.com/office/powerpoint/2010/main" val="3571862318"/>
+        <p14:creationId xmlns:p14="http://schemas.microsoft.com/office/powerpoint/2010/main" val="3990755156"/>
       </p:ext>
     </p:extLst>
   </p:cSld>
@@ -3106,7 +3106,7 @@
           <p:cNvPr id="2" name="Titre 1">
             <a:extLst>
               <a:ext uri="{FF2B5EF4-FFF2-40B4-BE49-F238E27FC236}">
-                <a16:creationId xmlns:a16="http://schemas.microsoft.com/office/drawing/2014/main" id="{B240E3BB-E54E-9193-8837-0BF965CB321A}"/>
+                <a16:creationId xmlns:a16="http://schemas.microsoft.com/office/drawing/2014/main" id="{A282B4C9-F03D-E416-D757-0FFC5521ADC0}"/>
               </a:ext>
             </a:extLst>
           </p:cNvPr>
@@ -3134,7 +3134,7 @@
           <p:cNvPr id="3" name="Espace réservé de la date 2">
             <a:extLst>
               <a:ext uri="{FF2B5EF4-FFF2-40B4-BE49-F238E27FC236}">
-                <a16:creationId xmlns:a16="http://schemas.microsoft.com/office/drawing/2014/main" id="{C7AE4EFE-2564-D7F8-BD8A-1E4B5104FB32}"/>
+                <a16:creationId xmlns:a16="http://schemas.microsoft.com/office/drawing/2014/main" id="{A8902A9A-86C9-6C03-AE92-09A2123306CB}"/>
               </a:ext>
             </a:extLst>
           </p:cNvPr>
@@ -3150,7 +3150,7 @@
           <a:bodyPr/>
           <a:lstStyle/>
           <a:p>
-            <a:fld id="{E45C8CDA-69E6-458F-BF50-317D310937B3}" type="datetimeFigureOut">
+            <a:fld id="{4D3F388F-D9A6-40DF-88EF-7FB37B0C17FD}" type="datetimeFigureOut">
               <a:rPr lang="fr-FR" smtClean="0"/>
               <a:t>21/07/2026</a:t>
             </a:fld>
@@ -3163,7 +3163,7 @@
           <p:cNvPr id="4" name="Espace réservé du pied de page 3">
             <a:extLst>
               <a:ext uri="{FF2B5EF4-FFF2-40B4-BE49-F238E27FC236}">
-                <a16:creationId xmlns:a16="http://schemas.microsoft.com/office/drawing/2014/main" id="{8A86CA2D-3499-2FB2-2C25-DF3FBA983097}"/>
+                <a16:creationId xmlns:a16="http://schemas.microsoft.com/office/drawing/2014/main" id="{787DCB8C-9490-8812-67A2-E36D33B01CBA}"/>
               </a:ext>
             </a:extLst>
           </p:cNvPr>
@@ -3188,7 +3188,7 @@
           <p:cNvPr id="5" name="Espace réservé du numéro de diapositive 4">
             <a:extLst>
               <a:ext uri="{FF2B5EF4-FFF2-40B4-BE49-F238E27FC236}">
-                <a16:creationId xmlns:a16="http://schemas.microsoft.com/office/drawing/2014/main" id="{03D5548F-9BC5-988B-E461-F0443DE46974}"/>
+                <a16:creationId xmlns:a16="http://schemas.microsoft.com/office/drawing/2014/main" id="{EF60260F-484D-071A-F186-C961B20628CF}"/>
               </a:ext>
             </a:extLst>
           </p:cNvPr>
@@ -3204,7 +3204,7 @@
           <a:bodyPr/>
           <a:lstStyle/>
           <a:p>
-            <a:fld id="{3AC5600D-0F36-445F-8368-4294C88FAD94}" type="slidenum">
+            <a:fld id="{0B853DBB-3E62-4AD5-99BA-61816D9E2362}" type="slidenum">
               <a:rPr lang="fr-FR" smtClean="0"/>
               <a:t>‹N°›</a:t>
             </a:fld>
@@ -3215,7 +3215,7 @@
     </p:spTree>
     <p:extLst>
       <p:ext uri="{BB962C8B-B14F-4D97-AF65-F5344CB8AC3E}">
-        <p14:creationId xmlns:p14="http://schemas.microsoft.com/office/powerpoint/2010/main" val="490749414"/>
+        <p14:creationId xmlns:p14="http://schemas.microsoft.com/office/powerpoint/2010/main" val="3704780432"/>
       </p:ext>
     </p:extLst>
   </p:cSld>
@@ -3247,7 +3247,7 @@
           <p:cNvPr id="2" name="Espace réservé de la date 1">
             <a:extLst>
               <a:ext uri="{FF2B5EF4-FFF2-40B4-BE49-F238E27FC236}">
-                <a16:creationId xmlns:a16="http://schemas.microsoft.com/office/drawing/2014/main" id="{5113B983-7CE4-2990-3C32-A82AC57D29E6}"/>
+                <a16:creationId xmlns:a16="http://schemas.microsoft.com/office/drawing/2014/main" id="{18752CA9-A290-9966-71EC-14BA619EAF74}"/>
               </a:ext>
             </a:extLst>
           </p:cNvPr>
@@ -3263,7 +3263,7 @@
           <a:bodyPr/>
           <a:lstStyle/>
           <a:p>
-            <a:fld id="{E45C8CDA-69E6-458F-BF50-317D310937B3}" type="datetimeFigureOut">
+            <a:fld id="{4D3F388F-D9A6-40DF-88EF-7FB37B0C17FD}" type="datetimeFigureOut">
               <a:rPr lang="fr-FR" smtClean="0"/>
               <a:t>21/07/2026</a:t>
             </a:fld>
@@ -3276,7 +3276,7 @@
           <p:cNvPr id="3" name="Espace réservé du pied de page 2">
             <a:extLst>
               <a:ext uri="{FF2B5EF4-FFF2-40B4-BE49-F238E27FC236}">
-                <a16:creationId xmlns:a16="http://schemas.microsoft.com/office/drawing/2014/main" id="{26AFD764-7B7E-28BD-B845-499A34984E3C}"/>
+                <a16:creationId xmlns:a16="http://schemas.microsoft.com/office/drawing/2014/main" id="{E28F249B-2F94-B3B7-FA57-BBD4DC4977F9}"/>
               </a:ext>
             </a:extLst>
           </p:cNvPr>
@@ -3301,7 +3301,7 @@
           <p:cNvPr id="4" name="Espace réservé du numéro de diapositive 3">
             <a:extLst>
               <a:ext uri="{FF2B5EF4-FFF2-40B4-BE49-F238E27FC236}">
-                <a16:creationId xmlns:a16="http://schemas.microsoft.com/office/drawing/2014/main" id="{BE1FAB69-E0B0-1EB0-6EE4-01B250D38548}"/>
+                <a16:creationId xmlns:a16="http://schemas.microsoft.com/office/drawing/2014/main" id="{1B7FEA7A-F93E-7DBA-AA85-83386CFCFEA0}"/>
               </a:ext>
             </a:extLst>
           </p:cNvPr>
@@ -3317,7 +3317,7 @@
           <a:bodyPr/>
           <a:lstStyle/>
           <a:p>
-            <a:fld id="{3AC5600D-0F36-445F-8368-4294C88FAD94}" type="slidenum">
+            <a:fld id="{0B853DBB-3E62-4AD5-99BA-61816D9E2362}" type="slidenum">
               <a:rPr lang="fr-FR" smtClean="0"/>
               <a:t>‹N°›</a:t>
             </a:fld>
@@ -3328,7 +3328,7 @@
     </p:spTree>
     <p:extLst>
       <p:ext uri="{BB962C8B-B14F-4D97-AF65-F5344CB8AC3E}">
-        <p14:creationId xmlns:p14="http://schemas.microsoft.com/office/powerpoint/2010/main" val="1819931788"/>
+        <p14:creationId xmlns:p14="http://schemas.microsoft.com/office/powerpoint/2010/main" val="916029042"/>
       </p:ext>
     </p:extLst>
   </p:cSld>
@@ -3360,7 +3360,7 @@
           <p:cNvPr id="2" name="Titre 1">
             <a:extLst>
               <a:ext uri="{FF2B5EF4-FFF2-40B4-BE49-F238E27FC236}">
-                <a16:creationId xmlns:a16="http://schemas.microsoft.com/office/drawing/2014/main" id="{BF91BB07-FA45-35F5-F04D-93809E2D915D}"/>
+                <a16:creationId xmlns:a16="http://schemas.microsoft.com/office/drawing/2014/main" id="{223D2C13-157B-FF43-E898-2E087037D5CB}"/>
               </a:ext>
             </a:extLst>
           </p:cNvPr>
@@ -3397,7 +3397,7 @@
           <p:cNvPr id="3" name="Espace réservé du contenu 2">
             <a:extLst>
               <a:ext uri="{FF2B5EF4-FFF2-40B4-BE49-F238E27FC236}">
-                <a16:creationId xmlns:a16="http://schemas.microsoft.com/office/drawing/2014/main" id="{17697CAE-BC93-C2D2-438F-C13BD2C02EAF}"/>
+                <a16:creationId xmlns:a16="http://schemas.microsoft.com/office/drawing/2014/main" id="{4A18A69A-C781-0FDD-3480-26AAB543C9C1}"/>
               </a:ext>
             </a:extLst>
           </p:cNvPr>
@@ -3487,7 +3487,7 @@
           <p:cNvPr id="4" name="Espace réservé du texte 3">
             <a:extLst>
               <a:ext uri="{FF2B5EF4-FFF2-40B4-BE49-F238E27FC236}">
-                <a16:creationId xmlns:a16="http://schemas.microsoft.com/office/drawing/2014/main" id="{C708C2AA-660C-D562-9AA3-1FA7AFA5E9B3}"/>
+                <a16:creationId xmlns:a16="http://schemas.microsoft.com/office/drawing/2014/main" id="{ECAD8A14-C2FE-D9EE-18D8-4D878A2189DF}"/>
               </a:ext>
             </a:extLst>
           </p:cNvPr>
@@ -3558,7 +3558,7 @@
           <p:cNvPr id="5" name="Espace réservé de la date 4">
             <a:extLst>
               <a:ext uri="{FF2B5EF4-FFF2-40B4-BE49-F238E27FC236}">
-                <a16:creationId xmlns:a16="http://schemas.microsoft.com/office/drawing/2014/main" id="{572DC509-085E-7AC0-4D7D-4EA4B90264DA}"/>
+                <a16:creationId xmlns:a16="http://schemas.microsoft.com/office/drawing/2014/main" id="{29FF838B-A095-6DC0-FD3E-A237F1231A49}"/>
               </a:ext>
             </a:extLst>
           </p:cNvPr>
@@ -3574,7 +3574,7 @@
           <a:bodyPr/>
           <a:lstStyle/>
           <a:p>
-            <a:fld id="{E45C8CDA-69E6-458F-BF50-317D310937B3}" type="datetimeFigureOut">
+            <a:fld id="{4D3F388F-D9A6-40DF-88EF-7FB37B0C17FD}" type="datetimeFigureOut">
               <a:rPr lang="fr-FR" smtClean="0"/>
               <a:t>21/07/2026</a:t>
             </a:fld>
@@ -3587,7 +3587,7 @@
           <p:cNvPr id="6" name="Espace réservé du pied de page 5">
             <a:extLst>
               <a:ext uri="{FF2B5EF4-FFF2-40B4-BE49-F238E27FC236}">
-                <a16:creationId xmlns:a16="http://schemas.microsoft.com/office/drawing/2014/main" id="{51818629-0700-FC3D-4150-A657930A7BD6}"/>
+                <a16:creationId xmlns:a16="http://schemas.microsoft.com/office/drawing/2014/main" id="{D74C2721-5FF1-6650-370B-16019A75C109}"/>
               </a:ext>
             </a:extLst>
           </p:cNvPr>
@@ -3612,7 +3612,7 @@
           <p:cNvPr id="7" name="Espace réservé du numéro de diapositive 6">
             <a:extLst>
               <a:ext uri="{FF2B5EF4-FFF2-40B4-BE49-F238E27FC236}">
-                <a16:creationId xmlns:a16="http://schemas.microsoft.com/office/drawing/2014/main" id="{F044946B-EEBE-1AB1-D1EA-EBECB901EBA0}"/>
+                <a16:creationId xmlns:a16="http://schemas.microsoft.com/office/drawing/2014/main" id="{048AC95B-D76F-5D1C-6E16-BE5E81688765}"/>
               </a:ext>
             </a:extLst>
           </p:cNvPr>
@@ -3628,7 +3628,7 @@
           <a:bodyPr/>
           <a:lstStyle/>
           <a:p>
-            <a:fld id="{3AC5600D-0F36-445F-8368-4294C88FAD94}" type="slidenum">
+            <a:fld id="{0B853DBB-3E62-4AD5-99BA-61816D9E2362}" type="slidenum">
               <a:rPr lang="fr-FR" smtClean="0"/>
               <a:t>‹N°›</a:t>
             </a:fld>
@@ -3639,7 +3639,7 @@
     </p:spTree>
     <p:extLst>
       <p:ext uri="{BB962C8B-B14F-4D97-AF65-F5344CB8AC3E}">
-        <p14:creationId xmlns:p14="http://schemas.microsoft.com/office/powerpoint/2010/main" val="90208086"/>
+        <p14:creationId xmlns:p14="http://schemas.microsoft.com/office/powerpoint/2010/main" val="162455445"/>
       </p:ext>
     </p:extLst>
   </p:cSld>
@@ -3671,7 +3671,7 @@
           <p:cNvPr id="2" name="Titre 1">
             <a:extLst>
               <a:ext uri="{FF2B5EF4-FFF2-40B4-BE49-F238E27FC236}">
-                <a16:creationId xmlns:a16="http://schemas.microsoft.com/office/drawing/2014/main" id="{9107D488-FCC1-1608-5816-084B9B7C52A4}"/>
+                <a16:creationId xmlns:a16="http://schemas.microsoft.com/office/drawing/2014/main" id="{3EEF9BDA-E121-CE65-3AC2-81296D59E37C}"/>
               </a:ext>
             </a:extLst>
           </p:cNvPr>
@@ -3708,7 +3708,7 @@
           <p:cNvPr id="3" name="Espace réservé pour une image  2">
             <a:extLst>
               <a:ext uri="{FF2B5EF4-FFF2-40B4-BE49-F238E27FC236}">
-                <a16:creationId xmlns:a16="http://schemas.microsoft.com/office/drawing/2014/main" id="{0BB9AEA6-93DB-0107-F265-8BD9B15A7F76}"/>
+                <a16:creationId xmlns:a16="http://schemas.microsoft.com/office/drawing/2014/main" id="{B0068F28-CFE3-0A5F-9C92-745E45EAC3F7}"/>
               </a:ext>
             </a:extLst>
           </p:cNvPr>
@@ -3775,7 +3775,7 @@
           <p:cNvPr id="4" name="Espace réservé du texte 3">
             <a:extLst>
               <a:ext uri="{FF2B5EF4-FFF2-40B4-BE49-F238E27FC236}">
-                <a16:creationId xmlns:a16="http://schemas.microsoft.com/office/drawing/2014/main" id="{A84D67E0-C98B-52A3-0267-C9864F62E0BB}"/>
+                <a16:creationId xmlns:a16="http://schemas.microsoft.com/office/drawing/2014/main" id="{81576F78-A9BF-7482-D9BB-6BBBA9C5E6F9}"/>
               </a:ext>
             </a:extLst>
           </p:cNvPr>
@@ -3846,7 +3846,7 @@
           <p:cNvPr id="5" name="Espace réservé de la date 4">
             <a:extLst>
               <a:ext uri="{FF2B5EF4-FFF2-40B4-BE49-F238E27FC236}">
-                <a16:creationId xmlns:a16="http://schemas.microsoft.com/office/drawing/2014/main" id="{9D2A5FD5-F91B-121F-F006-5E00FFA840EB}"/>
+                <a16:creationId xmlns:a16="http://schemas.microsoft.com/office/drawing/2014/main" id="{2EC0B11B-8D5F-ACEB-AE63-422DB70F8472}"/>
               </a:ext>
             </a:extLst>
           </p:cNvPr>
@@ -3862,7 +3862,7 @@
           <a:bodyPr/>
           <a:lstStyle/>
           <a:p>
-            <a:fld id="{E45C8CDA-69E6-458F-BF50-317D310937B3}" type="datetimeFigureOut">
+            <a:fld id="{4D3F388F-D9A6-40DF-88EF-7FB37B0C17FD}" type="datetimeFigureOut">
               <a:rPr lang="fr-FR" smtClean="0"/>
               <a:t>21/07/2026</a:t>
             </a:fld>
@@ -3875,7 +3875,7 @@
           <p:cNvPr id="6" name="Espace réservé du pied de page 5">
             <a:extLst>
               <a:ext uri="{FF2B5EF4-FFF2-40B4-BE49-F238E27FC236}">
-                <a16:creationId xmlns:a16="http://schemas.microsoft.com/office/drawing/2014/main" id="{3207846E-4C1C-D9F7-EDEF-20C8C77962AF}"/>
+                <a16:creationId xmlns:a16="http://schemas.microsoft.com/office/drawing/2014/main" id="{6E92F65B-AF2C-CD32-97D9-107EF0BE36D8}"/>
               </a:ext>
             </a:extLst>
           </p:cNvPr>
@@ -3900,7 +3900,7 @@
           <p:cNvPr id="7" name="Espace réservé du numéro de diapositive 6">
             <a:extLst>
               <a:ext uri="{FF2B5EF4-FFF2-40B4-BE49-F238E27FC236}">
-                <a16:creationId xmlns:a16="http://schemas.microsoft.com/office/drawing/2014/main" id="{0D879C3A-7005-ACD9-48C6-B37EC7F77A54}"/>
+                <a16:creationId xmlns:a16="http://schemas.microsoft.com/office/drawing/2014/main" id="{5AF5A4D0-5B75-D202-F1CD-4927498B28F8}"/>
               </a:ext>
             </a:extLst>
           </p:cNvPr>
@@ -3916,7 +3916,7 @@
           <a:bodyPr/>
           <a:lstStyle/>
           <a:p>
-            <a:fld id="{3AC5600D-0F36-445F-8368-4294C88FAD94}" type="slidenum">
+            <a:fld id="{0B853DBB-3E62-4AD5-99BA-61816D9E2362}" type="slidenum">
               <a:rPr lang="fr-FR" smtClean="0"/>
               <a:t>‹N°›</a:t>
             </a:fld>
@@ -3927,7 +3927,7 @@
     </p:spTree>
     <p:extLst>
       <p:ext uri="{BB962C8B-B14F-4D97-AF65-F5344CB8AC3E}">
-        <p14:creationId xmlns:p14="http://schemas.microsoft.com/office/powerpoint/2010/main" val="2118703600"/>
+        <p14:creationId xmlns:p14="http://schemas.microsoft.com/office/powerpoint/2010/main" val="1476901852"/>
       </p:ext>
     </p:extLst>
   </p:cSld>
@@ -3964,7 +3964,7 @@
           <p:cNvPr id="2" name="Espace réservé du titre 1">
             <a:extLst>
               <a:ext uri="{FF2B5EF4-FFF2-40B4-BE49-F238E27FC236}">
-                <a16:creationId xmlns:a16="http://schemas.microsoft.com/office/drawing/2014/main" id="{F319D95F-EB57-376F-0AF4-03E1D7BDE613}"/>
+                <a16:creationId xmlns:a16="http://schemas.microsoft.com/office/drawing/2014/main" id="{3D0517EC-BE4C-E369-440B-3A4E068230B2}"/>
               </a:ext>
             </a:extLst>
           </p:cNvPr>
@@ -4002,7 +4002,7 @@
           <p:cNvPr id="3" name="Espace réservé du texte 2">
             <a:extLst>
               <a:ext uri="{FF2B5EF4-FFF2-40B4-BE49-F238E27FC236}">
-                <a16:creationId xmlns:a16="http://schemas.microsoft.com/office/drawing/2014/main" id="{A933FAA8-D8E9-671F-511F-6E4C82703A03}"/>
+                <a16:creationId xmlns:a16="http://schemas.microsoft.com/office/drawing/2014/main" id="{033F506D-58C7-0B8C-A319-C5C31FD6F807}"/>
               </a:ext>
             </a:extLst>
           </p:cNvPr>
@@ -4069,7 +4069,7 @@
           <p:cNvPr id="4" name="Espace réservé de la date 3">
             <a:extLst>
               <a:ext uri="{FF2B5EF4-FFF2-40B4-BE49-F238E27FC236}">
-                <a16:creationId xmlns:a16="http://schemas.microsoft.com/office/drawing/2014/main" id="{2342051D-8337-97AB-83D4-99BD7111E4AD}"/>
+                <a16:creationId xmlns:a16="http://schemas.microsoft.com/office/drawing/2014/main" id="{1709E06B-7DC9-7795-1DEB-516176F3CF53}"/>
               </a:ext>
             </a:extLst>
           </p:cNvPr>
@@ -4103,7 +4103,7 @@
             </a:lvl1pPr>
           </a:lstStyle>
           <a:p>
-            <a:fld id="{E45C8CDA-69E6-458F-BF50-317D310937B3}" type="datetimeFigureOut">
+            <a:fld id="{4D3F388F-D9A6-40DF-88EF-7FB37B0C17FD}" type="datetimeFigureOut">
               <a:rPr lang="fr-FR" smtClean="0"/>
               <a:t>21/07/2026</a:t>
             </a:fld>
@@ -4116,7 +4116,7 @@
           <p:cNvPr id="5" name="Espace réservé du pied de page 4">
             <a:extLst>
               <a:ext uri="{FF2B5EF4-FFF2-40B4-BE49-F238E27FC236}">
-                <a16:creationId xmlns:a16="http://schemas.microsoft.com/office/drawing/2014/main" id="{A9C432AB-E21C-84E2-7B42-ABC622634057}"/>
+                <a16:creationId xmlns:a16="http://schemas.microsoft.com/office/drawing/2014/main" id="{2336AF79-7A08-93C5-06FA-FD9DF2BD0A3B}"/>
               </a:ext>
             </a:extLst>
           </p:cNvPr>
@@ -4159,7 +4159,7 @@
           <p:cNvPr id="6" name="Espace réservé du numéro de diapositive 5">
             <a:extLst>
               <a:ext uri="{FF2B5EF4-FFF2-40B4-BE49-F238E27FC236}">
-                <a16:creationId xmlns:a16="http://schemas.microsoft.com/office/drawing/2014/main" id="{EC211F92-A157-562F-FBE4-09D25053AC3D}"/>
+                <a16:creationId xmlns:a16="http://schemas.microsoft.com/office/drawing/2014/main" id="{C079FEFA-9DFA-B362-D5D4-A6E9E197A727}"/>
               </a:ext>
             </a:extLst>
           </p:cNvPr>
@@ -4193,7 +4193,7 @@
             </a:lvl1pPr>
           </a:lstStyle>
           <a:p>
-            <a:fld id="{3AC5600D-0F36-445F-8368-4294C88FAD94}" type="slidenum">
+            <a:fld id="{0B853DBB-3E62-4AD5-99BA-61816D9E2362}" type="slidenum">
               <a:rPr lang="fr-FR" smtClean="0"/>
               <a:t>‹N°›</a:t>
             </a:fld>
@@ -4204,7 +4204,7 @@
     </p:spTree>
     <p:extLst>
       <p:ext uri="{BB962C8B-B14F-4D97-AF65-F5344CB8AC3E}">
-        <p14:creationId xmlns:p14="http://schemas.microsoft.com/office/powerpoint/2010/main" val="3779081815"/>
+        <p14:creationId xmlns:p14="http://schemas.microsoft.com/office/powerpoint/2010/main" val="2831510873"/>
       </p:ext>
     </p:extLst>
   </p:cSld>
@@ -4527,7 +4527,7 @@
           <p:cNvPr id="2" name="ZoneTexte 1">
             <a:extLst>
               <a:ext uri="{FF2B5EF4-FFF2-40B4-BE49-F238E27FC236}">
-                <a16:creationId xmlns:a16="http://schemas.microsoft.com/office/drawing/2014/main" id="{6057D6D7-F123-5BC1-F850-139C22C9271E}"/>
+                <a16:creationId xmlns:a16="http://schemas.microsoft.com/office/drawing/2014/main" id="{D8D7BEE2-AD99-749C-5D86-BE480518EF8E}"/>
               </a:ext>
             </a:extLst>
           </p:cNvPr>
@@ -4557,7 +4557,7 @@
                 </a:solidFill>
                 <a:latin typeface="Calibri" panose="020F0502020204030204" pitchFamily="34" charset="0"/>
               </a:rPr>
-              <a:t>REPORTING AU COMITE DE DIRECTION</a:t>
+              <a:t>REPORTING AU COMITÉ DE DIRECTION</a:t>
             </a:r>
           </a:p>
         </p:txBody>
@@ -4567,7 +4567,7 @@
           <p:cNvPr id="3" name="ZoneTexte 2">
             <a:extLst>
               <a:ext uri="{FF2B5EF4-FFF2-40B4-BE49-F238E27FC236}">
-                <a16:creationId xmlns:a16="http://schemas.microsoft.com/office/drawing/2014/main" id="{C04F1AE5-0F07-6356-23A7-81EF44ADEE94}"/>
+                <a16:creationId xmlns:a16="http://schemas.microsoft.com/office/drawing/2014/main" id="{E1B40067-A238-EF19-82B2-98BE3BBB4117}"/>
               </a:ext>
             </a:extLst>
           </p:cNvPr>
@@ -4597,7 +4597,7 @@
                 </a:solidFill>
                 <a:latin typeface="Calibri" panose="020F0502020204030204" pitchFamily="34" charset="0"/>
               </a:rPr>
-              <a:t>MobilityPulse : securiser le deploiement en 12 semaines</a:t>
+              <a:t>MobilityPulse : sécuriser le déploiement en 12 semaines</a:t>
             </a:r>
           </a:p>
         </p:txBody>
@@ -4607,7 +4607,7 @@
           <p:cNvPr id="4" name="ZoneTexte 3">
             <a:extLst>
               <a:ext uri="{FF2B5EF4-FFF2-40B4-BE49-F238E27FC236}">
-                <a16:creationId xmlns:a16="http://schemas.microsoft.com/office/drawing/2014/main" id="{5065073E-6C39-AD6D-6A9D-26BC5A822EFC}"/>
+                <a16:creationId xmlns:a16="http://schemas.microsoft.com/office/drawing/2014/main" id="{8D2A5B2C-3D36-051D-89FC-475522B75528}"/>
               </a:ext>
             </a:extLst>
           </p:cNvPr>
@@ -4631,20 +4631,14 @@
           <a:lstStyle/>
           <a:p>
             <a:r>
-              <a:rPr lang="pt-BR" sz="1400">
+              <a:rPr lang="fr-FR" sz="1400">
                 <a:solidFill>
                   <a:srgbClr val="212121"/>
                 </a:solidFill>
                 <a:latin typeface="Calibri" panose="020F0502020204030204" pitchFamily="34" charset="0"/>
               </a:rPr>
-              <a:t>Ouassim Megrad  ·  Lead Data  ·  equipe Megslab  ·  21/07/2026</a:t>
-            </a:r>
-            <a:endParaRPr lang="fr-FR" sz="1400">
-              <a:solidFill>
-                <a:srgbClr val="212121"/>
-              </a:solidFill>
-              <a:latin typeface="Calibri" panose="020F0502020204030204" pitchFamily="34" charset="0"/>
-            </a:endParaRPr>
+              <a:t>Ouassim Megrad  ·  Lead Data  ·  équipe Megslab  ·  21/07/2026</a:t>
+            </a:r>
           </a:p>
         </p:txBody>
       </p:sp>
@@ -4653,7 +4647,7 @@
           <p:cNvPr id="5" name="Rectangle : coins arrondis 4">
             <a:extLst>
               <a:ext uri="{FF2B5EF4-FFF2-40B4-BE49-F238E27FC236}">
-                <a16:creationId xmlns:a16="http://schemas.microsoft.com/office/drawing/2014/main" id="{67703A10-F20C-9025-5358-49A0C69D6257}"/>
+                <a16:creationId xmlns:a16="http://schemas.microsoft.com/office/drawing/2014/main" id="{07093DCA-73E6-E714-40C4-B0EAA4ECE4BB}"/>
               </a:ext>
             </a:extLst>
           </p:cNvPr>
@@ -4718,7 +4712,7 @@
                   <a:srgbClr val="FFFFFF"/>
                 </a:solidFill>
               </a:rPr>
-              <a:t>STATUT GLOBAL : VERT  ·  pret a lancer  ·  aucun obstacle bloquant</a:t>
+              <a:t>STATUT GLOBAL : VERT  ·  prêt à lancer  ·  aucun obstacle bloquant</a:t>
             </a:r>
           </a:p>
         </p:txBody>
@@ -4728,7 +4722,7 @@
           <p:cNvPr id="6" name="ZoneTexte 5">
             <a:extLst>
               <a:ext uri="{FF2B5EF4-FFF2-40B4-BE49-F238E27FC236}">
-                <a16:creationId xmlns:a16="http://schemas.microsoft.com/office/drawing/2014/main" id="{4809DF9C-6E7C-99EC-ADF2-D58BB1DD2836}"/>
+                <a16:creationId xmlns:a16="http://schemas.microsoft.com/office/drawing/2014/main" id="{B8B72F18-7E3C-B3AE-97B4-26AE52E7C8EA}"/>
               </a:ext>
             </a:extLst>
           </p:cNvPr>
@@ -4758,7 +4752,7 @@
                 </a:solidFill>
                 <a:latin typeface="Calibri" panose="020F0502020204030204" pitchFamily="34" charset="0"/>
               </a:rPr>
-              <a:t>La solution existe deja en prototype : elle collecte les signaux de mobilite, detecte les anomalies et affiche des indicateurs. Ma mission n'est pas de la developper, mais d'organiser son adoption en 12 semaines.</a:t>
+              <a:t>La solution existe déjà en prototype : elle collecte les signaux de mobilité, détecte les anomalies et affiche des indicateurs. Ma mission n'est pas de la développer, mais d'organiser son adoption en 12 semaines.</a:t>
             </a:r>
           </a:p>
         </p:txBody>
@@ -4768,7 +4762,7 @@
           <p:cNvPr id="7" name="Rectangle : coins arrondis 6">
             <a:extLst>
               <a:ext uri="{FF2B5EF4-FFF2-40B4-BE49-F238E27FC236}">
-                <a16:creationId xmlns:a16="http://schemas.microsoft.com/office/drawing/2014/main" id="{7B2C8CDF-BD81-8216-30AC-8CC58A78D135}"/>
+                <a16:creationId xmlns:a16="http://schemas.microsoft.com/office/drawing/2014/main" id="{599024E4-64CD-7A9B-9D9C-B150207A8C6F}"/>
               </a:ext>
             </a:extLst>
           </p:cNvPr>
@@ -4836,7 +4830,7 @@
           <p:cNvPr id="8" name="ZoneTexte 7">
             <a:extLst>
               <a:ext uri="{FF2B5EF4-FFF2-40B4-BE49-F238E27FC236}">
-                <a16:creationId xmlns:a16="http://schemas.microsoft.com/office/drawing/2014/main" id="{A0178F17-0F34-5966-CED5-705EBB44BF4D}"/>
+                <a16:creationId xmlns:a16="http://schemas.microsoft.com/office/drawing/2014/main" id="{7C0172FA-9BE8-B664-2304-5D05C713B497}"/>
               </a:ext>
             </a:extLst>
           </p:cNvPr>
@@ -4876,7 +4870,7 @@
           <p:cNvPr id="9" name="ZoneTexte 8">
             <a:extLst>
               <a:ext uri="{FF2B5EF4-FFF2-40B4-BE49-F238E27FC236}">
-                <a16:creationId xmlns:a16="http://schemas.microsoft.com/office/drawing/2014/main" id="{5B1C8F38-F8CE-5D60-9B70-3F609BF7DF82}"/>
+                <a16:creationId xmlns:a16="http://schemas.microsoft.com/office/drawing/2014/main" id="{E19F093F-C149-DAD1-C96A-76F34D53E9FB}"/>
               </a:ext>
             </a:extLst>
           </p:cNvPr>
@@ -4906,7 +4900,7 @@
                 </a:solidFill>
                 <a:latin typeface="Calibri" panose="020F0502020204030204" pitchFamily="34" charset="0"/>
               </a:rPr>
-              <a:t>Constat de la direction : personne ne sait organiser le passage a l'echelle. Ma reponse : un plan projet en 12 semaines, 4 phases et 5 jalons, cale sur les dependances reelles du backlog.</a:t>
+              <a:t>Constat de la direction : personne ne sait organiser le passage à l'échelle. Ma réponse : un plan projet en 12 semaines, 4 phases et 5 jalons, calé sur les dépendances réelles du backlog.</a:t>
             </a:r>
           </a:p>
         </p:txBody>
@@ -4916,7 +4910,7 @@
           <p:cNvPr id="10" name="Rectangle : coins arrondis 9">
             <a:extLst>
               <a:ext uri="{FF2B5EF4-FFF2-40B4-BE49-F238E27FC236}">
-                <a16:creationId xmlns:a16="http://schemas.microsoft.com/office/drawing/2014/main" id="{5C9571BD-483D-D3D2-5C31-88567C378A3D}"/>
+                <a16:creationId xmlns:a16="http://schemas.microsoft.com/office/drawing/2014/main" id="{2BD6EB49-FE65-F00A-40E5-FA2F9BE2E919}"/>
               </a:ext>
             </a:extLst>
           </p:cNvPr>
@@ -4984,7 +4978,7 @@
           <p:cNvPr id="11" name="ZoneTexte 10">
             <a:extLst>
               <a:ext uri="{FF2B5EF4-FFF2-40B4-BE49-F238E27FC236}">
-                <a16:creationId xmlns:a16="http://schemas.microsoft.com/office/drawing/2014/main" id="{5D2C5FF0-6656-9EE9-451E-DE61442BDE07}"/>
+                <a16:creationId xmlns:a16="http://schemas.microsoft.com/office/drawing/2014/main" id="{C90FFBD3-D366-C89D-FFA0-1951C3CDBF27}"/>
               </a:ext>
             </a:extLst>
           </p:cNvPr>
@@ -5024,7 +5018,7 @@
           <p:cNvPr id="12" name="ZoneTexte 11">
             <a:extLst>
               <a:ext uri="{FF2B5EF4-FFF2-40B4-BE49-F238E27FC236}">
-                <a16:creationId xmlns:a16="http://schemas.microsoft.com/office/drawing/2014/main" id="{CBE42C94-478F-4D20-BACC-288E71C78364}"/>
+                <a16:creationId xmlns:a16="http://schemas.microsoft.com/office/drawing/2014/main" id="{6386FE49-11AB-4931-7653-2A4281CD7D37}"/>
               </a:ext>
             </a:extLst>
           </p:cNvPr>
@@ -5054,7 +5048,7 @@
                 </a:solidFill>
                 <a:latin typeface="Calibri" panose="020F0502020204030204" pitchFamily="34" charset="0"/>
               </a:rPr>
-              <a:t>Constat : les roles entre data, IT, metier et exploitation ne sont pas formalises. Ma reponse : une matrice RACI avec un seul responsable par activite, et un comite d'arbitrage hebdomadaire.</a:t>
+              <a:t>Constat : les rôles entre data, IT, métier et exploitation ne sont pas formalisés. Ma réponse : une matrice RACI avec un seul responsable par activité, et un comité d'arbitrage hebdomadaire.</a:t>
             </a:r>
           </a:p>
         </p:txBody>
@@ -5064,7 +5058,7 @@
           <p:cNvPr id="13" name="Rectangle : coins arrondis 12">
             <a:extLst>
               <a:ext uri="{FF2B5EF4-FFF2-40B4-BE49-F238E27FC236}">
-                <a16:creationId xmlns:a16="http://schemas.microsoft.com/office/drawing/2014/main" id="{C482BCD1-27D9-A272-ABD5-0E7859849E14}"/>
+                <a16:creationId xmlns:a16="http://schemas.microsoft.com/office/drawing/2014/main" id="{0556A217-A5FF-A78F-AC5A-C6F18FA80A4E}"/>
               </a:ext>
             </a:extLst>
           </p:cNvPr>
@@ -5132,7 +5126,7 @@
           <p:cNvPr id="14" name="ZoneTexte 13">
             <a:extLst>
               <a:ext uri="{FF2B5EF4-FFF2-40B4-BE49-F238E27FC236}">
-                <a16:creationId xmlns:a16="http://schemas.microsoft.com/office/drawing/2014/main" id="{A846BCE4-80ED-8F1B-9F37-58FC41600FA9}"/>
+                <a16:creationId xmlns:a16="http://schemas.microsoft.com/office/drawing/2014/main" id="{6749FA65-5500-E1BA-5D8A-8C3353F91BA8}"/>
               </a:ext>
             </a:extLst>
           </p:cNvPr>
@@ -5172,7 +5166,7 @@
           <p:cNvPr id="15" name="ZoneTexte 14">
             <a:extLst>
               <a:ext uri="{FF2B5EF4-FFF2-40B4-BE49-F238E27FC236}">
-                <a16:creationId xmlns:a16="http://schemas.microsoft.com/office/drawing/2014/main" id="{867C4343-9811-1330-7B02-49F7F7E8B9A7}"/>
+                <a16:creationId xmlns:a16="http://schemas.microsoft.com/office/drawing/2014/main" id="{B4863CD6-CFF3-8A12-A8CE-EA7853BBB95E}"/>
               </a:ext>
             </a:extLst>
           </p:cNvPr>
@@ -5202,7 +5196,7 @@
                 </a:solidFill>
                 <a:latin typeface="Calibri" panose="020F0502020204030204" pitchFamily="34" charset="0"/>
               </a:rPr>
-              <a:t>Constat : les utilisateurs demandent formation, lisibilite et support. Ma reponse : un parcours court et accessible, adapte a chacun des 4 profils, et un support perenne en 2 niveaux.</a:t>
+              <a:t>Constat : les utilisateurs demandent formation, lisibilité et support. Ma réponse : un parcours court et accessible, adapté à chacun des 4 profils, et un support pérenne en 2 niveaux.</a:t>
             </a:r>
           </a:p>
         </p:txBody>
@@ -5212,7 +5206,7 @@
           <p:cNvPr id="16" name="ZoneTexte 15">
             <a:extLst>
               <a:ext uri="{FF2B5EF4-FFF2-40B4-BE49-F238E27FC236}">
-                <a16:creationId xmlns:a16="http://schemas.microsoft.com/office/drawing/2014/main" id="{124062D3-2A72-8AD0-1DA9-0C1BB8CF28FA}"/>
+                <a16:creationId xmlns:a16="http://schemas.microsoft.com/office/drawing/2014/main" id="{F9D4C7C6-19B0-B86D-0EEC-001983C5749F}"/>
               </a:ext>
             </a:extLst>
           </p:cNvPr>
@@ -5236,20 +5230,14 @@
           <a:lstStyle/>
           <a:p>
             <a:r>
-              <a:rPr lang="pt-BR" sz="1000">
+              <a:rPr lang="fr-FR" sz="1000">
                 <a:solidFill>
                   <a:srgbClr val="6E7680"/>
                 </a:solidFill>
                 <a:latin typeface="Calibri" panose="020F0502020204030204" pitchFamily="34" charset="0"/>
               </a:rPr>
-              <a:t>Ouassim Megrad  ·  Lead Data  ·  equipe Megslab</a:t>
-            </a:r>
-            <a:endParaRPr lang="fr-FR" sz="1000">
-              <a:solidFill>
-                <a:srgbClr val="6E7680"/>
-              </a:solidFill>
-              <a:latin typeface="Calibri" panose="020F0502020204030204" pitchFamily="34" charset="0"/>
-            </a:endParaRPr>
+              <a:t>Ouassim Megrad  ·  Lead Data  ·  équipe Megslab</a:t>
+            </a:r>
           </a:p>
         </p:txBody>
       </p:sp>
@@ -5258,7 +5246,7 @@
           <p:cNvPr id="17" name="ZoneTexte 16">
             <a:extLst>
               <a:ext uri="{FF2B5EF4-FFF2-40B4-BE49-F238E27FC236}">
-                <a16:creationId xmlns:a16="http://schemas.microsoft.com/office/drawing/2014/main" id="{24998AC9-5666-8889-461E-C68C10ADF0F5}"/>
+                <a16:creationId xmlns:a16="http://schemas.microsoft.com/office/drawing/2014/main" id="{4DCD8655-442E-FA40-3F2F-D7225ED7F7FE}"/>
               </a:ext>
             </a:extLst>
           </p:cNvPr>
@@ -5296,7 +5284,7 @@
     </p:spTree>
     <p:extLst>
       <p:ext uri="{BB962C8B-B14F-4D97-AF65-F5344CB8AC3E}">
-        <p14:creationId xmlns:p14="http://schemas.microsoft.com/office/powerpoint/2010/main" val="1638866387"/>
+        <p14:creationId xmlns:p14="http://schemas.microsoft.com/office/powerpoint/2010/main" val="274860880"/>
       </p:ext>
     </p:extLst>
   </p:cSld>
@@ -5328,7 +5316,7 @@
           <p:cNvPr id="2" name="Rectangle 1">
             <a:extLst>
               <a:ext uri="{FF2B5EF4-FFF2-40B4-BE49-F238E27FC236}">
-                <a16:creationId xmlns:a16="http://schemas.microsoft.com/office/drawing/2014/main" id="{6D4523AB-F721-DBFE-B67E-5D6DCDDFD125}"/>
+                <a16:creationId xmlns:a16="http://schemas.microsoft.com/office/drawing/2014/main" id="{A74CA9E3-8757-E5FC-54DD-C4787CE71598}"/>
               </a:ext>
             </a:extLst>
           </p:cNvPr>
@@ -5396,7 +5384,7 @@
           <p:cNvPr id="3" name="ZoneTexte 2">
             <a:extLst>
               <a:ext uri="{FF2B5EF4-FFF2-40B4-BE49-F238E27FC236}">
-                <a16:creationId xmlns:a16="http://schemas.microsoft.com/office/drawing/2014/main" id="{934609ED-7678-0E75-6058-15ACA929E35B}"/>
+                <a16:creationId xmlns:a16="http://schemas.microsoft.com/office/drawing/2014/main" id="{2D8A87A3-7412-D15B-3E02-136DF52AD4BC}"/>
               </a:ext>
             </a:extLst>
           </p:cNvPr>
@@ -5436,7 +5424,7 @@
           <p:cNvPr id="4" name="ZoneTexte 3">
             <a:extLst>
               <a:ext uri="{FF2B5EF4-FFF2-40B4-BE49-F238E27FC236}">
-                <a16:creationId xmlns:a16="http://schemas.microsoft.com/office/drawing/2014/main" id="{F46ACAA3-254F-0880-FFD5-F0B41C6C4264}"/>
+                <a16:creationId xmlns:a16="http://schemas.microsoft.com/office/drawing/2014/main" id="{4B57C481-517B-F48C-1BC3-DBF89033D331}"/>
               </a:ext>
             </a:extLst>
           </p:cNvPr>
@@ -5466,7 +5454,7 @@
                 </a:solidFill>
                 <a:latin typeface="Calibri" panose="020F0502020204030204" pitchFamily="34" charset="0"/>
               </a:rPr>
-              <a:t>Un calendrier cale sur les dependances reelles, valide au jalon J1</a:t>
+              <a:t>Un calendrier calé sur les dépendances réelles, validé au jalon J1</a:t>
             </a:r>
           </a:p>
         </p:txBody>
@@ -5476,7 +5464,7 @@
           <p:cNvPr id="5" name="ZoneTexte 4">
             <a:extLst>
               <a:ext uri="{FF2B5EF4-FFF2-40B4-BE49-F238E27FC236}">
-                <a16:creationId xmlns:a16="http://schemas.microsoft.com/office/drawing/2014/main" id="{377FF2C6-D1A7-E81F-5CBF-FF722646823E}"/>
+                <a16:creationId xmlns:a16="http://schemas.microsoft.com/office/drawing/2014/main" id="{48BEF61A-2B7F-DDBF-3C7C-134FB9CE846A}"/>
               </a:ext>
             </a:extLst>
           </p:cNvPr>
@@ -5500,20 +5488,14 @@
           <a:lstStyle/>
           <a:p>
             <a:r>
-              <a:rPr lang="pt-BR" sz="1000">
+              <a:rPr lang="fr-FR" sz="1000">
                 <a:solidFill>
                   <a:srgbClr val="6E7680"/>
                 </a:solidFill>
                 <a:latin typeface="Calibri" panose="020F0502020204030204" pitchFamily="34" charset="0"/>
               </a:rPr>
-              <a:t>Ouassim Megrad  ·  Lead Data  ·  equipe Megslab</a:t>
-            </a:r>
-            <a:endParaRPr lang="fr-FR" sz="1000">
-              <a:solidFill>
-                <a:srgbClr val="6E7680"/>
-              </a:solidFill>
-              <a:latin typeface="Calibri" panose="020F0502020204030204" pitchFamily="34" charset="0"/>
-            </a:endParaRPr>
+              <a:t>Ouassim Megrad  ·  Lead Data  ·  équipe Megslab</a:t>
+            </a:r>
           </a:p>
         </p:txBody>
       </p:sp>
@@ -5522,7 +5504,7 @@
           <p:cNvPr id="6" name="ZoneTexte 5">
             <a:extLst>
               <a:ext uri="{FF2B5EF4-FFF2-40B4-BE49-F238E27FC236}">
-                <a16:creationId xmlns:a16="http://schemas.microsoft.com/office/drawing/2014/main" id="{B33B90FA-14EB-36C0-2100-21A4B34C5D43}"/>
+                <a16:creationId xmlns:a16="http://schemas.microsoft.com/office/drawing/2014/main" id="{52517CDE-DE95-971F-9587-A150B8A3D926}"/>
               </a:ext>
             </a:extLst>
           </p:cNvPr>
@@ -5562,7 +5544,7 @@
           <p:cNvPr id="7" name="Tableau 6">
             <a:extLst>
               <a:ext uri="{FF2B5EF4-FFF2-40B4-BE49-F238E27FC236}">
-                <a16:creationId xmlns:a16="http://schemas.microsoft.com/office/drawing/2014/main" id="{1D77FC42-5865-5AE8-CBFB-5601A682526A}"/>
+                <a16:creationId xmlns:a16="http://schemas.microsoft.com/office/drawing/2014/main" id="{545B9147-6CCC-8298-DDE2-F7BD8EF87639}"/>
               </a:ext>
             </a:extLst>
           </p:cNvPr>
@@ -5572,7 +5554,7 @@
           <p:nvPr>
             <p:extLst>
               <p:ext uri="{D42A27DB-BD31-4B8C-83A1-F6EECF244321}">
-                <p14:modId xmlns:p14="http://schemas.microsoft.com/office/powerpoint/2010/main" val="70040329"/>
+                <p14:modId xmlns:p14="http://schemas.microsoft.com/office/powerpoint/2010/main" val="833410960"/>
               </p:ext>
             </p:extLst>
           </p:nvPr>
@@ -5591,35 +5573,35 @@
                 <a:gridCol w="2540000">
                   <a:extLst>
                     <a:ext uri="{9D8B030D-6E8A-4147-A177-3AD203B41FA5}">
-                      <a16:colId xmlns:a16="http://schemas.microsoft.com/office/drawing/2014/main" val="1869130423"/>
+                      <a16:colId xmlns:a16="http://schemas.microsoft.com/office/drawing/2014/main" val="3682529408"/>
                     </a:ext>
                   </a:extLst>
                 </a:gridCol>
                 <a:gridCol w="1016000">
                   <a:extLst>
                     <a:ext uri="{9D8B030D-6E8A-4147-A177-3AD203B41FA5}">
-                      <a16:colId xmlns:a16="http://schemas.microsoft.com/office/drawing/2014/main" val="4258807219"/>
+                      <a16:colId xmlns:a16="http://schemas.microsoft.com/office/drawing/2014/main" val="1926898859"/>
                     </a:ext>
                   </a:extLst>
                 </a:gridCol>
                 <a:gridCol w="3556000">
                   <a:extLst>
                     <a:ext uri="{9D8B030D-6E8A-4147-A177-3AD203B41FA5}">
-                      <a16:colId xmlns:a16="http://schemas.microsoft.com/office/drawing/2014/main" val="3630518637"/>
+                      <a16:colId xmlns:a16="http://schemas.microsoft.com/office/drawing/2014/main" val="1263598916"/>
                     </a:ext>
                   </a:extLst>
                 </a:gridCol>
                 <a:gridCol w="2921000">
                   <a:extLst>
                     <a:ext uri="{9D8B030D-6E8A-4147-A177-3AD203B41FA5}">
-                      <a16:colId xmlns:a16="http://schemas.microsoft.com/office/drawing/2014/main" val="4078476513"/>
+                      <a16:colId xmlns:a16="http://schemas.microsoft.com/office/drawing/2014/main" val="615179796"/>
                     </a:ext>
                   </a:extLst>
                 </a:gridCol>
                 <a:gridCol w="1244600">
                   <a:extLst>
                     <a:ext uri="{9D8B030D-6E8A-4147-A177-3AD203B41FA5}">
-                      <a16:colId xmlns:a16="http://schemas.microsoft.com/office/drawing/2014/main" val="408559360"/>
+                      <a16:colId xmlns:a16="http://schemas.microsoft.com/office/drawing/2014/main" val="1267376481"/>
                     </a:ext>
                   </a:extLst>
                 </a:gridCol>
@@ -5737,7 +5719,7 @@
                 </a:tc>
                 <a:extLst>
                   <a:ext uri="{0D108BD9-81ED-4DB2-BD59-A6C34878D82A}">
-                    <a16:rowId xmlns:a16="http://schemas.microsoft.com/office/drawing/2014/main" val="3753699613"/>
+                    <a16:rowId xmlns:a16="http://schemas.microsoft.com/office/drawing/2014/main" val="1657259797"/>
                   </a:ext>
                 </a:extLst>
               </a:tr>
@@ -5776,7 +5758,7 @@
                           </a:solidFill>
                           <a:latin typeface="Calibri" panose="020F0502020204030204" pitchFamily="34" charset="0"/>
                         </a:rPr>
-                        <a:t>S1 a S2</a:t>
+                        <a:t>S1 à S2</a:t>
                       </a:r>
                     </a:p>
                   </a:txBody>
@@ -5798,7 +5780,7 @@
                           </a:solidFill>
                           <a:latin typeface="Calibri" panose="020F0502020204030204" pitchFamily="34" charset="0"/>
                         </a:rPr>
-                        <a:t>Installer les regles du jeu : RACI, comite, indicateurs</a:t>
+                        <a:t>Installer les règles du jeu : RACI, comité, indicateurs</a:t>
                       </a:r>
                     </a:p>
                   </a:txBody>
@@ -5820,7 +5802,7 @@
                           </a:solidFill>
                           <a:latin typeface="Calibri" panose="020F0502020204030204" pitchFamily="34" charset="0"/>
                         </a:rPr>
-                        <a:t>J1 : gouvernance validee</a:t>
+                        <a:t>J1 : gouvernance validée</a:t>
                       </a:r>
                     </a:p>
                   </a:txBody>
@@ -5854,7 +5836,7 @@
                 </a:tc>
                 <a:extLst>
                   <a:ext uri="{0D108BD9-81ED-4DB2-BD59-A6C34878D82A}">
-                    <a16:rowId xmlns:a16="http://schemas.microsoft.com/office/drawing/2014/main" val="4138882967"/>
+                    <a16:rowId xmlns:a16="http://schemas.microsoft.com/office/drawing/2014/main" val="481501817"/>
                   </a:ext>
                 </a:extLst>
               </a:tr>
@@ -5871,7 +5853,7 @@
                           </a:solidFill>
                           <a:latin typeface="Calibri" panose="020F0502020204030204" pitchFamily="34" charset="0"/>
                         </a:rPr>
-                        <a:t>Iterations produit (3 sprints)</a:t>
+                        <a:t>Itérations produit (3 sprints)</a:t>
                       </a:r>
                     </a:p>
                   </a:txBody>
@@ -5893,7 +5875,7 @@
                           </a:solidFill>
                           <a:latin typeface="Calibri" panose="020F0502020204030204" pitchFamily="34" charset="0"/>
                         </a:rPr>
-                        <a:t>S3 a S8</a:t>
+                        <a:t>S3 à S8</a:t>
                       </a:r>
                     </a:p>
                   </a:txBody>
@@ -5915,7 +5897,7 @@
                           </a:solidFill>
                           <a:latin typeface="Calibri" panose="020F0502020204030204" pitchFamily="34" charset="0"/>
                         </a:rPr>
-                        <a:t>Livrer les evolutions prioritaires du backlog</a:t>
+                        <a:t>Livrer les évolutions prioritaires du backlog</a:t>
                       </a:r>
                     </a:p>
                   </a:txBody>
@@ -5937,7 +5919,7 @@
                           </a:solidFill>
                           <a:latin typeface="Calibri" panose="020F0502020204030204" pitchFamily="34" charset="0"/>
                         </a:rPr>
-                        <a:t>J2 : reporting en place  ·  J3 : produit pret</a:t>
+                        <a:t>J2 : reporting en place  ·  J3 : produit prêt</a:t>
                       </a:r>
                     </a:p>
                   </a:txBody>
@@ -5959,7 +5941,7 @@
                           </a:solidFill>
                           <a:latin typeface="Calibri" panose="020F0502020204030204" pitchFamily="34" charset="0"/>
                         </a:rPr>
-                        <a:t>A venir</a:t>
+                        <a:t>À venir</a:t>
                       </a:r>
                     </a:p>
                   </a:txBody>
@@ -5971,7 +5953,7 @@
                 </a:tc>
                 <a:extLst>
                   <a:ext uri="{0D108BD9-81ED-4DB2-BD59-A6C34878D82A}">
-                    <a16:rowId xmlns:a16="http://schemas.microsoft.com/office/drawing/2014/main" val="2737109649"/>
+                    <a16:rowId xmlns:a16="http://schemas.microsoft.com/office/drawing/2014/main" val="2284390295"/>
                   </a:ext>
                 </a:extLst>
               </a:tr>
@@ -6010,7 +5992,7 @@
                           </a:solidFill>
                           <a:latin typeface="Calibri" panose="020F0502020204030204" pitchFamily="34" charset="0"/>
                         </a:rPr>
-                        <a:t>S6 a S10</a:t>
+                        <a:t>S6 à S10</a:t>
                       </a:r>
                     </a:p>
                   </a:txBody>
@@ -6054,7 +6036,7 @@
                           </a:solidFill>
                           <a:latin typeface="Calibri" panose="020F0502020204030204" pitchFamily="34" charset="0"/>
                         </a:rPr>
-                        <a:t>J4 : tous formes, satisfaction 4/5 min.</a:t>
+                        <a:t>J4 : tous formés, satisfaction 4/5 min.</a:t>
                       </a:r>
                     </a:p>
                   </a:txBody>
@@ -6076,7 +6058,7 @@
                           </a:solidFill>
                           <a:latin typeface="Calibri" panose="020F0502020204030204" pitchFamily="34" charset="0"/>
                         </a:rPr>
-                        <a:t>A venir</a:t>
+                        <a:t>À venir</a:t>
                       </a:r>
                     </a:p>
                   </a:txBody>
@@ -6088,7 +6070,7 @@
                 </a:tc>
                 <a:extLst>
                   <a:ext uri="{0D108BD9-81ED-4DB2-BD59-A6C34878D82A}">
-                    <a16:rowId xmlns:a16="http://schemas.microsoft.com/office/drawing/2014/main" val="3926319744"/>
+                    <a16:rowId xmlns:a16="http://schemas.microsoft.com/office/drawing/2014/main" val="642556481"/>
                   </a:ext>
                 </a:extLst>
               </a:tr>
@@ -6105,7 +6087,7 @@
                           </a:solidFill>
                           <a:latin typeface="Calibri" panose="020F0502020204030204" pitchFamily="34" charset="0"/>
                         </a:rPr>
-                        <a:t>Deploiement pilote</a:t>
+                        <a:t>Déploiement pilote</a:t>
                       </a:r>
                     </a:p>
                   </a:txBody>
@@ -6127,7 +6109,7 @@
                           </a:solidFill>
                           <a:latin typeface="Calibri" panose="020F0502020204030204" pitchFamily="34" charset="0"/>
                         </a:rPr>
-                        <a:t>S11 a S12</a:t>
+                        <a:t>S11 à S12</a:t>
                       </a:r>
                     </a:p>
                   </a:txBody>
@@ -6149,7 +6131,7 @@
                           </a:solidFill>
                           <a:latin typeface="Calibri" panose="020F0502020204030204" pitchFamily="34" charset="0"/>
                         </a:rPr>
-                        <a:t>Mesurer l'adoption en conditions reelles</a:t>
+                        <a:t>Mesurer l'adoption en conditions réelles</a:t>
                       </a:r>
                     </a:p>
                   </a:txBody>
@@ -6199,7 +6181,7 @@
                           </a:solidFill>
                           <a:latin typeface="Calibri" panose="020F0502020204030204" pitchFamily="34" charset="0"/>
                         </a:rPr>
-                        <a:t>A venir</a:t>
+                        <a:t>À venir</a:t>
                       </a:r>
                     </a:p>
                   </a:txBody>
@@ -6211,7 +6193,7 @@
                 </a:tc>
                 <a:extLst>
                   <a:ext uri="{0D108BD9-81ED-4DB2-BD59-A6C34878D82A}">
-                    <a16:rowId xmlns:a16="http://schemas.microsoft.com/office/drawing/2014/main" val="1249732724"/>
+                    <a16:rowId xmlns:a16="http://schemas.microsoft.com/office/drawing/2014/main" val="49545982"/>
                   </a:ext>
                 </a:extLst>
               </a:tr>
@@ -6224,7 +6206,7 @@
           <p:cNvPr id="8" name="ZoneTexte 7">
             <a:extLst>
               <a:ext uri="{FF2B5EF4-FFF2-40B4-BE49-F238E27FC236}">
-                <a16:creationId xmlns:a16="http://schemas.microsoft.com/office/drawing/2014/main" id="{E50FBAD2-FB4B-C4DB-94B3-6AE0FE177BEE}"/>
+                <a16:creationId xmlns:a16="http://schemas.microsoft.com/office/drawing/2014/main" id="{8F948715-2F79-5350-8140-8B20C5962DB5}"/>
               </a:ext>
             </a:extLst>
           </p:cNvPr>
@@ -6254,7 +6236,7 @@
                 </a:solidFill>
                 <a:latin typeface="Calibri" panose="020F0502020204030204" pitchFamily="34" charset="0"/>
               </a:rPr>
-              <a:t>Les formations se terminent avant le pilote (S10) : un pilote avec des utilisateurs non formes mesurerait l'echec de la formation, pas la valeur de l'outil. Les phases produit et formation se chevauchent volontairement : les agents ont peu de temps disponible, donc les formations s'etalent sur 5 semaines. L'ordre des taches suit les dependances : les roles avant la procedure d'escalade, les indicateurs avant le reporting, la qualite des donnees avant les tendances par ligne.</a:t>
+              <a:t>Les formations se terminent avant le pilote (S10) : un pilote avec des utilisateurs non formés mesurerait l'échec de la formation, pas la valeur de l'outil. Les phases produit et formation se chevauchent volontairement : les agents ont peu de temps disponible, donc les formations s'étalent sur 5 semaines. L'ordre des tâches suit les dépendances : les rôles avant la procédure d'escalade, les indicateurs avant le reporting, la qualité des données avant les tendances par ligne.</a:t>
             </a:r>
           </a:p>
         </p:txBody>
@@ -6262,7 +6244,7 @@
     </p:spTree>
     <p:extLst>
       <p:ext uri="{BB962C8B-B14F-4D97-AF65-F5344CB8AC3E}">
-        <p14:creationId xmlns:p14="http://schemas.microsoft.com/office/powerpoint/2010/main" val="2237835315"/>
+        <p14:creationId xmlns:p14="http://schemas.microsoft.com/office/powerpoint/2010/main" val="116879819"/>
       </p:ext>
     </p:extLst>
   </p:cSld>
@@ -6294,7 +6276,7 @@
           <p:cNvPr id="2" name="Rectangle 1">
             <a:extLst>
               <a:ext uri="{FF2B5EF4-FFF2-40B4-BE49-F238E27FC236}">
-                <a16:creationId xmlns:a16="http://schemas.microsoft.com/office/drawing/2014/main" id="{F0EF4D39-DA67-E2B8-C7B5-833EF982027E}"/>
+                <a16:creationId xmlns:a16="http://schemas.microsoft.com/office/drawing/2014/main" id="{8BBD0A8B-D4A4-2FC6-7056-10375C4A1DF1}"/>
               </a:ext>
             </a:extLst>
           </p:cNvPr>
@@ -6362,7 +6344,7 @@
           <p:cNvPr id="3" name="ZoneTexte 2">
             <a:extLst>
               <a:ext uri="{FF2B5EF4-FFF2-40B4-BE49-F238E27FC236}">
-                <a16:creationId xmlns:a16="http://schemas.microsoft.com/office/drawing/2014/main" id="{66ECE413-2005-1E17-92A9-B725FBDB310F}"/>
+                <a16:creationId xmlns:a16="http://schemas.microsoft.com/office/drawing/2014/main" id="{F91E13BD-0430-A8B8-5E85-561FD4ED1638}"/>
               </a:ext>
             </a:extLst>
           </p:cNvPr>
@@ -6392,7 +6374,7 @@
                 </a:solidFill>
                 <a:latin typeface="Calibri" panose="020F0502020204030204" pitchFamily="34" charset="0"/>
               </a:rPr>
-              <a:t>Gouvernance : qui decide quoi</a:t>
+              <a:t>Gouvernance : qui décide quoi</a:t>
             </a:r>
           </a:p>
         </p:txBody>
@@ -6402,7 +6384,7 @@
           <p:cNvPr id="4" name="ZoneTexte 3">
             <a:extLst>
               <a:ext uri="{FF2B5EF4-FFF2-40B4-BE49-F238E27FC236}">
-                <a16:creationId xmlns:a16="http://schemas.microsoft.com/office/drawing/2014/main" id="{633C71FF-D082-C12E-16AA-81C30852B023}"/>
+                <a16:creationId xmlns:a16="http://schemas.microsoft.com/office/drawing/2014/main" id="{C54BE7E2-F7BB-E9DE-72D3-32E53284E088}"/>
               </a:ext>
             </a:extLst>
           </p:cNvPr>
@@ -6432,7 +6414,7 @@
                 </a:solidFill>
                 <a:latin typeface="Calibri" panose="020F0502020204030204" pitchFamily="34" charset="0"/>
               </a:rPr>
-              <a:t>Une methode hybride, un arbitrage hebdomadaire, un seul responsable par activite</a:t>
+              <a:t>Une méthode hybride, un arbitrage hebdomadaire, un seul responsable par activité</a:t>
             </a:r>
           </a:p>
         </p:txBody>
@@ -6442,7 +6424,7 @@
           <p:cNvPr id="5" name="ZoneTexte 4">
             <a:extLst>
               <a:ext uri="{FF2B5EF4-FFF2-40B4-BE49-F238E27FC236}">
-                <a16:creationId xmlns:a16="http://schemas.microsoft.com/office/drawing/2014/main" id="{88583A43-442F-C13B-FD1F-7F53F2951094}"/>
+                <a16:creationId xmlns:a16="http://schemas.microsoft.com/office/drawing/2014/main" id="{7605F431-20D2-C002-9532-C9AE6106DBFA}"/>
               </a:ext>
             </a:extLst>
           </p:cNvPr>
@@ -6466,20 +6448,14 @@
           <a:lstStyle/>
           <a:p>
             <a:r>
-              <a:rPr lang="pt-BR" sz="1000">
+              <a:rPr lang="fr-FR" sz="1000">
                 <a:solidFill>
                   <a:srgbClr val="6E7680"/>
                 </a:solidFill>
                 <a:latin typeface="Calibri" panose="020F0502020204030204" pitchFamily="34" charset="0"/>
               </a:rPr>
-              <a:t>Ouassim Megrad  ·  Lead Data  ·  equipe Megslab</a:t>
-            </a:r>
-            <a:endParaRPr lang="fr-FR" sz="1000">
-              <a:solidFill>
-                <a:srgbClr val="6E7680"/>
-              </a:solidFill>
-              <a:latin typeface="Calibri" panose="020F0502020204030204" pitchFamily="34" charset="0"/>
-            </a:endParaRPr>
+              <a:t>Ouassim Megrad  ·  Lead Data  ·  équipe Megslab</a:t>
+            </a:r>
           </a:p>
         </p:txBody>
       </p:sp>
@@ -6488,7 +6464,7 @@
           <p:cNvPr id="6" name="ZoneTexte 5">
             <a:extLst>
               <a:ext uri="{FF2B5EF4-FFF2-40B4-BE49-F238E27FC236}">
-                <a16:creationId xmlns:a16="http://schemas.microsoft.com/office/drawing/2014/main" id="{E9526F15-8E48-A2E4-5EFC-2507A1CC844C}"/>
+                <a16:creationId xmlns:a16="http://schemas.microsoft.com/office/drawing/2014/main" id="{F3BAC118-D125-F603-9C45-391685243E9B}"/>
               </a:ext>
             </a:extLst>
           </p:cNvPr>
@@ -6528,7 +6504,7 @@
           <p:cNvPr id="7" name="Rectangle : coins arrondis 6">
             <a:extLst>
               <a:ext uri="{FF2B5EF4-FFF2-40B4-BE49-F238E27FC236}">
-                <a16:creationId xmlns:a16="http://schemas.microsoft.com/office/drawing/2014/main" id="{61E1D4BA-ECCA-5438-897D-B0789C568F73}"/>
+                <a16:creationId xmlns:a16="http://schemas.microsoft.com/office/drawing/2014/main" id="{19CF5A14-F6C7-9904-BBA4-133285DDFB00}"/>
               </a:ext>
             </a:extLst>
           </p:cNvPr>
@@ -6596,7 +6572,7 @@
           <p:cNvPr id="8" name="ZoneTexte 7">
             <a:extLst>
               <a:ext uri="{FF2B5EF4-FFF2-40B4-BE49-F238E27FC236}">
-                <a16:creationId xmlns:a16="http://schemas.microsoft.com/office/drawing/2014/main" id="{A6927510-2142-5FDD-C982-560155D7D810}"/>
+                <a16:creationId xmlns:a16="http://schemas.microsoft.com/office/drawing/2014/main" id="{E22BABED-CAD4-55DD-C351-F52825BADBAC}"/>
               </a:ext>
             </a:extLst>
           </p:cNvPr>
@@ -6626,7 +6602,7 @@
                 </a:solidFill>
                 <a:latin typeface="Calibri" panose="020F0502020204030204" pitchFamily="34" charset="0"/>
               </a:rPr>
-              <a:t>METHODE HYBRIDE</a:t>
+              <a:t>MÉTHODE HYBRIDE</a:t>
             </a:r>
           </a:p>
         </p:txBody>
@@ -6636,7 +6612,7 @@
           <p:cNvPr id="9" name="ZoneTexte 8">
             <a:extLst>
               <a:ext uri="{FF2B5EF4-FFF2-40B4-BE49-F238E27FC236}">
-                <a16:creationId xmlns:a16="http://schemas.microsoft.com/office/drawing/2014/main" id="{21436CC2-09B1-6C41-A525-9A89BEC4A32F}"/>
+                <a16:creationId xmlns:a16="http://schemas.microsoft.com/office/drawing/2014/main" id="{0498EF09-EDEA-6095-5042-0CA3EE9333BD}"/>
               </a:ext>
             </a:extLst>
           </p:cNvPr>
@@ -6666,7 +6642,7 @@
                 </a:solidFill>
                 <a:latin typeface="Calibri" panose="020F0502020204030204" pitchFamily="34" charset="0"/>
               </a:rPr>
-              <a:t>Produit : 3 sprints de 2 semaines, une cadence previsible et lisible pour la direction. Support : des demandes imprevisibles, traitees en continu dans une file de priorites limitee. Deux natures de travail, deux modes adaptes.</a:t>
+              <a:t>Produit : 3 sprints de 2 semaines, une cadence prévisible et lisible pour la direction. Support : des demandes imprévisibles, traitees en continu dans une file de priorités limitée. Deux natures de travail, deux modes adaptés.</a:t>
             </a:r>
           </a:p>
         </p:txBody>
@@ -6676,7 +6652,7 @@
           <p:cNvPr id="10" name="Rectangle : coins arrondis 9">
             <a:extLst>
               <a:ext uri="{FF2B5EF4-FFF2-40B4-BE49-F238E27FC236}">
-                <a16:creationId xmlns:a16="http://schemas.microsoft.com/office/drawing/2014/main" id="{24ECA930-1113-62E2-A663-6E48637ADEF7}"/>
+                <a16:creationId xmlns:a16="http://schemas.microsoft.com/office/drawing/2014/main" id="{EFE21A6C-D93A-6427-36A7-77920587696D}"/>
               </a:ext>
             </a:extLst>
           </p:cNvPr>
@@ -6744,7 +6720,7 @@
           <p:cNvPr id="11" name="ZoneTexte 10">
             <a:extLst>
               <a:ext uri="{FF2B5EF4-FFF2-40B4-BE49-F238E27FC236}">
-                <a16:creationId xmlns:a16="http://schemas.microsoft.com/office/drawing/2014/main" id="{912A5E38-37F9-F3BF-4FD8-B267FB7BD798}"/>
+                <a16:creationId xmlns:a16="http://schemas.microsoft.com/office/drawing/2014/main" id="{5539267A-6966-F246-F071-46FDC091F1DF}"/>
               </a:ext>
             </a:extLst>
           </p:cNvPr>
@@ -6774,7 +6750,7 @@
                 </a:solidFill>
                 <a:latin typeface="Calibri" panose="020F0502020204030204" pitchFamily="34" charset="0"/>
               </a:rPr>
-              <a:t>COMITE D'ARBITRAGE HEBDOMADAIRE</a:t>
+              <a:t>COMITÉ D'ARBITRAGE HEBDOMADAIRE</a:t>
             </a:r>
           </a:p>
         </p:txBody>
@@ -6784,7 +6760,7 @@
           <p:cNvPr id="12" name="ZoneTexte 11">
             <a:extLst>
               <a:ext uri="{FF2B5EF4-FFF2-40B4-BE49-F238E27FC236}">
-                <a16:creationId xmlns:a16="http://schemas.microsoft.com/office/drawing/2014/main" id="{07143F40-EE66-3829-F0BE-126B3D24E82E}"/>
+                <a16:creationId xmlns:a16="http://schemas.microsoft.com/office/drawing/2014/main" id="{EE6841B7-9F79-6067-00AE-E098EF5B3A69}"/>
               </a:ext>
             </a:extLst>
           </p:cNvPr>
@@ -6814,7 +6790,7 @@
                 </a:solidFill>
                 <a:latin typeface="Calibri" panose="020F0502020204030204" pitchFamily="34" charset="0"/>
               </a:rPr>
-              <a:t>PO, Lead Data et referent metier, 30 minutes chaque lundi : les conflits de priorites se reglent en jours, pas en mois. Exemple : export CSV ou alertes lisibles en premier ? Le PO tranche, eclaire par mes analyses de charge.</a:t>
+              <a:t>PO, Lead Data et référent métier, 30 minutes chaque lundi : les conflits de priorités se règlent en jours, pas en mois. Exemple : export CSV ou alertes lisibles en premier ? Le PO tranche, éclairé par mes analyses de charge.</a:t>
             </a:r>
           </a:p>
         </p:txBody>
@@ -6824,7 +6800,7 @@
           <p:cNvPr id="13" name="Tableau 12">
             <a:extLst>
               <a:ext uri="{FF2B5EF4-FFF2-40B4-BE49-F238E27FC236}">
-                <a16:creationId xmlns:a16="http://schemas.microsoft.com/office/drawing/2014/main" id="{1CAA91AA-FEEC-7FF3-4888-ED3B272C97D3}"/>
+                <a16:creationId xmlns:a16="http://schemas.microsoft.com/office/drawing/2014/main" id="{48B2E934-6564-04A6-5065-120C98A86A4C}"/>
               </a:ext>
             </a:extLst>
           </p:cNvPr>
@@ -6834,7 +6810,7 @@
           <p:nvPr>
             <p:extLst>
               <p:ext uri="{D42A27DB-BD31-4B8C-83A1-F6EECF244321}">
-                <p14:modId xmlns:p14="http://schemas.microsoft.com/office/powerpoint/2010/main" val="2353610496"/>
+                <p14:modId xmlns:p14="http://schemas.microsoft.com/office/powerpoint/2010/main" val="341569020"/>
               </p:ext>
             </p:extLst>
           </p:nvPr>
@@ -6853,14 +6829,14 @@
                 <a:gridCol w="2794000">
                   <a:extLst>
                     <a:ext uri="{9D8B030D-6E8A-4147-A177-3AD203B41FA5}">
-                      <a16:colId xmlns:a16="http://schemas.microsoft.com/office/drawing/2014/main" val="46205537"/>
+                      <a16:colId xmlns:a16="http://schemas.microsoft.com/office/drawing/2014/main" val="1264520063"/>
                     </a:ext>
                   </a:extLst>
                 </a:gridCol>
                 <a:gridCol w="8483600">
                   <a:extLst>
                     <a:ext uri="{9D8B030D-6E8A-4147-A177-3AD203B41FA5}">
-                      <a16:colId xmlns:a16="http://schemas.microsoft.com/office/drawing/2014/main" val="4048944391"/>
+                      <a16:colId xmlns:a16="http://schemas.microsoft.com/office/drawing/2014/main" val="1667040233"/>
                     </a:ext>
                   </a:extLst>
                 </a:gridCol>
@@ -6878,7 +6854,7 @@
                           </a:solidFill>
                           <a:latin typeface="Calibri" panose="020F0502020204030204" pitchFamily="34" charset="0"/>
                         </a:rPr>
-                        <a:t>Role</a:t>
+                        <a:t>Rôle</a:t>
                       </a:r>
                     </a:p>
                   </a:txBody>
@@ -6900,7 +6876,7 @@
                           </a:solidFill>
                           <a:latin typeface="Calibri" panose="020F0502020204030204" pitchFamily="34" charset="0"/>
                         </a:rPr>
-                        <a:t>Responsabilite dans le projet</a:t>
+                        <a:t>Responsabilité dans le projet</a:t>
                       </a:r>
                     </a:p>
                   </a:txBody>
@@ -6912,7 +6888,7 @@
                 </a:tc>
                 <a:extLst>
                   <a:ext uri="{0D108BD9-81ED-4DB2-BD59-A6C34878D82A}">
-                    <a16:rowId xmlns:a16="http://schemas.microsoft.com/office/drawing/2014/main" val="3501414195"/>
+                    <a16:rowId xmlns:a16="http://schemas.microsoft.com/office/drawing/2014/main" val="3560622832"/>
                   </a:ext>
                 </a:extLst>
               </a:tr>
@@ -6951,7 +6927,7 @@
                           </a:solidFill>
                           <a:latin typeface="Calibri" panose="020F0502020204030204" pitchFamily="34" charset="0"/>
                         </a:rPr>
-                        <a:t>Priorise le backlog et porte la valeur metier aupres des equipes</a:t>
+                        <a:t>Priorise le backlog et porte la valeur métier aupres des équipes</a:t>
                       </a:r>
                     </a:p>
                   </a:txBody>
@@ -6963,7 +6939,7 @@
                 </a:tc>
                 <a:extLst>
                   <a:ext uri="{0D108BD9-81ED-4DB2-BD59-A6C34878D82A}">
-                    <a16:rowId xmlns:a16="http://schemas.microsoft.com/office/drawing/2014/main" val="1921739675"/>
+                    <a16:rowId xmlns:a16="http://schemas.microsoft.com/office/drawing/2014/main" val="809892134"/>
                   </a:ext>
                 </a:extLst>
               </a:tr>
@@ -7002,7 +6978,7 @@
                           </a:solidFill>
                           <a:latin typeface="Calibri" panose="020F0502020204030204" pitchFamily="34" charset="0"/>
                         </a:rPr>
-                        <a:t>Planifie le projet, garantit la fiabilite des indicateurs, rend compte a la direction</a:t>
+                        <a:t>Planifie le projet, garantit la fiabilité des indicateurs, rend compte à la direction</a:t>
                       </a:r>
                     </a:p>
                   </a:txBody>
@@ -7014,7 +6990,7 @@
                 </a:tc>
                 <a:extLst>
                   <a:ext uri="{0D108BD9-81ED-4DB2-BD59-A6C34878D82A}">
-                    <a16:rowId xmlns:a16="http://schemas.microsoft.com/office/drawing/2014/main" val="3830723419"/>
+                    <a16:rowId xmlns:a16="http://schemas.microsoft.com/office/drawing/2014/main" val="1871626477"/>
                   </a:ext>
                 </a:extLst>
               </a:tr>
@@ -7031,7 +7007,7 @@
                           </a:solidFill>
                           <a:latin typeface="Calibri" panose="020F0502020204030204" pitchFamily="34" charset="0"/>
                         </a:rPr>
-                        <a:t>Referent accessibilite</a:t>
+                        <a:t>Référent accessibilité</a:t>
                       </a:r>
                     </a:p>
                   </a:txBody>
@@ -7053,7 +7029,7 @@
                           </a:solidFill>
                           <a:latin typeface="Calibri" panose="020F0502020204030204" pitchFamily="34" charset="0"/>
                         </a:rPr>
-                        <a:t>Valide l'accessibilite de chaque support avant toute diffusion</a:t>
+                        <a:t>Valide l'accessibilité de chaque support avant toute diffusion</a:t>
                       </a:r>
                     </a:p>
                   </a:txBody>
@@ -7065,7 +7041,7 @@
                 </a:tc>
                 <a:extLst>
                   <a:ext uri="{0D108BD9-81ED-4DB2-BD59-A6C34878D82A}">
-                    <a16:rowId xmlns:a16="http://schemas.microsoft.com/office/drawing/2014/main" val="2374700156"/>
+                    <a16:rowId xmlns:a16="http://schemas.microsoft.com/office/drawing/2014/main" val="2283588210"/>
                   </a:ext>
                 </a:extLst>
               </a:tr>
@@ -7078,7 +7054,7 @@
           <p:cNvPr id="14" name="Rectangle : coins arrondis 13">
             <a:extLst>
               <a:ext uri="{FF2B5EF4-FFF2-40B4-BE49-F238E27FC236}">
-                <a16:creationId xmlns:a16="http://schemas.microsoft.com/office/drawing/2014/main" id="{808A698C-0FFF-70CA-F41B-65A3F17091CE}"/>
+                <a16:creationId xmlns:a16="http://schemas.microsoft.com/office/drawing/2014/main" id="{F4BB0CF6-DEEA-511E-D4F2-4421786A0720}"/>
               </a:ext>
             </a:extLst>
           </p:cNvPr>
@@ -7144,7 +7120,7 @@
                 </a:solidFill>
                 <a:latin typeface="Calibri" panose="020F0502020204030204" pitchFamily="34" charset="0"/>
               </a:rPr>
-              <a:t>Decision attendue n°1 : valider ce mode de gouvernance</a:t>
+              <a:t>Décision attendue n°1 : valider ce mode de gouvernance</a:t>
             </a:r>
           </a:p>
         </p:txBody>
@@ -7152,7 +7128,7 @@
     </p:spTree>
     <p:extLst>
       <p:ext uri="{BB962C8B-B14F-4D97-AF65-F5344CB8AC3E}">
-        <p14:creationId xmlns:p14="http://schemas.microsoft.com/office/powerpoint/2010/main" val="115659412"/>
+        <p14:creationId xmlns:p14="http://schemas.microsoft.com/office/powerpoint/2010/main" val="933071220"/>
       </p:ext>
     </p:extLst>
   </p:cSld>
@@ -7184,7 +7160,7 @@
           <p:cNvPr id="2" name="Rectangle 1">
             <a:extLst>
               <a:ext uri="{FF2B5EF4-FFF2-40B4-BE49-F238E27FC236}">
-                <a16:creationId xmlns:a16="http://schemas.microsoft.com/office/drawing/2014/main" id="{A7433C96-FB86-1D6C-5E1F-80F65C6C7131}"/>
+                <a16:creationId xmlns:a16="http://schemas.microsoft.com/office/drawing/2014/main" id="{98EAB406-F9BF-CB02-1922-44B9705E15C8}"/>
               </a:ext>
             </a:extLst>
           </p:cNvPr>
@@ -7252,7 +7228,7 @@
           <p:cNvPr id="3" name="ZoneTexte 2">
             <a:extLst>
               <a:ext uri="{FF2B5EF4-FFF2-40B4-BE49-F238E27FC236}">
-                <a16:creationId xmlns:a16="http://schemas.microsoft.com/office/drawing/2014/main" id="{24FF9B6A-FD8B-C000-3AC8-D673CEE1FE10}"/>
+                <a16:creationId xmlns:a16="http://schemas.microsoft.com/office/drawing/2014/main" id="{E22BEDAF-0136-3790-B7DA-1A95BAFB445A}"/>
               </a:ext>
             </a:extLst>
           </p:cNvPr>
@@ -7282,7 +7258,7 @@
                 </a:solidFill>
                 <a:latin typeface="Calibri" panose="020F0502020204030204" pitchFamily="34" charset="0"/>
               </a:rPr>
-              <a:t>Indicateurs : des cibles chiffrees en 4 categories</a:t>
+              <a:t>Indicateurs : des cibles chiffrées en 4 catégories</a:t>
             </a:r>
           </a:p>
         </p:txBody>
@@ -7292,7 +7268,7 @@
           <p:cNvPr id="4" name="ZoneTexte 3">
             <a:extLst>
               <a:ext uri="{FF2B5EF4-FFF2-40B4-BE49-F238E27FC236}">
-                <a16:creationId xmlns:a16="http://schemas.microsoft.com/office/drawing/2014/main" id="{20AA1E9E-C2D4-6B07-49BA-00CDF16F2381}"/>
+                <a16:creationId xmlns:a16="http://schemas.microsoft.com/office/drawing/2014/main" id="{BB5BE975-BDA5-3AA1-BEE3-F3A92A96184C}"/>
               </a:ext>
             </a:extLst>
           </p:cNvPr>
@@ -7332,7 +7308,7 @@
           <p:cNvPr id="5" name="ZoneTexte 4">
             <a:extLst>
               <a:ext uri="{FF2B5EF4-FFF2-40B4-BE49-F238E27FC236}">
-                <a16:creationId xmlns:a16="http://schemas.microsoft.com/office/drawing/2014/main" id="{C66E8E41-55AC-5BFD-C01C-C6508149DCA7}"/>
+                <a16:creationId xmlns:a16="http://schemas.microsoft.com/office/drawing/2014/main" id="{9E29427E-7785-B7E4-75D5-F43650300D95}"/>
               </a:ext>
             </a:extLst>
           </p:cNvPr>
@@ -7356,20 +7332,14 @@
           <a:lstStyle/>
           <a:p>
             <a:r>
-              <a:rPr lang="pt-BR" sz="1000">
+              <a:rPr lang="fr-FR" sz="1000">
                 <a:solidFill>
                   <a:srgbClr val="6E7680"/>
                 </a:solidFill>
                 <a:latin typeface="Calibri" panose="020F0502020204030204" pitchFamily="34" charset="0"/>
               </a:rPr>
-              <a:t>Ouassim Megrad  ·  Lead Data  ·  equipe Megslab</a:t>
-            </a:r>
-            <a:endParaRPr lang="fr-FR" sz="1000">
-              <a:solidFill>
-                <a:srgbClr val="6E7680"/>
-              </a:solidFill>
-              <a:latin typeface="Calibri" panose="020F0502020204030204" pitchFamily="34" charset="0"/>
-            </a:endParaRPr>
+              <a:t>Ouassim Megrad  ·  Lead Data  ·  équipe Megslab</a:t>
+            </a:r>
           </a:p>
         </p:txBody>
       </p:sp>
@@ -7378,7 +7348,7 @@
           <p:cNvPr id="6" name="ZoneTexte 5">
             <a:extLst>
               <a:ext uri="{FF2B5EF4-FFF2-40B4-BE49-F238E27FC236}">
-                <a16:creationId xmlns:a16="http://schemas.microsoft.com/office/drawing/2014/main" id="{504145B5-A3A7-43AA-737A-03A53425884C}"/>
+                <a16:creationId xmlns:a16="http://schemas.microsoft.com/office/drawing/2014/main" id="{CFEA1335-FAB0-FDEB-4DD5-E8C8F2F3349F}"/>
               </a:ext>
             </a:extLst>
           </p:cNvPr>
@@ -7418,7 +7388,7 @@
           <p:cNvPr id="7" name="Tableau 6">
             <a:extLst>
               <a:ext uri="{FF2B5EF4-FFF2-40B4-BE49-F238E27FC236}">
-                <a16:creationId xmlns:a16="http://schemas.microsoft.com/office/drawing/2014/main" id="{371AB9A2-EEA4-FA1F-0F83-ECFF51641E50}"/>
+                <a16:creationId xmlns:a16="http://schemas.microsoft.com/office/drawing/2014/main" id="{EE0BFD03-A07F-A487-967D-98BC39CB0FCD}"/>
               </a:ext>
             </a:extLst>
           </p:cNvPr>
@@ -7428,7 +7398,7 @@
           <p:nvPr>
             <p:extLst>
               <p:ext uri="{D42A27DB-BD31-4B8C-83A1-F6EECF244321}">
-                <p14:modId xmlns:p14="http://schemas.microsoft.com/office/powerpoint/2010/main" val="755290840"/>
+                <p14:modId xmlns:p14="http://schemas.microsoft.com/office/powerpoint/2010/main" val="419892767"/>
               </p:ext>
             </p:extLst>
           </p:nvPr>
@@ -7447,28 +7417,28 @@
                 <a:gridCol w="4191000">
                   <a:extLst>
                     <a:ext uri="{9D8B030D-6E8A-4147-A177-3AD203B41FA5}">
-                      <a16:colId xmlns:a16="http://schemas.microsoft.com/office/drawing/2014/main" val="3104869892"/>
+                      <a16:colId xmlns:a16="http://schemas.microsoft.com/office/drawing/2014/main" val="1918618119"/>
                     </a:ext>
                   </a:extLst>
                 </a:gridCol>
                 <a:gridCol w="2413000">
                   <a:extLst>
                     <a:ext uri="{9D8B030D-6E8A-4147-A177-3AD203B41FA5}">
-                      <a16:colId xmlns:a16="http://schemas.microsoft.com/office/drawing/2014/main" val="3077908484"/>
+                      <a16:colId xmlns:a16="http://schemas.microsoft.com/office/drawing/2014/main" val="1083167727"/>
                     </a:ext>
                   </a:extLst>
                 </a:gridCol>
                 <a:gridCol w="2286000">
                   <a:extLst>
                     <a:ext uri="{9D8B030D-6E8A-4147-A177-3AD203B41FA5}">
-                      <a16:colId xmlns:a16="http://schemas.microsoft.com/office/drawing/2014/main" val="3993373086"/>
+                      <a16:colId xmlns:a16="http://schemas.microsoft.com/office/drawing/2014/main" val="3763416880"/>
                     </a:ext>
                   </a:extLst>
                 </a:gridCol>
                 <a:gridCol w="2387600">
                   <a:extLst>
                     <a:ext uri="{9D8B030D-6E8A-4147-A177-3AD203B41FA5}">
-                      <a16:colId xmlns:a16="http://schemas.microsoft.com/office/drawing/2014/main" val="1374144893"/>
+                      <a16:colId xmlns:a16="http://schemas.microsoft.com/office/drawing/2014/main" val="2860832400"/>
                     </a:ext>
                   </a:extLst>
                 </a:gridCol>
@@ -7552,7 +7522,7 @@
                           </a:solidFill>
                           <a:latin typeface="Calibri" panose="020F0502020204030204" pitchFamily="34" charset="0"/>
                         </a:rPr>
-                        <a:t>Categorie</a:t>
+                        <a:t>Catégorie</a:t>
                       </a:r>
                     </a:p>
                   </a:txBody>
@@ -7564,7 +7534,7 @@
                 </a:tc>
                 <a:extLst>
                   <a:ext uri="{0D108BD9-81ED-4DB2-BD59-A6C34878D82A}">
-                    <a16:rowId xmlns:a16="http://schemas.microsoft.com/office/drawing/2014/main" val="2772261964"/>
+                    <a16:rowId xmlns:a16="http://schemas.microsoft.com/office/drawing/2014/main" val="3293524610"/>
                   </a:ext>
                 </a:extLst>
               </a:tr>
@@ -7659,7 +7629,7 @@
                 </a:tc>
                 <a:extLst>
                   <a:ext uri="{0D108BD9-81ED-4DB2-BD59-A6C34878D82A}">
-                    <a16:rowId xmlns:a16="http://schemas.microsoft.com/office/drawing/2014/main" val="3206190516"/>
+                    <a16:rowId xmlns:a16="http://schemas.microsoft.com/office/drawing/2014/main" val="2053086480"/>
                   </a:ext>
                 </a:extLst>
               </a:tr>
@@ -7754,7 +7724,7 @@
                 </a:tc>
                 <a:extLst>
                   <a:ext uri="{0D108BD9-81ED-4DB2-BD59-A6C34878D82A}">
-                    <a16:rowId xmlns:a16="http://schemas.microsoft.com/office/drawing/2014/main" val="448315868"/>
+                    <a16:rowId xmlns:a16="http://schemas.microsoft.com/office/drawing/2014/main" val="2371016340"/>
                   </a:ext>
                 </a:extLst>
               </a:tr>
@@ -7771,7 +7741,7 @@
                           </a:solidFill>
                           <a:latin typeface="Calibri" panose="020F0502020204030204" pitchFamily="34" charset="0"/>
                         </a:rPr>
-                        <a:t>Fausses alertes percues</a:t>
+                        <a:t>Fausses alertes perçues</a:t>
                       </a:r>
                     </a:p>
                   </a:txBody>
@@ -7849,7 +7819,7 @@
                 </a:tc>
                 <a:extLst>
                   <a:ext uri="{0D108BD9-81ED-4DB2-BD59-A6C34878D82A}">
-                    <a16:rowId xmlns:a16="http://schemas.microsoft.com/office/drawing/2014/main" val="747746681"/>
+                    <a16:rowId xmlns:a16="http://schemas.microsoft.com/office/drawing/2014/main" val="2811011654"/>
                   </a:ext>
                 </a:extLst>
               </a:tr>
@@ -7944,7 +7914,7 @@
                 </a:tc>
                 <a:extLst>
                   <a:ext uri="{0D108BD9-81ED-4DB2-BD59-A6C34878D82A}">
-                    <a16:rowId xmlns:a16="http://schemas.microsoft.com/office/drawing/2014/main" val="860303279"/>
+                    <a16:rowId xmlns:a16="http://schemas.microsoft.com/office/drawing/2014/main" val="3743873276"/>
                   </a:ext>
                 </a:extLst>
               </a:tr>
@@ -7983,7 +7953,7 @@
                           </a:solidFill>
                           <a:latin typeface="Calibri" panose="020F0502020204030204" pitchFamily="34" charset="0"/>
                         </a:rPr>
-                        <a:t>formule definie en S4</a:t>
+                        <a:t>formule définie en S4</a:t>
                       </a:r>
                     </a:p>
                   </a:txBody>
@@ -8039,7 +8009,7 @@
                 </a:tc>
                 <a:extLst>
                   <a:ext uri="{0D108BD9-81ED-4DB2-BD59-A6C34878D82A}">
-                    <a16:rowId xmlns:a16="http://schemas.microsoft.com/office/drawing/2014/main" val="2612240183"/>
+                    <a16:rowId xmlns:a16="http://schemas.microsoft.com/office/drawing/2014/main" val="2972153781"/>
                   </a:ext>
                 </a:extLst>
               </a:tr>
@@ -8052,7 +8022,7 @@
           <p:cNvPr id="8" name="ZoneTexte 7">
             <a:extLst>
               <a:ext uri="{FF2B5EF4-FFF2-40B4-BE49-F238E27FC236}">
-                <a16:creationId xmlns:a16="http://schemas.microsoft.com/office/drawing/2014/main" id="{4569078D-B36D-0897-59B5-88A519757B39}"/>
+                <a16:creationId xmlns:a16="http://schemas.microsoft.com/office/drawing/2014/main" id="{952FA3D0-1D45-C828-CE2D-9BB5B1930DC2}"/>
               </a:ext>
             </a:extLst>
           </p:cNvPr>
@@ -8082,7 +8052,7 @@
                 </a:solidFill>
                 <a:latin typeface="Calibri" panose="020F0502020204030204" pitchFamily="34" charset="0"/>
               </a:rPr>
-              <a:t>Je n'ai rien invente : toutes les valeurs de depart et les cibles viennent du dossier fourni par la direction. En tant que Lead Data, ma garantie est la suivante : chaque indicateur a un responsable designe, une formule documentee au glossaire et une action prevue en cas de derive. L'engagement environnemental est tenu : l'indicateur d'empreinte numerique est defini en semaine 4, puis suivi chaque mois.</a:t>
+              <a:t>Je n'ai rien inventé : toutes les valeurs de départ et les cibles viennent du dossier fourni par la direction. En tant que Lead Data, ma garantie est la suivante : chaque indicateur a un responsable désigné, une formule documentée au glossaire et une action prévue en cas de dérive. L'engagement environnemental est tenu : l'indicateur d'empreinte numerique est defini en semaine 4, puis suivi chaque mois.</a:t>
             </a:r>
           </a:p>
         </p:txBody>
@@ -8090,7 +8060,7 @@
     </p:spTree>
     <p:extLst>
       <p:ext uri="{BB962C8B-B14F-4D97-AF65-F5344CB8AC3E}">
-        <p14:creationId xmlns:p14="http://schemas.microsoft.com/office/powerpoint/2010/main" val="176265746"/>
+        <p14:creationId xmlns:p14="http://schemas.microsoft.com/office/powerpoint/2010/main" val="1252042336"/>
       </p:ext>
     </p:extLst>
   </p:cSld>
@@ -8122,7 +8092,7 @@
           <p:cNvPr id="2" name="Rectangle 1">
             <a:extLst>
               <a:ext uri="{FF2B5EF4-FFF2-40B4-BE49-F238E27FC236}">
-                <a16:creationId xmlns:a16="http://schemas.microsoft.com/office/drawing/2014/main" id="{542495BB-0DAE-B3D0-67DD-331FDD848BEC}"/>
+                <a16:creationId xmlns:a16="http://schemas.microsoft.com/office/drawing/2014/main" id="{6729EDEC-9B25-EB68-4375-045701678421}"/>
               </a:ext>
             </a:extLst>
           </p:cNvPr>
@@ -8190,7 +8160,7 @@
           <p:cNvPr id="3" name="ZoneTexte 2">
             <a:extLst>
               <a:ext uri="{FF2B5EF4-FFF2-40B4-BE49-F238E27FC236}">
-                <a16:creationId xmlns:a16="http://schemas.microsoft.com/office/drawing/2014/main" id="{7048BABE-0F62-B728-A691-A1BF89757E3A}"/>
+                <a16:creationId xmlns:a16="http://schemas.microsoft.com/office/drawing/2014/main" id="{D9647457-9EAA-5BFC-0411-B606A98B3F89}"/>
               </a:ext>
             </a:extLst>
           </p:cNvPr>
@@ -8230,7 +8200,7 @@
           <p:cNvPr id="4" name="ZoneTexte 3">
             <a:extLst>
               <a:ext uri="{FF2B5EF4-FFF2-40B4-BE49-F238E27FC236}">
-                <a16:creationId xmlns:a16="http://schemas.microsoft.com/office/drawing/2014/main" id="{46A8DA09-1377-F501-0606-655A139017BB}"/>
+                <a16:creationId xmlns:a16="http://schemas.microsoft.com/office/drawing/2014/main" id="{5E3E45B6-9188-F6C8-5713-4547F6328E5C}"/>
               </a:ext>
             </a:extLst>
           </p:cNvPr>
@@ -8260,7 +8230,7 @@
                 </a:solidFill>
                 <a:latin typeface="Calibri" panose="020F0502020204030204" pitchFamily="34" charset="0"/>
               </a:rPr>
-              <a:t>6 risques documentes au registre ; chaque risque a une parade et un plan B a seuil defini</a:t>
+              <a:t>6 risques documentés au registre ; chaque risque a une parade et un plan B à seuil défini</a:t>
             </a:r>
           </a:p>
         </p:txBody>
@@ -8270,7 +8240,7 @@
           <p:cNvPr id="5" name="ZoneTexte 4">
             <a:extLst>
               <a:ext uri="{FF2B5EF4-FFF2-40B4-BE49-F238E27FC236}">
-                <a16:creationId xmlns:a16="http://schemas.microsoft.com/office/drawing/2014/main" id="{06C71619-E298-389D-9162-8090855230F2}"/>
+                <a16:creationId xmlns:a16="http://schemas.microsoft.com/office/drawing/2014/main" id="{FC4BBF25-BEE5-BA8A-FE4B-B81EB2426188}"/>
               </a:ext>
             </a:extLst>
           </p:cNvPr>
@@ -8294,20 +8264,14 @@
           <a:lstStyle/>
           <a:p>
             <a:r>
-              <a:rPr lang="pt-BR" sz="1000">
+              <a:rPr lang="fr-FR" sz="1000">
                 <a:solidFill>
                   <a:srgbClr val="6E7680"/>
                 </a:solidFill>
                 <a:latin typeface="Calibri" panose="020F0502020204030204" pitchFamily="34" charset="0"/>
               </a:rPr>
-              <a:t>Ouassim Megrad  ·  Lead Data  ·  equipe Megslab</a:t>
-            </a:r>
-            <a:endParaRPr lang="fr-FR" sz="1000">
-              <a:solidFill>
-                <a:srgbClr val="6E7680"/>
-              </a:solidFill>
-              <a:latin typeface="Calibri" panose="020F0502020204030204" pitchFamily="34" charset="0"/>
-            </a:endParaRPr>
+              <a:t>Ouassim Megrad  ·  Lead Data  ·  équipe Megslab</a:t>
+            </a:r>
           </a:p>
         </p:txBody>
       </p:sp>
@@ -8316,7 +8280,7 @@
           <p:cNvPr id="6" name="ZoneTexte 5">
             <a:extLst>
               <a:ext uri="{FF2B5EF4-FFF2-40B4-BE49-F238E27FC236}">
-                <a16:creationId xmlns:a16="http://schemas.microsoft.com/office/drawing/2014/main" id="{667B646E-EAED-0E87-AC89-E08063B4747C}"/>
+                <a16:creationId xmlns:a16="http://schemas.microsoft.com/office/drawing/2014/main" id="{58A6EF25-FC68-28E1-181C-A2DA45615383}"/>
               </a:ext>
             </a:extLst>
           </p:cNvPr>
@@ -8356,7 +8320,7 @@
           <p:cNvPr id="7" name="Tableau 6">
             <a:extLst>
               <a:ext uri="{FF2B5EF4-FFF2-40B4-BE49-F238E27FC236}">
-                <a16:creationId xmlns:a16="http://schemas.microsoft.com/office/drawing/2014/main" id="{BEE9319F-CE44-184A-B510-B182E8DFECFE}"/>
+                <a16:creationId xmlns:a16="http://schemas.microsoft.com/office/drawing/2014/main" id="{9CB08731-C0C8-1A4A-B8C3-B7A3C89FA6FA}"/>
               </a:ext>
             </a:extLst>
           </p:cNvPr>
@@ -8366,7 +8330,7 @@
           <p:nvPr>
             <p:extLst>
               <p:ext uri="{D42A27DB-BD31-4B8C-83A1-F6EECF244321}">
-                <p14:modId xmlns:p14="http://schemas.microsoft.com/office/powerpoint/2010/main" val="1779175660"/>
+                <p14:modId xmlns:p14="http://schemas.microsoft.com/office/powerpoint/2010/main" val="1742180757"/>
               </p:ext>
             </p:extLst>
           </p:nvPr>
@@ -8385,28 +8349,28 @@
                 <a:gridCol w="2667000">
                   <a:extLst>
                     <a:ext uri="{9D8B030D-6E8A-4147-A177-3AD203B41FA5}">
-                      <a16:colId xmlns:a16="http://schemas.microsoft.com/office/drawing/2014/main" val="3804818306"/>
+                      <a16:colId xmlns:a16="http://schemas.microsoft.com/office/drawing/2014/main" val="1968426629"/>
                     </a:ext>
                   </a:extLst>
                 </a:gridCol>
                 <a:gridCol w="889000">
                   <a:extLst>
                     <a:ext uri="{9D8B030D-6E8A-4147-A177-3AD203B41FA5}">
-                      <a16:colId xmlns:a16="http://schemas.microsoft.com/office/drawing/2014/main" val="2488174200"/>
+                      <a16:colId xmlns:a16="http://schemas.microsoft.com/office/drawing/2014/main" val="1963380794"/>
                     </a:ext>
                   </a:extLst>
                 </a:gridCol>
                 <a:gridCol w="3810000">
                   <a:extLst>
                     <a:ext uri="{9D8B030D-6E8A-4147-A177-3AD203B41FA5}">
-                      <a16:colId xmlns:a16="http://schemas.microsoft.com/office/drawing/2014/main" val="1078646755"/>
+                      <a16:colId xmlns:a16="http://schemas.microsoft.com/office/drawing/2014/main" val="2791513962"/>
                     </a:ext>
                   </a:extLst>
                 </a:gridCol>
                 <a:gridCol w="3911600">
                   <a:extLst>
                     <a:ext uri="{9D8B030D-6E8A-4147-A177-3AD203B41FA5}">
-                      <a16:colId xmlns:a16="http://schemas.microsoft.com/office/drawing/2014/main" val="464448686"/>
+                      <a16:colId xmlns:a16="http://schemas.microsoft.com/office/drawing/2014/main" val="4228284019"/>
                     </a:ext>
                   </a:extLst>
                 </a:gridCol>
@@ -8468,7 +8432,7 @@
                           </a:solidFill>
                           <a:latin typeface="Calibri" panose="020F0502020204030204" pitchFamily="34" charset="0"/>
                         </a:rPr>
-                        <a:t>Parade preventive</a:t>
+                        <a:t>Parade préventive</a:t>
                       </a:r>
                     </a:p>
                   </a:txBody>
@@ -8490,7 +8454,7 @@
                           </a:solidFill>
                           <a:latin typeface="Calibri" panose="020F0502020204030204" pitchFamily="34" charset="0"/>
                         </a:rPr>
-                        <a:t>Plan B (seuil defini a l'avance)</a:t>
+                        <a:t>Plan B (seuil défini à l'avance)</a:t>
                       </a:r>
                     </a:p>
                   </a:txBody>
@@ -8502,7 +8466,7 @@
                 </a:tc>
                 <a:extLst>
                   <a:ext uri="{0D108BD9-81ED-4DB2-BD59-A6C34878D82A}">
-                    <a16:rowId xmlns:a16="http://schemas.microsoft.com/office/drawing/2014/main" val="2241323043"/>
+                    <a16:rowId xmlns:a16="http://schemas.microsoft.com/office/drawing/2014/main" val="345225903"/>
                   </a:ext>
                 </a:extLst>
               </a:tr>
@@ -8541,7 +8505,7 @@
                           </a:solidFill>
                           <a:latin typeface="Calibri" panose="020F0502020204030204" pitchFamily="34" charset="0"/>
                         </a:rPr>
-                        <a:t>ELEVE</a:t>
+                        <a:t>ÉLEVÉ</a:t>
                       </a:r>
                     </a:p>
                   </a:txBody>
@@ -8563,7 +8527,7 @@
                           </a:solidFill>
                           <a:latin typeface="Calibri" panose="020F0502020204030204" pitchFamily="34" charset="0"/>
                         </a:rPr>
-                        <a:t>Formations courtes, co-construction avec le terrain, canal de retours structure</a:t>
+                        <a:t>Formations courtes, co-construction avec le terrain, canal de retours structuré</a:t>
                       </a:r>
                     </a:p>
                   </a:txBody>
@@ -8585,7 +8549,7 @@
                           </a:solidFill>
                           <a:latin typeface="Calibri" panose="020F0502020204030204" pitchFamily="34" charset="0"/>
                         </a:rPr>
-                        <a:t>Adoption sous 50 % en S8 : ateliers cibles et accompagnement en binome</a:t>
+                        <a:t>Adoption sous 50 % en S8 : ateliers ciblés et accompagnement en binôme</a:t>
                       </a:r>
                     </a:p>
                   </a:txBody>
@@ -8597,7 +8561,7 @@
                 </a:tc>
                 <a:extLst>
                   <a:ext uri="{0D108BD9-81ED-4DB2-BD59-A6C34878D82A}">
-                    <a16:rowId xmlns:a16="http://schemas.microsoft.com/office/drawing/2014/main" val="278030841"/>
+                    <a16:rowId xmlns:a16="http://schemas.microsoft.com/office/drawing/2014/main" val="872594074"/>
                   </a:ext>
                 </a:extLst>
               </a:tr>
@@ -8614,7 +8578,7 @@
                           </a:solidFill>
                           <a:latin typeface="Calibri" panose="020F0502020204030204" pitchFamily="34" charset="0"/>
                         </a:rPr>
-                        <a:t>Conflits de priorites IT et metier</a:t>
+                        <a:t>Conflits de priorités IT et métier</a:t>
                       </a:r>
                     </a:p>
                   </a:txBody>
@@ -8636,7 +8600,7 @@
                           </a:solidFill>
                           <a:latin typeface="Calibri" panose="020F0502020204030204" pitchFamily="34" charset="0"/>
                         </a:rPr>
-                        <a:t>ELEVE</a:t>
+                        <a:t>ÉLEVÉ</a:t>
                       </a:r>
                     </a:p>
                   </a:txBody>
@@ -8658,7 +8622,7 @@
                           </a:solidFill>
                           <a:latin typeface="Calibri" panose="020F0502020204030204" pitchFamily="34" charset="0"/>
                         </a:rPr>
-                        <a:t>Comite d'arbitrage hebdomadaire, backlog justifie par ecrit</a:t>
+                        <a:t>Comité d'arbitrage hebdomadaire, backlog justifié par écrit</a:t>
                       </a:r>
                     </a:p>
                   </a:txBody>
@@ -8680,7 +8644,7 @@
                           </a:solidFill>
                           <a:latin typeface="Calibri" panose="020F0502020204030204" pitchFamily="34" charset="0"/>
                         </a:rPr>
-                        <a:t>Escalade a la direction avec dossier d'arbitrage documente</a:t>
+                        <a:t>Escalade à la direction avec dossier d'arbitrage documenté</a:t>
                       </a:r>
                     </a:p>
                   </a:txBody>
@@ -8692,7 +8656,7 @@
                 </a:tc>
                 <a:extLst>
                   <a:ext uri="{0D108BD9-81ED-4DB2-BD59-A6C34878D82A}">
-                    <a16:rowId xmlns:a16="http://schemas.microsoft.com/office/drawing/2014/main" val="2492854440"/>
+                    <a16:rowId xmlns:a16="http://schemas.microsoft.com/office/drawing/2014/main" val="3334724315"/>
                   </a:ext>
                 </a:extLst>
               </a:tr>
@@ -8709,7 +8673,7 @@
                           </a:solidFill>
                           <a:latin typeface="Calibri" panose="020F0502020204030204" pitchFamily="34" charset="0"/>
                         </a:rPr>
-                        <a:t>Accessibilite insuffisante</a:t>
+                        <a:t>Accessibilité insuffisante</a:t>
                       </a:r>
                     </a:p>
                   </a:txBody>
@@ -8731,7 +8695,7 @@
                           </a:solidFill>
                           <a:latin typeface="Calibri" panose="020F0502020204030204" pitchFamily="34" charset="0"/>
                         </a:rPr>
-                        <a:t>ELEVE</a:t>
+                        <a:t>ÉLEVÉ</a:t>
                       </a:r>
                     </a:p>
                   </a:txBody>
@@ -8753,7 +8717,7 @@
                           </a:solidFill>
                           <a:latin typeface="Calibri" panose="020F0502020204030204" pitchFamily="34" charset="0"/>
                         </a:rPr>
-                        <a:t>Validation de chaque support avant diffusion par le referent</a:t>
+                        <a:t>Validation de chaque support avant diffusion par le référent</a:t>
                       </a:r>
                     </a:p>
                   </a:txBody>
@@ -8775,7 +8739,7 @@
                           </a:solidFill>
                           <a:latin typeface="Calibri" panose="020F0502020204030204" pitchFamily="34" charset="0"/>
                         </a:rPr>
-                        <a:t>Remediation prioritaire et formats alternatifs immediats</a:t>
+                        <a:t>Remédiation prioritaire et formats alternatifs immédiats</a:t>
                       </a:r>
                     </a:p>
                   </a:txBody>
@@ -8787,7 +8751,7 @@
                 </a:tc>
                 <a:extLst>
                   <a:ext uri="{0D108BD9-81ED-4DB2-BD59-A6C34878D82A}">
-                    <a16:rowId xmlns:a16="http://schemas.microsoft.com/office/drawing/2014/main" val="839628061"/>
+                    <a16:rowId xmlns:a16="http://schemas.microsoft.com/office/drawing/2014/main" val="3019535339"/>
                   </a:ext>
                 </a:extLst>
               </a:tr>
@@ -8800,7 +8764,7 @@
           <p:cNvPr id="8" name="ZoneTexte 7">
             <a:extLst>
               <a:ext uri="{FF2B5EF4-FFF2-40B4-BE49-F238E27FC236}">
-                <a16:creationId xmlns:a16="http://schemas.microsoft.com/office/drawing/2014/main" id="{784E7EF6-5CA6-B718-27F3-30737C85CAE9}"/>
+                <a16:creationId xmlns:a16="http://schemas.microsoft.com/office/drawing/2014/main" id="{9F0AF696-1D6F-5728-40B3-6F62EA7D8E64}"/>
               </a:ext>
             </a:extLst>
           </p:cNvPr>
@@ -8830,7 +8794,7 @@
                 </a:solidFill>
                 <a:latin typeface="Calibri" panose="020F0502020204030204" pitchFamily="34" charset="0"/>
               </a:rPr>
-              <a:t>Le principe : la decision difficile est preparee a froid, pas dans la panique. Chaque seuil declencheur est defini a l'avance et suivi dans le reporting hebdomadaire : si un signal passe au rouge, le plan B s'applique immediatement et la direction est informee avec une decision a prendre clairement formulee.</a:t>
+              <a:t>Le principe : la décision difficile est préparée à froid, pas dans la panique. Chaque seuil déclencheur est défini à l'avance et suivi dans le reporting hebdomadaire : si un signal passe au rouge, le plan B s'applique immédiatement et la direction est informée avec une décision à prendre clairement formulée.</a:t>
             </a:r>
           </a:p>
         </p:txBody>
@@ -8838,7 +8802,7 @@
     </p:spTree>
     <p:extLst>
       <p:ext uri="{BB962C8B-B14F-4D97-AF65-F5344CB8AC3E}">
-        <p14:creationId xmlns:p14="http://schemas.microsoft.com/office/powerpoint/2010/main" val="2514275997"/>
+        <p14:creationId xmlns:p14="http://schemas.microsoft.com/office/powerpoint/2010/main" val="1447789267"/>
       </p:ext>
     </p:extLst>
   </p:cSld>
@@ -8870,7 +8834,7 @@
           <p:cNvPr id="2" name="Rectangle 1">
             <a:extLst>
               <a:ext uri="{FF2B5EF4-FFF2-40B4-BE49-F238E27FC236}">
-                <a16:creationId xmlns:a16="http://schemas.microsoft.com/office/drawing/2014/main" id="{4EFBF6C6-77D8-4C22-8F86-CAC3A00EF08A}"/>
+                <a16:creationId xmlns:a16="http://schemas.microsoft.com/office/drawing/2014/main" id="{9B9C1795-41AF-3686-5A26-738B0E0B35D6}"/>
               </a:ext>
             </a:extLst>
           </p:cNvPr>
@@ -8938,7 +8902,7 @@
           <p:cNvPr id="3" name="ZoneTexte 2">
             <a:extLst>
               <a:ext uri="{FF2B5EF4-FFF2-40B4-BE49-F238E27FC236}">
-                <a16:creationId xmlns:a16="http://schemas.microsoft.com/office/drawing/2014/main" id="{DF30188B-69F4-FBB9-8C3C-8A774B25324E}"/>
+                <a16:creationId xmlns:a16="http://schemas.microsoft.com/office/drawing/2014/main" id="{D7470EEA-0D0E-CF02-D28F-88F6BA6361CA}"/>
               </a:ext>
             </a:extLst>
           </p:cNvPr>
@@ -8978,7 +8942,7 @@
           <p:cNvPr id="4" name="ZoneTexte 3">
             <a:extLst>
               <a:ext uri="{FF2B5EF4-FFF2-40B4-BE49-F238E27FC236}">
-                <a16:creationId xmlns:a16="http://schemas.microsoft.com/office/drawing/2014/main" id="{3987EE6C-CD9D-7488-D3AE-8B5E89EE07EC}"/>
+                <a16:creationId xmlns:a16="http://schemas.microsoft.com/office/drawing/2014/main" id="{50CC02BD-896D-D3A6-696C-EC69C883A940}"/>
               </a:ext>
             </a:extLst>
           </p:cNvPr>
@@ -9008,7 +8972,7 @@
                 </a:solidFill>
                 <a:latin typeface="Calibri" panose="020F0502020204030204" pitchFamily="34" charset="0"/>
               </a:rPr>
-              <a:t>6 retours recueillis sur le prototype, priorises en croisant impact et frequence</a:t>
+              <a:t>6 retours recueillis sur le prototype, priorisés en croisant impact et fréquence</a:t>
             </a:r>
           </a:p>
         </p:txBody>
@@ -9018,7 +8982,7 @@
           <p:cNvPr id="5" name="ZoneTexte 4">
             <a:extLst>
               <a:ext uri="{FF2B5EF4-FFF2-40B4-BE49-F238E27FC236}">
-                <a16:creationId xmlns:a16="http://schemas.microsoft.com/office/drawing/2014/main" id="{AD2D5ED7-71E9-0813-285B-DF41F965AE57}"/>
+                <a16:creationId xmlns:a16="http://schemas.microsoft.com/office/drawing/2014/main" id="{AC502393-9A1E-1D9B-2AF0-2185E4A126F0}"/>
               </a:ext>
             </a:extLst>
           </p:cNvPr>
@@ -9042,20 +9006,14 @@
           <a:lstStyle/>
           <a:p>
             <a:r>
-              <a:rPr lang="pt-BR" sz="1000">
+              <a:rPr lang="fr-FR" sz="1000">
                 <a:solidFill>
                   <a:srgbClr val="6E7680"/>
                 </a:solidFill>
                 <a:latin typeface="Calibri" panose="020F0502020204030204" pitchFamily="34" charset="0"/>
               </a:rPr>
-              <a:t>Ouassim Megrad  ·  Lead Data  ·  equipe Megslab</a:t>
-            </a:r>
-            <a:endParaRPr lang="fr-FR" sz="1000">
-              <a:solidFill>
-                <a:srgbClr val="6E7680"/>
-              </a:solidFill>
-              <a:latin typeface="Calibri" panose="020F0502020204030204" pitchFamily="34" charset="0"/>
-            </a:endParaRPr>
+              <a:t>Ouassim Megrad  ·  Lead Data  ·  équipe Megslab</a:t>
+            </a:r>
           </a:p>
         </p:txBody>
       </p:sp>
@@ -9064,7 +9022,7 @@
           <p:cNvPr id="6" name="ZoneTexte 5">
             <a:extLst>
               <a:ext uri="{FF2B5EF4-FFF2-40B4-BE49-F238E27FC236}">
-                <a16:creationId xmlns:a16="http://schemas.microsoft.com/office/drawing/2014/main" id="{D120A43E-BE95-88AE-5631-588279BC3C51}"/>
+                <a16:creationId xmlns:a16="http://schemas.microsoft.com/office/drawing/2014/main" id="{EE849531-873C-8852-03CB-53E4AF3AD5DC}"/>
               </a:ext>
             </a:extLst>
           </p:cNvPr>
@@ -9104,7 +9062,7 @@
           <p:cNvPr id="7" name="Tableau 6">
             <a:extLst>
               <a:ext uri="{FF2B5EF4-FFF2-40B4-BE49-F238E27FC236}">
-                <a16:creationId xmlns:a16="http://schemas.microsoft.com/office/drawing/2014/main" id="{2313C2F8-D383-CB32-B4DE-FD283E3AE40F}"/>
+                <a16:creationId xmlns:a16="http://schemas.microsoft.com/office/drawing/2014/main" id="{6AA38FC2-DCC8-FE67-8889-B470642D3534}"/>
               </a:ext>
             </a:extLst>
           </p:cNvPr>
@@ -9114,7 +9072,7 @@
           <p:nvPr>
             <p:extLst>
               <p:ext uri="{D42A27DB-BD31-4B8C-83A1-F6EECF244321}">
-                <p14:modId xmlns:p14="http://schemas.microsoft.com/office/powerpoint/2010/main" val="1400552060"/>
+                <p14:modId xmlns:p14="http://schemas.microsoft.com/office/powerpoint/2010/main" val="2330635093"/>
               </p:ext>
             </p:extLst>
           </p:nvPr>
@@ -9133,21 +9091,21 @@
                 <a:gridCol w="4699000">
                   <a:extLst>
                     <a:ext uri="{9D8B030D-6E8A-4147-A177-3AD203B41FA5}">
-                      <a16:colId xmlns:a16="http://schemas.microsoft.com/office/drawing/2014/main" val="104763683"/>
+                      <a16:colId xmlns:a16="http://schemas.microsoft.com/office/drawing/2014/main" val="1161326983"/>
                     </a:ext>
                   </a:extLst>
                 </a:gridCol>
                 <a:gridCol w="4826000">
                   <a:extLst>
                     <a:ext uri="{9D8B030D-6E8A-4147-A177-3AD203B41FA5}">
-                      <a16:colId xmlns:a16="http://schemas.microsoft.com/office/drawing/2014/main" val="1286942796"/>
+                      <a16:colId xmlns:a16="http://schemas.microsoft.com/office/drawing/2014/main" val="3341089770"/>
                     </a:ext>
                   </a:extLst>
                 </a:gridCol>
                 <a:gridCol w="1752600">
                   <a:extLst>
                     <a:ext uri="{9D8B030D-6E8A-4147-A177-3AD203B41FA5}">
-                      <a16:colId xmlns:a16="http://schemas.microsoft.com/office/drawing/2014/main" val="2082317615"/>
+                      <a16:colId xmlns:a16="http://schemas.microsoft.com/office/drawing/2014/main" val="1953605946"/>
                     </a:ext>
                   </a:extLst>
                 </a:gridCol>
@@ -9187,7 +9145,7 @@
                           </a:solidFill>
                           <a:latin typeface="Calibri" panose="020F0502020204030204" pitchFamily="34" charset="0"/>
                         </a:rPr>
-                        <a:t>Ma reponse</a:t>
+                        <a:t>Ma réponse</a:t>
                       </a:r>
                     </a:p>
                   </a:txBody>
@@ -9221,7 +9179,7 @@
                 </a:tc>
                 <a:extLst>
                   <a:ext uri="{0D108BD9-81ED-4DB2-BD59-A6C34878D82A}">
-                    <a16:rowId xmlns:a16="http://schemas.microsoft.com/office/drawing/2014/main" val="668183223"/>
+                    <a16:rowId xmlns:a16="http://schemas.microsoft.com/office/drawing/2014/main" val="3499487018"/>
                   </a:ext>
                 </a:extLst>
               </a:tr>
@@ -9260,7 +9218,7 @@
                           </a:solidFill>
                           <a:latin typeface="Calibri" panose="020F0502020204030204" pitchFamily="34" charset="0"/>
                         </a:rPr>
-                        <a:t>Libelles metier et aide contextuelle</a:t>
+                        <a:t>Libellés métier et aide contextuelle</a:t>
                       </a:r>
                     </a:p>
                   </a:txBody>
@@ -9294,7 +9252,7 @@
                 </a:tc>
                 <a:extLst>
                   <a:ext uri="{0D108BD9-81ED-4DB2-BD59-A6C34878D82A}">
-                    <a16:rowId xmlns:a16="http://schemas.microsoft.com/office/drawing/2014/main" val="317673686"/>
+                    <a16:rowId xmlns:a16="http://schemas.microsoft.com/office/drawing/2014/main" val="1548861467"/>
                   </a:ext>
                 </a:extLst>
               </a:tr>
@@ -9311,7 +9269,7 @@
                           </a:solidFill>
                           <a:latin typeface="Calibri" panose="020F0502020204030204" pitchFamily="34" charset="0"/>
                         </a:rPr>
-                        <a:t>Aucune procedure en cas de mauvaise alerte</a:t>
+                        <a:t>Aucune procédure en cas de mauvaise alerte</a:t>
                       </a:r>
                     </a:p>
                   </a:txBody>
@@ -9367,7 +9325,7 @@
                 </a:tc>
                 <a:extLst>
                   <a:ext uri="{0D108BD9-81ED-4DB2-BD59-A6C34878D82A}">
-                    <a16:rowId xmlns:a16="http://schemas.microsoft.com/office/drawing/2014/main" val="2815805170"/>
+                    <a16:rowId xmlns:a16="http://schemas.microsoft.com/office/drawing/2014/main" val="84221729"/>
                   </a:ext>
                 </a:extLst>
               </a:tr>
@@ -9384,7 +9342,7 @@
                           </a:solidFill>
                           <a:latin typeface="Calibri" panose="020F0502020204030204" pitchFamily="34" charset="0"/>
                         </a:rPr>
-                        <a:t>Les definitions des indicateurs sont imprecises</a:t>
+                        <a:t>Les définitions des indicateurs sont imprécises</a:t>
                       </a:r>
                     </a:p>
                   </a:txBody>
@@ -9440,7 +9398,7 @@
                 </a:tc>
                 <a:extLst>
                   <a:ext uri="{0D108BD9-81ED-4DB2-BD59-A6C34878D82A}">
-                    <a16:rowId xmlns:a16="http://schemas.microsoft.com/office/drawing/2014/main" val="2908710195"/>
+                    <a16:rowId xmlns:a16="http://schemas.microsoft.com/office/drawing/2014/main" val="655253998"/>
                   </a:ext>
                 </a:extLst>
               </a:tr>
@@ -9457,7 +9415,7 @@
                           </a:solidFill>
                           <a:latin typeface="Calibri" panose="020F0502020204030204" pitchFamily="34" charset="0"/>
                         </a:rPr>
-                        <a:t>Graphiques illisibles au lecteur d'ecran</a:t>
+                        <a:t>Graphiques illisibles au lecteur d'écran</a:t>
                       </a:r>
                     </a:p>
                   </a:txBody>
@@ -9479,7 +9437,7 @@
                           </a:solidFill>
                           <a:latin typeface="Calibri" panose="020F0502020204030204" pitchFamily="34" charset="0"/>
                         </a:rPr>
-                        <a:t>Alternatives textuelles, validation accessibilite</a:t>
+                        <a:t>Alternatives textuelles, validation accessibilité</a:t>
                       </a:r>
                     </a:p>
                   </a:txBody>
@@ -9513,7 +9471,7 @@
                 </a:tc>
                 <a:extLst>
                   <a:ext uri="{0D108BD9-81ED-4DB2-BD59-A6C34878D82A}">
-                    <a16:rowId xmlns:a16="http://schemas.microsoft.com/office/drawing/2014/main" val="2702092448"/>
+                    <a16:rowId xmlns:a16="http://schemas.microsoft.com/office/drawing/2014/main" val="3670938249"/>
                   </a:ext>
                 </a:extLst>
               </a:tr>
@@ -9526,7 +9484,7 @@
           <p:cNvPr id="8" name="ZoneTexte 7">
             <a:extLst>
               <a:ext uri="{FF2B5EF4-FFF2-40B4-BE49-F238E27FC236}">
-                <a16:creationId xmlns:a16="http://schemas.microsoft.com/office/drawing/2014/main" id="{A5451653-043F-3A82-936E-1C71245AB7F4}"/>
+                <a16:creationId xmlns:a16="http://schemas.microsoft.com/office/drawing/2014/main" id="{F6C35621-C6C3-8D27-E7B1-BA4BCAB87AB1}"/>
               </a:ext>
             </a:extLst>
           </p:cNvPr>
@@ -9556,7 +9514,7 @@
                 </a:solidFill>
                 <a:latin typeface="Calibri" panose="020F0502020204030204" pitchFamily="34" charset="0"/>
               </a:rPr>
-              <a:t>Trois retours cumulent impact fort et frequence elevee : ils passent en premier. Le retour sur l'accessibilite est moins frequent mais remonte en priorite : c'est une exigence d'inclusion du projet, pas une option. Ce qu'il faut retenir : l'ordre de mes sprints n'est pas arbitraire, il reflete directement ce que le terrain nous a dit. Les 2 autres retours sont suivis au registre.</a:t>
+              <a:t>Trois retours cumulent impact fort et fréquence élevée : ils passent en premier. Le retour sur l'accessibilité est moins fréquent mais remonté en priorité : c'est une exigence d'inclusion du projet, pas une option. Ce qu'il faut retenir : l'ordre de mes sprints n'est pas arbitraire, il reflète directement ce que le terrain nous a dit. Les 2 autres retours sont suivis au registre.</a:t>
             </a:r>
           </a:p>
         </p:txBody>
@@ -9564,7 +9522,7 @@
     </p:spTree>
     <p:extLst>
       <p:ext uri="{BB962C8B-B14F-4D97-AF65-F5344CB8AC3E}">
-        <p14:creationId xmlns:p14="http://schemas.microsoft.com/office/powerpoint/2010/main" val="949275639"/>
+        <p14:creationId xmlns:p14="http://schemas.microsoft.com/office/powerpoint/2010/main" val="2920521358"/>
       </p:ext>
     </p:extLst>
   </p:cSld>
@@ -9596,7 +9554,7 @@
           <p:cNvPr id="2" name="Rectangle 1">
             <a:extLst>
               <a:ext uri="{FF2B5EF4-FFF2-40B4-BE49-F238E27FC236}">
-                <a16:creationId xmlns:a16="http://schemas.microsoft.com/office/drawing/2014/main" id="{41061E9E-E3B5-4B4B-EDF7-56B685439488}"/>
+                <a16:creationId xmlns:a16="http://schemas.microsoft.com/office/drawing/2014/main" id="{AE8037C6-4771-4861-A58E-51BF668DF4A4}"/>
               </a:ext>
             </a:extLst>
           </p:cNvPr>
@@ -9664,7 +9622,7 @@
           <p:cNvPr id="3" name="ZoneTexte 2">
             <a:extLst>
               <a:ext uri="{FF2B5EF4-FFF2-40B4-BE49-F238E27FC236}">
-                <a16:creationId xmlns:a16="http://schemas.microsoft.com/office/drawing/2014/main" id="{056C44B9-DAFE-7D56-BFAA-3A3CB18E2A14}"/>
+                <a16:creationId xmlns:a16="http://schemas.microsoft.com/office/drawing/2014/main" id="{C77078B6-7403-E1F0-AB0B-6E72B16D503D}"/>
               </a:ext>
             </a:extLst>
           </p:cNvPr>
@@ -9704,7 +9662,7 @@
           <p:cNvPr id="4" name="ZoneTexte 3">
             <a:extLst>
               <a:ext uri="{FF2B5EF4-FFF2-40B4-BE49-F238E27FC236}">
-                <a16:creationId xmlns:a16="http://schemas.microsoft.com/office/drawing/2014/main" id="{7187EA34-4AF1-B512-422E-A163A38083F1}"/>
+                <a16:creationId xmlns:a16="http://schemas.microsoft.com/office/drawing/2014/main" id="{578610E2-0F71-425C-26FF-B222EF00A395}"/>
               </a:ext>
             </a:extLst>
           </p:cNvPr>
@@ -9744,7 +9702,7 @@
           <p:cNvPr id="5" name="ZoneTexte 4">
             <a:extLst>
               <a:ext uri="{FF2B5EF4-FFF2-40B4-BE49-F238E27FC236}">
-                <a16:creationId xmlns:a16="http://schemas.microsoft.com/office/drawing/2014/main" id="{41B22328-6996-7F2E-114F-A804063967CB}"/>
+                <a16:creationId xmlns:a16="http://schemas.microsoft.com/office/drawing/2014/main" id="{259EBBF7-069B-A1E2-0A33-34740120BFDD}"/>
               </a:ext>
             </a:extLst>
           </p:cNvPr>
@@ -9768,20 +9726,14 @@
           <a:lstStyle/>
           <a:p>
             <a:r>
-              <a:rPr lang="pt-BR" sz="1000">
+              <a:rPr lang="fr-FR" sz="1000">
                 <a:solidFill>
                   <a:srgbClr val="6E7680"/>
                 </a:solidFill>
                 <a:latin typeface="Calibri" panose="020F0502020204030204" pitchFamily="34" charset="0"/>
               </a:rPr>
-              <a:t>Ouassim Megrad  ·  Lead Data  ·  equipe Megslab</a:t>
-            </a:r>
-            <a:endParaRPr lang="fr-FR" sz="1000">
-              <a:solidFill>
-                <a:srgbClr val="6E7680"/>
-              </a:solidFill>
-              <a:latin typeface="Calibri" panose="020F0502020204030204" pitchFamily="34" charset="0"/>
-            </a:endParaRPr>
+              <a:t>Ouassim Megrad  ·  Lead Data  ·  équipe Megslab</a:t>
+            </a:r>
           </a:p>
         </p:txBody>
       </p:sp>
@@ -9790,7 +9742,7 @@
           <p:cNvPr id="6" name="ZoneTexte 5">
             <a:extLst>
               <a:ext uri="{FF2B5EF4-FFF2-40B4-BE49-F238E27FC236}">
-                <a16:creationId xmlns:a16="http://schemas.microsoft.com/office/drawing/2014/main" id="{06A2B2BA-D6FB-8B1F-2405-4D86DD190485}"/>
+                <a16:creationId xmlns:a16="http://schemas.microsoft.com/office/drawing/2014/main" id="{75DE96C4-16F3-6658-82E2-51DA0A6E047B}"/>
               </a:ext>
             </a:extLst>
           </p:cNvPr>
@@ -9830,7 +9782,7 @@
           <p:cNvPr id="7" name="Tableau 6">
             <a:extLst>
               <a:ext uri="{FF2B5EF4-FFF2-40B4-BE49-F238E27FC236}">
-                <a16:creationId xmlns:a16="http://schemas.microsoft.com/office/drawing/2014/main" id="{D7740883-83DD-F9E5-576A-B5182A36F791}"/>
+                <a16:creationId xmlns:a16="http://schemas.microsoft.com/office/drawing/2014/main" id="{13F5F47B-8FED-A258-EECE-922436C159A7}"/>
               </a:ext>
             </a:extLst>
           </p:cNvPr>
@@ -9840,7 +9792,7 @@
           <p:nvPr>
             <p:extLst>
               <p:ext uri="{D42A27DB-BD31-4B8C-83A1-F6EECF244321}">
-                <p14:modId xmlns:p14="http://schemas.microsoft.com/office/powerpoint/2010/main" val="3968288286"/>
+                <p14:modId xmlns:p14="http://schemas.microsoft.com/office/powerpoint/2010/main" val="539043976"/>
               </p:ext>
             </p:extLst>
           </p:nvPr>
@@ -9859,14 +9811,14 @@
                 <a:gridCol w="3556000">
                   <a:extLst>
                     <a:ext uri="{9D8B030D-6E8A-4147-A177-3AD203B41FA5}">
-                      <a16:colId xmlns:a16="http://schemas.microsoft.com/office/drawing/2014/main" val="3703052449"/>
+                      <a16:colId xmlns:a16="http://schemas.microsoft.com/office/drawing/2014/main" val="4158773612"/>
                     </a:ext>
                   </a:extLst>
                 </a:gridCol>
                 <a:gridCol w="7721600">
                   <a:extLst>
                     <a:ext uri="{9D8B030D-6E8A-4147-A177-3AD203B41FA5}">
-                      <a16:colId xmlns:a16="http://schemas.microsoft.com/office/drawing/2014/main" val="3252354924"/>
+                      <a16:colId xmlns:a16="http://schemas.microsoft.com/office/drawing/2014/main" val="2361878747"/>
                     </a:ext>
                   </a:extLst>
                 </a:gridCol>
@@ -9918,7 +9870,7 @@
                 </a:tc>
                 <a:extLst>
                   <a:ext uri="{0D108BD9-81ED-4DB2-BD59-A6C34878D82A}">
-                    <a16:rowId xmlns:a16="http://schemas.microsoft.com/office/drawing/2014/main" val="308576288"/>
+                    <a16:rowId xmlns:a16="http://schemas.microsoft.com/office/drawing/2014/main" val="247898843"/>
                   </a:ext>
                 </a:extLst>
               </a:tr>
@@ -9957,7 +9909,7 @@
                           </a:solidFill>
                           <a:latin typeface="Calibri" panose="020F0502020204030204" pitchFamily="34" charset="0"/>
                         </a:rPr>
-                        <a:t>Atelier de 45 min sur cas reels et fiche reflexe des indicateurs critiques</a:t>
+                        <a:t>Atelier de 45 min sur cas réels et fiche réflexe des indicateurs critiques</a:t>
                       </a:r>
                     </a:p>
                   </a:txBody>
@@ -9969,7 +9921,7 @@
                 </a:tc>
                 <a:extLst>
                   <a:ext uri="{0D108BD9-81ED-4DB2-BD59-A6C34878D82A}">
-                    <a16:rowId xmlns:a16="http://schemas.microsoft.com/office/drawing/2014/main" val="4231052986"/>
+                    <a16:rowId xmlns:a16="http://schemas.microsoft.com/office/drawing/2014/main" val="173804254"/>
                   </a:ext>
                 </a:extLst>
               </a:tr>
@@ -9986,7 +9938,7 @@
                           </a:solidFill>
                           <a:latin typeface="Calibri" panose="020F0502020204030204" pitchFamily="34" charset="0"/>
                         </a:rPr>
-                        <a:t>Agents du centre operationnel</a:t>
+                        <a:t>Agents du centre opérationnel</a:t>
                       </a:r>
                     </a:p>
                   </a:txBody>
@@ -10008,7 +9960,7 @@
                           </a:solidFill>
                           <a:latin typeface="Calibri" panose="020F0502020204030204" pitchFamily="34" charset="0"/>
                         </a:rPr>
-                        <a:t>Atelier de 45 min, puis prise en main en binome sur poste : 2 sessions de 30 min sur des alertes reelles</a:t>
+                        <a:t>Atelier de 45 min, puis prise en main en binome sur poste : 2 sessions de 30 min sur des alertes réelles</a:t>
                       </a:r>
                     </a:p>
                   </a:txBody>
@@ -10020,7 +9972,7 @@
                 </a:tc>
                 <a:extLst>
                   <a:ext uri="{0D108BD9-81ED-4DB2-BD59-A6C34878D82A}">
-                    <a16:rowId xmlns:a16="http://schemas.microsoft.com/office/drawing/2014/main" val="3401434858"/>
+                    <a16:rowId xmlns:a16="http://schemas.microsoft.com/office/drawing/2014/main" val="1723174611"/>
                   </a:ext>
                 </a:extLst>
               </a:tr>
@@ -10037,7 +9989,7 @@
                           </a:solidFill>
                           <a:latin typeface="Calibri" panose="020F0502020204030204" pitchFamily="34" charset="0"/>
                         </a:rPr>
-                        <a:t>Analystes mobilite</a:t>
+                        <a:t>Analystes mobilité</a:t>
                       </a:r>
                     </a:p>
                   </a:txBody>
@@ -10071,7 +10023,7 @@
                 </a:tc>
                 <a:extLst>
                   <a:ext uri="{0D108BD9-81ED-4DB2-BD59-A6C34878D82A}">
-                    <a16:rowId xmlns:a16="http://schemas.microsoft.com/office/drawing/2014/main" val="1130848493"/>
+                    <a16:rowId xmlns:a16="http://schemas.microsoft.com/office/drawing/2014/main" val="1168762612"/>
                   </a:ext>
                 </a:extLst>
               </a:tr>
@@ -10088,7 +10040,7 @@
                           </a:solidFill>
                           <a:latin typeface="Calibri" panose="020F0502020204030204" pitchFamily="34" charset="0"/>
                         </a:rPr>
-                        <a:t>Utilisateurs avec besoin d'accessibilite</a:t>
+                        <a:t>Utilisateurs avec besoin d'accessibilité</a:t>
                       </a:r>
                     </a:p>
                   </a:txBody>
@@ -10110,7 +10062,7 @@
                           </a:solidFill>
                           <a:latin typeface="Calibri" panose="020F0502020204030204" pitchFamily="34" charset="0"/>
                         </a:rPr>
-                        <a:t>Session dediee : lecteur d'ecran, sous-titres, rythme adapte, supports valides avant diffusion</a:t>
+                        <a:t>Session dédiée : lecteur d'écran, sous-titres, rythme adapté, supports validés avant diffusion</a:t>
                       </a:r>
                     </a:p>
                   </a:txBody>
@@ -10122,7 +10074,7 @@
                 </a:tc>
                 <a:extLst>
                   <a:ext uri="{0D108BD9-81ED-4DB2-BD59-A6C34878D82A}">
-                    <a16:rowId xmlns:a16="http://schemas.microsoft.com/office/drawing/2014/main" val="3491881125"/>
+                    <a16:rowId xmlns:a16="http://schemas.microsoft.com/office/drawing/2014/main" val="4268464957"/>
                   </a:ext>
                 </a:extLst>
               </a:tr>
@@ -10135,7 +10087,7 @@
           <p:cNvPr id="8" name="ZoneTexte 7">
             <a:extLst>
               <a:ext uri="{FF2B5EF4-FFF2-40B4-BE49-F238E27FC236}">
-                <a16:creationId xmlns:a16="http://schemas.microsoft.com/office/drawing/2014/main" id="{50E0DF06-B943-557B-E6EC-4B3037FFBE6C}"/>
+                <a16:creationId xmlns:a16="http://schemas.microsoft.com/office/drawing/2014/main" id="{C3ECF6BE-9F20-BB5E-0C59-1B4D982C1C2D}"/>
               </a:ext>
             </a:extLst>
           </p:cNvPr>
@@ -10165,7 +10117,7 @@
                 </a:solidFill>
                 <a:latin typeface="Calibri" panose="020F0502020204030204" pitchFamily="34" charset="0"/>
               </a:rPr>
-              <a:t>Apres le deploiement, le support prend le relais : niveau 1 (FAQ, gestes simples, premiere reponse sous 4 heures ouvrees) puis niveau 2 (equipe data), avec une procedure d'escalade claire. La formation cree l'adoption, le support l'empeche de retomber. Cible : 100 % des profils formes avant le pilote, satisfaction 4/5 minimum, participation 90 % minimum.</a:t>
+              <a:t>Apres le déploiement, le support prend le relais : niveau 1 (FAQ, gestes simples, première réponse sous 4 heures ouvrees) puis niveau 2 (équipe data), avec une procédure d'escalade claire. La formation crée l'adoption, le support l'empêche de retomber. Cible : 100 % des profils formés avant le pilote, satisfaction 4/5 minimum, participation 90 % minimum.</a:t>
             </a:r>
           </a:p>
         </p:txBody>
@@ -10175,7 +10127,7 @@
           <p:cNvPr id="9" name="Rectangle : coins arrondis 8">
             <a:extLst>
               <a:ext uri="{FF2B5EF4-FFF2-40B4-BE49-F238E27FC236}">
-                <a16:creationId xmlns:a16="http://schemas.microsoft.com/office/drawing/2014/main" id="{B19B3D6F-0B88-630F-95BB-A8395D7AD24C}"/>
+                <a16:creationId xmlns:a16="http://schemas.microsoft.com/office/drawing/2014/main" id="{75C82B1F-4D4F-3AA2-5A1D-EDF644CDF5A6}"/>
               </a:ext>
             </a:extLst>
           </p:cNvPr>
@@ -10241,7 +10193,7 @@
                 </a:solidFill>
                 <a:latin typeface="Calibri" panose="020F0502020204030204" pitchFamily="34" charset="0"/>
               </a:rPr>
-              <a:t>Decision attendue n°2 : valider ce dispositif d'accompagnement</a:t>
+              <a:t>Décision attendue n°2 : valider ce dispositif d'accompagnement</a:t>
             </a:r>
           </a:p>
         </p:txBody>
@@ -10249,7 +10201,7 @@
     </p:spTree>
     <p:extLst>
       <p:ext uri="{BB962C8B-B14F-4D97-AF65-F5344CB8AC3E}">
-        <p14:creationId xmlns:p14="http://schemas.microsoft.com/office/powerpoint/2010/main" val="3136159196"/>
+        <p14:creationId xmlns:p14="http://schemas.microsoft.com/office/powerpoint/2010/main" val="3510725678"/>
       </p:ext>
     </p:extLst>
   </p:cSld>
@@ -10281,7 +10233,7 @@
           <p:cNvPr id="2" name="Rectangle 1">
             <a:extLst>
               <a:ext uri="{FF2B5EF4-FFF2-40B4-BE49-F238E27FC236}">
-                <a16:creationId xmlns:a16="http://schemas.microsoft.com/office/drawing/2014/main" id="{880298E4-B298-70F4-919E-7CB4197C0BE6}"/>
+                <a16:creationId xmlns:a16="http://schemas.microsoft.com/office/drawing/2014/main" id="{DF6020BC-C927-5798-8D53-E01A47213F14}"/>
               </a:ext>
             </a:extLst>
           </p:cNvPr>
@@ -10349,7 +10301,7 @@
           <p:cNvPr id="3" name="ZoneTexte 2">
             <a:extLst>
               <a:ext uri="{FF2B5EF4-FFF2-40B4-BE49-F238E27FC236}">
-                <a16:creationId xmlns:a16="http://schemas.microsoft.com/office/drawing/2014/main" id="{F475C0F3-D3D7-70C3-40E9-61349B5E584A}"/>
+                <a16:creationId xmlns:a16="http://schemas.microsoft.com/office/drawing/2014/main" id="{D0C4808A-2A32-80F9-D44E-773A0DC88DBC}"/>
               </a:ext>
             </a:extLst>
           </p:cNvPr>
@@ -10379,7 +10331,7 @@
                 </a:solidFill>
                 <a:latin typeface="Calibri" panose="020F0502020204030204" pitchFamily="34" charset="0"/>
               </a:rPr>
-              <a:t>Les 4 decisions demandees a ce comite</a:t>
+              <a:t>Les 4 décisions demandées a ce comité</a:t>
             </a:r>
           </a:p>
         </p:txBody>
@@ -10389,7 +10341,7 @@
           <p:cNvPr id="4" name="ZoneTexte 3">
             <a:extLst>
               <a:ext uri="{FF2B5EF4-FFF2-40B4-BE49-F238E27FC236}">
-                <a16:creationId xmlns:a16="http://schemas.microsoft.com/office/drawing/2014/main" id="{BB3997AA-1195-5309-A443-1C88C68662A9}"/>
+                <a16:creationId xmlns:a16="http://schemas.microsoft.com/office/drawing/2014/main" id="{2999E129-7378-4098-DE08-D73F8D006854}"/>
               </a:ext>
             </a:extLst>
           </p:cNvPr>
@@ -10419,7 +10371,7 @@
                 </a:solidFill>
                 <a:latin typeface="Calibri" panose="020F0502020204030204" pitchFamily="34" charset="0"/>
               </a:rPr>
-              <a:t>Deux validations des cette semaine, deux arbitrages d'ici la semaine 4</a:t>
+              <a:t>Deux validations dès cette semaine, deux arbitrages d'ici la semaine 4</a:t>
             </a:r>
           </a:p>
         </p:txBody>
@@ -10429,7 +10381,7 @@
           <p:cNvPr id="5" name="ZoneTexte 4">
             <a:extLst>
               <a:ext uri="{FF2B5EF4-FFF2-40B4-BE49-F238E27FC236}">
-                <a16:creationId xmlns:a16="http://schemas.microsoft.com/office/drawing/2014/main" id="{380E1881-EDB2-CDD0-9414-D09661E02A44}"/>
+                <a16:creationId xmlns:a16="http://schemas.microsoft.com/office/drawing/2014/main" id="{DDF6247C-D640-2A68-99CA-7501B56E23E1}"/>
               </a:ext>
             </a:extLst>
           </p:cNvPr>
@@ -10453,20 +10405,14 @@
           <a:lstStyle/>
           <a:p>
             <a:r>
-              <a:rPr lang="pt-BR" sz="1000">
+              <a:rPr lang="fr-FR" sz="1000">
                 <a:solidFill>
                   <a:srgbClr val="6E7680"/>
                 </a:solidFill>
                 <a:latin typeface="Calibri" panose="020F0502020204030204" pitchFamily="34" charset="0"/>
               </a:rPr>
-              <a:t>Ouassim Megrad  ·  Lead Data  ·  equipe Megslab</a:t>
-            </a:r>
-            <a:endParaRPr lang="fr-FR" sz="1000">
-              <a:solidFill>
-                <a:srgbClr val="6E7680"/>
-              </a:solidFill>
-              <a:latin typeface="Calibri" panose="020F0502020204030204" pitchFamily="34" charset="0"/>
-            </a:endParaRPr>
+              <a:t>Ouassim Megrad  ·  Lead Data  ·  équipe Megslab</a:t>
+            </a:r>
           </a:p>
         </p:txBody>
       </p:sp>
@@ -10475,7 +10421,7 @@
           <p:cNvPr id="6" name="ZoneTexte 5">
             <a:extLst>
               <a:ext uri="{FF2B5EF4-FFF2-40B4-BE49-F238E27FC236}">
-                <a16:creationId xmlns:a16="http://schemas.microsoft.com/office/drawing/2014/main" id="{2E714B81-B70B-C328-0425-FC25162F6AD4}"/>
+                <a16:creationId xmlns:a16="http://schemas.microsoft.com/office/drawing/2014/main" id="{B8FFD2FD-C3EA-7679-92B1-2E0CADFB8BAD}"/>
               </a:ext>
             </a:extLst>
           </p:cNvPr>
@@ -10515,7 +10461,7 @@
           <p:cNvPr id="7" name="Tableau 6">
             <a:extLst>
               <a:ext uri="{FF2B5EF4-FFF2-40B4-BE49-F238E27FC236}">
-                <a16:creationId xmlns:a16="http://schemas.microsoft.com/office/drawing/2014/main" id="{628046C3-7397-6514-C82E-A3646E06995A}"/>
+                <a16:creationId xmlns:a16="http://schemas.microsoft.com/office/drawing/2014/main" id="{3286F9F9-F078-1C1A-84AF-AA449A364974}"/>
               </a:ext>
             </a:extLst>
           </p:cNvPr>
@@ -10525,7 +10471,7 @@
           <p:nvPr>
             <p:extLst>
               <p:ext uri="{D42A27DB-BD31-4B8C-83A1-F6EECF244321}">
-                <p14:modId xmlns:p14="http://schemas.microsoft.com/office/powerpoint/2010/main" val="1936952493"/>
+                <p14:modId xmlns:p14="http://schemas.microsoft.com/office/powerpoint/2010/main" val="2860968925"/>
               </p:ext>
             </p:extLst>
           </p:nvPr>
@@ -10544,21 +10490,21 @@
                 <a:gridCol w="762000">
                   <a:extLst>
                     <a:ext uri="{9D8B030D-6E8A-4147-A177-3AD203B41FA5}">
-                      <a16:colId xmlns:a16="http://schemas.microsoft.com/office/drawing/2014/main" val="3449947107"/>
+                      <a16:colId xmlns:a16="http://schemas.microsoft.com/office/drawing/2014/main" val="3982916280"/>
                     </a:ext>
                   </a:extLst>
                 </a:gridCol>
                 <a:gridCol w="8763000">
                   <a:extLst>
                     <a:ext uri="{9D8B030D-6E8A-4147-A177-3AD203B41FA5}">
-                      <a16:colId xmlns:a16="http://schemas.microsoft.com/office/drawing/2014/main" val="4169813651"/>
+                      <a16:colId xmlns:a16="http://schemas.microsoft.com/office/drawing/2014/main" val="2656609824"/>
                     </a:ext>
                   </a:extLst>
                 </a:gridCol>
                 <a:gridCol w="1752600">
                   <a:extLst>
                     <a:ext uri="{9D8B030D-6E8A-4147-A177-3AD203B41FA5}">
-                      <a16:colId xmlns:a16="http://schemas.microsoft.com/office/drawing/2014/main" val="3237402419"/>
+                      <a16:colId xmlns:a16="http://schemas.microsoft.com/office/drawing/2014/main" val="1262844401"/>
                     </a:ext>
                   </a:extLst>
                 </a:gridCol>
@@ -10598,7 +10544,7 @@
                           </a:solidFill>
                           <a:latin typeface="Calibri" panose="020F0502020204030204" pitchFamily="34" charset="0"/>
                         </a:rPr>
-                        <a:t>Decision demandee</a:t>
+                        <a:t>Décision demandée</a:t>
                       </a:r>
                     </a:p>
                   </a:txBody>
@@ -10620,7 +10566,7 @@
                           </a:solidFill>
                           <a:latin typeface="Calibri" panose="020F0502020204030204" pitchFamily="34" charset="0"/>
                         </a:rPr>
-                        <a:t>Echeance</a:t>
+                        <a:t>Échéance</a:t>
                       </a:r>
                     </a:p>
                   </a:txBody>
@@ -10632,7 +10578,7 @@
                 </a:tc>
                 <a:extLst>
                   <a:ext uri="{0D108BD9-81ED-4DB2-BD59-A6C34878D82A}">
-                    <a16:rowId xmlns:a16="http://schemas.microsoft.com/office/drawing/2014/main" val="2911529144"/>
+                    <a16:rowId xmlns:a16="http://schemas.microsoft.com/office/drawing/2014/main" val="2701372593"/>
                   </a:ext>
                 </a:extLst>
               </a:tr>
@@ -10671,7 +10617,7 @@
                           </a:solidFill>
                           <a:latin typeface="Calibri" panose="020F0502020204030204" pitchFamily="34" charset="0"/>
                         </a:rPr>
-                        <a:t>Valider le mode de gouvernance (methode hybride, RACI, comite d'arbitrage)</a:t>
+                        <a:t>Valider le mode de gouvernance (méthode hybride, RACI, comité d'arbitrage)</a:t>
                       </a:r>
                     </a:p>
                   </a:txBody>
@@ -10705,7 +10651,7 @@
                 </a:tc>
                 <a:extLst>
                   <a:ext uri="{0D108BD9-81ED-4DB2-BD59-A6C34878D82A}">
-                    <a16:rowId xmlns:a16="http://schemas.microsoft.com/office/drawing/2014/main" val="3125958374"/>
+                    <a16:rowId xmlns:a16="http://schemas.microsoft.com/office/drawing/2014/main" val="2734883886"/>
                   </a:ext>
                 </a:extLst>
               </a:tr>
@@ -10744,7 +10690,7 @@
                           </a:solidFill>
                           <a:latin typeface="Calibri" panose="020F0502020204030204" pitchFamily="34" charset="0"/>
                         </a:rPr>
-                        <a:t>Valider le calendrier de deploiement (4 phases, 5 jalons)</a:t>
+                        <a:t>Valider le calendrier de déploiement (4 phases, 5 jalons)</a:t>
                       </a:r>
                     </a:p>
                   </a:txBody>
@@ -10778,7 +10724,7 @@
                 </a:tc>
                 <a:extLst>
                   <a:ext uri="{0D108BD9-81ED-4DB2-BD59-A6C34878D82A}">
-                    <a16:rowId xmlns:a16="http://schemas.microsoft.com/office/drawing/2014/main" val="2008701339"/>
+                    <a16:rowId xmlns:a16="http://schemas.microsoft.com/office/drawing/2014/main" val="861259233"/>
                   </a:ext>
                 </a:extLst>
               </a:tr>
@@ -10817,7 +10763,7 @@
                           </a:solidFill>
                           <a:latin typeface="Calibri" panose="020F0502020204030204" pitchFamily="34" charset="0"/>
                         </a:rPr>
-                        <a:t>Arbitrer les priorites du backlog proposees</a:t>
+                        <a:t>Arbitrer les priorités du backlog proposées</a:t>
                       </a:r>
                     </a:p>
                   </a:txBody>
@@ -10851,7 +10797,7 @@
                 </a:tc>
                 <a:extLst>
                   <a:ext uri="{0D108BD9-81ED-4DB2-BD59-A6C34878D82A}">
-                    <a16:rowId xmlns:a16="http://schemas.microsoft.com/office/drawing/2014/main" val="766691888"/>
+                    <a16:rowId xmlns:a16="http://schemas.microsoft.com/office/drawing/2014/main" val="3766313375"/>
                   </a:ext>
                 </a:extLst>
               </a:tr>
@@ -10924,7 +10870,7 @@
                 </a:tc>
                 <a:extLst>
                   <a:ext uri="{0D108BD9-81ED-4DB2-BD59-A6C34878D82A}">
-                    <a16:rowId xmlns:a16="http://schemas.microsoft.com/office/drawing/2014/main" val="3001976902"/>
+                    <a16:rowId xmlns:a16="http://schemas.microsoft.com/office/drawing/2014/main" val="1765976884"/>
                   </a:ext>
                 </a:extLst>
               </a:tr>
@@ -10937,7 +10883,7 @@
           <p:cNvPr id="8" name="ZoneTexte 7">
             <a:extLst>
               <a:ext uri="{FF2B5EF4-FFF2-40B4-BE49-F238E27FC236}">
-                <a16:creationId xmlns:a16="http://schemas.microsoft.com/office/drawing/2014/main" id="{9B59B256-315C-6BBF-F480-987F533F8A12}"/>
+                <a16:creationId xmlns:a16="http://schemas.microsoft.com/office/drawing/2014/main" id="{4A7F2C76-B7F1-B86D-0529-AF7F12C5F696}"/>
               </a:ext>
             </a:extLst>
           </p:cNvPr>
@@ -10967,7 +10913,7 @@
                 </a:solidFill>
                 <a:latin typeface="Calibri" panose="020F0502020204030204" pitchFamily="34" charset="0"/>
               </a:rPr>
-              <a:t>Si vous validez aujourd'hui : le cadrage demarre immediatement, le premier comite d'arbitrage se tient des lundi, vous recevez le premier reporting hebdomadaire en semaine 3, et nous nous retrouvons au jalon J1 en fin de semaine 2 pour constater que la gouvernance est en place.</a:t>
+              <a:t>Si vous validez aujourd'hui : le cadrage démarre immédiatement, le premier comité d'arbitrage se tient dès lundi, vous recevez le premier reporting hebdomadaire en semaine 3, et nous nous retrouvons au jalon J1 en fin de semaine 2 pour constater que la gouvernance est en place.</a:t>
             </a:r>
           </a:p>
         </p:txBody>
@@ -10977,7 +10923,7 @@
           <p:cNvPr id="9" name="Rectangle : coins arrondis 8">
             <a:extLst>
               <a:ext uri="{FF2B5EF4-FFF2-40B4-BE49-F238E27FC236}">
-                <a16:creationId xmlns:a16="http://schemas.microsoft.com/office/drawing/2014/main" id="{6477C7FB-1033-300F-0785-3423E6B907F6}"/>
+                <a16:creationId xmlns:a16="http://schemas.microsoft.com/office/drawing/2014/main" id="{7CA21C0D-CA52-0D36-2108-F3F90D9650FA}"/>
               </a:ext>
             </a:extLst>
           </p:cNvPr>
@@ -11043,7 +10989,7 @@
                 </a:solidFill>
                 <a:latin typeface="Calibri" panose="020F0502020204030204" pitchFamily="34" charset="0"/>
               </a:rPr>
-              <a:t>Merci de votre attention. Je suis pret a repondre a vos questions.</a:t>
+              <a:t>Merci de votre attention. Je suis prêt a répondre à vos questions.</a:t>
             </a:r>
           </a:p>
         </p:txBody>
@@ -11051,7 +10997,7 @@
     </p:spTree>
     <p:extLst>
       <p:ext uri="{BB962C8B-B14F-4D97-AF65-F5344CB8AC3E}">
-        <p14:creationId xmlns:p14="http://schemas.microsoft.com/office/powerpoint/2010/main" val="874551603"/>
+        <p14:creationId xmlns:p14="http://schemas.microsoft.com/office/powerpoint/2010/main" val="3359147703"/>
       </p:ext>
     </p:extLst>
   </p:cSld>
@@ -11083,7 +11029,7 @@
           <p:cNvPr id="2" name="Rectangle 1">
             <a:extLst>
               <a:ext uri="{FF2B5EF4-FFF2-40B4-BE49-F238E27FC236}">
-                <a16:creationId xmlns:a16="http://schemas.microsoft.com/office/drawing/2014/main" id="{C9B11ADA-1F04-D5B6-D1BF-39667054AF39}"/>
+                <a16:creationId xmlns:a16="http://schemas.microsoft.com/office/drawing/2014/main" id="{2347ED5D-EF26-EFAA-731B-F1A4B7EAD199}"/>
               </a:ext>
             </a:extLst>
           </p:cNvPr>
@@ -11151,7 +11097,7 @@
           <p:cNvPr id="3" name="ZoneTexte 2">
             <a:extLst>
               <a:ext uri="{FF2B5EF4-FFF2-40B4-BE49-F238E27FC236}">
-                <a16:creationId xmlns:a16="http://schemas.microsoft.com/office/drawing/2014/main" id="{48201A1C-80E0-E28D-DB11-0C05F5CC8FED}"/>
+                <a16:creationId xmlns:a16="http://schemas.microsoft.com/office/drawing/2014/main" id="{C259CE8C-9378-BD15-9A19-211661CD21FC}"/>
               </a:ext>
             </a:extLst>
           </p:cNvPr>
@@ -11181,7 +11127,7 @@
                 </a:solidFill>
                 <a:latin typeface="Calibri" panose="020F0502020204030204" pitchFamily="34" charset="0"/>
               </a:rPr>
-              <a:t>ANNEXE : socle data et perimetre technique du Lead Data</a:t>
+              <a:t>ANNEXE : socle data et périmètre technique du Lead Data</a:t>
             </a:r>
           </a:p>
         </p:txBody>
@@ -11191,7 +11137,7 @@
           <p:cNvPr id="4" name="ZoneTexte 3">
             <a:extLst>
               <a:ext uri="{FF2B5EF4-FFF2-40B4-BE49-F238E27FC236}">
-                <a16:creationId xmlns:a16="http://schemas.microsoft.com/office/drawing/2014/main" id="{195BC75A-FFE1-4D88-985F-DA6066F8D3A5}"/>
+                <a16:creationId xmlns:a16="http://schemas.microsoft.com/office/drawing/2014/main" id="{3EE45732-FC2B-D8F9-1566-233E1A25BFB0}"/>
               </a:ext>
             </a:extLst>
           </p:cNvPr>
@@ -11221,7 +11167,7 @@
                 </a:solidFill>
                 <a:latin typeface="Calibri" panose="020F0502020204030204" pitchFamily="34" charset="0"/>
               </a:rPr>
-              <a:t>Presentee uniquement en reponse aux questions du jury, hors des 10 minutes de reporting</a:t>
+              <a:t>Présentée uniquement en réponse aux questions du jury, hors des 10 minutes de reporting</a:t>
             </a:r>
           </a:p>
         </p:txBody>
@@ -11231,7 +11177,7 @@
           <p:cNvPr id="5" name="ZoneTexte 4">
             <a:extLst>
               <a:ext uri="{FF2B5EF4-FFF2-40B4-BE49-F238E27FC236}">
-                <a16:creationId xmlns:a16="http://schemas.microsoft.com/office/drawing/2014/main" id="{C55E2EE0-115B-D72C-F639-A14A70F83B3A}"/>
+                <a16:creationId xmlns:a16="http://schemas.microsoft.com/office/drawing/2014/main" id="{A6B1E597-8F34-4C3A-677E-EC3350A6EA8C}"/>
               </a:ext>
             </a:extLst>
           </p:cNvPr>
@@ -11255,20 +11201,14 @@
           <a:lstStyle/>
           <a:p>
             <a:r>
-              <a:rPr lang="pt-BR" sz="1000">
+              <a:rPr lang="fr-FR" sz="1000">
                 <a:solidFill>
                   <a:srgbClr val="6E7680"/>
                 </a:solidFill>
                 <a:latin typeface="Calibri" panose="020F0502020204030204" pitchFamily="34" charset="0"/>
               </a:rPr>
-              <a:t>Ouassim Megrad  ·  Lead Data  ·  equipe Megslab</a:t>
-            </a:r>
-            <a:endParaRPr lang="fr-FR" sz="1000">
-              <a:solidFill>
-                <a:srgbClr val="6E7680"/>
-              </a:solidFill>
-              <a:latin typeface="Calibri" panose="020F0502020204030204" pitchFamily="34" charset="0"/>
-            </a:endParaRPr>
+              <a:t>Ouassim Megrad  ·  Lead Data  ·  équipe Megslab</a:t>
+            </a:r>
           </a:p>
         </p:txBody>
       </p:sp>
@@ -11277,7 +11217,7 @@
           <p:cNvPr id="6" name="ZoneTexte 5">
             <a:extLst>
               <a:ext uri="{FF2B5EF4-FFF2-40B4-BE49-F238E27FC236}">
-                <a16:creationId xmlns:a16="http://schemas.microsoft.com/office/drawing/2014/main" id="{4E26BCC9-7EFE-BA7C-EFA3-4B25CBCB477F}"/>
+                <a16:creationId xmlns:a16="http://schemas.microsoft.com/office/drawing/2014/main" id="{559E4EE1-35F6-C76C-681B-AB88CE0E0401}"/>
               </a:ext>
             </a:extLst>
           </p:cNvPr>
@@ -11317,7 +11257,7 @@
           <p:cNvPr id="7" name="Rectangle : coins arrondis 6">
             <a:extLst>
               <a:ext uri="{FF2B5EF4-FFF2-40B4-BE49-F238E27FC236}">
-                <a16:creationId xmlns:a16="http://schemas.microsoft.com/office/drawing/2014/main" id="{23489148-379E-59A4-6098-67E1D69E1A60}"/>
+                <a16:creationId xmlns:a16="http://schemas.microsoft.com/office/drawing/2014/main" id="{798FB915-FAEF-7027-8A6F-ED6424C5FD15}"/>
               </a:ext>
             </a:extLst>
           </p:cNvPr>
@@ -11385,7 +11325,7 @@
           <p:cNvPr id="8" name="ZoneTexte 7">
             <a:extLst>
               <a:ext uri="{FF2B5EF4-FFF2-40B4-BE49-F238E27FC236}">
-                <a16:creationId xmlns:a16="http://schemas.microsoft.com/office/drawing/2014/main" id="{82E4BAE4-EA3D-FD82-1B9B-E9000AEF4D96}"/>
+                <a16:creationId xmlns:a16="http://schemas.microsoft.com/office/drawing/2014/main" id="{4944B41E-8E30-3948-BDEA-2AE439B21883}"/>
               </a:ext>
             </a:extLst>
           </p:cNvPr>
@@ -11415,7 +11355,7 @@
                 </a:solidFill>
                 <a:latin typeface="Calibri" panose="020F0502020204030204" pitchFamily="34" charset="0"/>
               </a:rPr>
-              <a:t>CHAINE DE DONNEES</a:t>
+              <a:t>CHAÎNE DE DONNÉES</a:t>
             </a:r>
           </a:p>
         </p:txBody>
@@ -11425,7 +11365,7 @@
           <p:cNvPr id="9" name="ZoneTexte 8">
             <a:extLst>
               <a:ext uri="{FF2B5EF4-FFF2-40B4-BE49-F238E27FC236}">
-                <a16:creationId xmlns:a16="http://schemas.microsoft.com/office/drawing/2014/main" id="{B3665C6E-26F3-1A88-E9F1-E67901793F92}"/>
+                <a16:creationId xmlns:a16="http://schemas.microsoft.com/office/drawing/2014/main" id="{F8478268-60FC-86F6-A2C0-63429E2B6CEB}"/>
               </a:ext>
             </a:extLst>
           </p:cNvPr>
@@ -11455,7 +11395,7 @@
                 </a:solidFill>
                 <a:latin typeface="Calibri" panose="020F0502020204030204" pitchFamily="34" charset="0"/>
               </a:rPr>
-              <a:t>Collecte des signaux de mobilite (bus, tramways, velos, capteurs de trafic), ingestion en continu et centralisation dans un entrepot de donnees. Je garantis disponibilite et fraicheur.</a:t>
+              <a:t>Collecte des signaux de mobilité (bus, tramways, vélos, capteurs de trafic), ingestion en continu et centralisation dans un entrepôt de données. Je garantis disponibilité et fraîcheur.</a:t>
             </a:r>
           </a:p>
         </p:txBody>
@@ -11465,7 +11405,7 @@
           <p:cNvPr id="10" name="Rectangle : coins arrondis 9">
             <a:extLst>
               <a:ext uri="{FF2B5EF4-FFF2-40B4-BE49-F238E27FC236}">
-                <a16:creationId xmlns:a16="http://schemas.microsoft.com/office/drawing/2014/main" id="{3AC6650A-5167-B7FA-8D31-6CF68679E065}"/>
+                <a16:creationId xmlns:a16="http://schemas.microsoft.com/office/drawing/2014/main" id="{6DA7DB3F-D461-A125-AA67-96D3AEBB735B}"/>
               </a:ext>
             </a:extLst>
           </p:cNvPr>
@@ -11533,7 +11473,7 @@
           <p:cNvPr id="11" name="ZoneTexte 10">
             <a:extLst>
               <a:ext uri="{FF2B5EF4-FFF2-40B4-BE49-F238E27FC236}">
-                <a16:creationId xmlns:a16="http://schemas.microsoft.com/office/drawing/2014/main" id="{23BD476A-D2B5-1F58-FE24-4CE615F05256}"/>
+                <a16:creationId xmlns:a16="http://schemas.microsoft.com/office/drawing/2014/main" id="{E5BDDDF5-80B1-3D71-DF8B-6677C75F45F4}"/>
               </a:ext>
             </a:extLst>
           </p:cNvPr>
@@ -11563,7 +11503,7 @@
                 </a:solidFill>
                 <a:latin typeface="Calibri" panose="020F0502020204030204" pitchFamily="34" charset="0"/>
               </a:rPr>
-              <a:t>QUALITE DES DONNEES</a:t>
+              <a:t>QUALITÉ DES DONNÉES</a:t>
             </a:r>
           </a:p>
         </p:txBody>
@@ -11573,7 +11513,7 @@
           <p:cNvPr id="12" name="ZoneTexte 11">
             <a:extLst>
               <a:ext uri="{FF2B5EF4-FFF2-40B4-BE49-F238E27FC236}">
-                <a16:creationId xmlns:a16="http://schemas.microsoft.com/office/drawing/2014/main" id="{62DB95C8-7627-EAED-C746-AF3E5DE12C49}"/>
+                <a16:creationId xmlns:a16="http://schemas.microsoft.com/office/drawing/2014/main" id="{B823036C-94EF-FC3F-95CA-B49A147930F8}"/>
               </a:ext>
             </a:extLst>
           </p:cNvPr>
@@ -11603,7 +11543,7 @@
                 </a:solidFill>
                 <a:latin typeface="Calibri" panose="020F0502020204030204" pitchFamily="34" charset="0"/>
               </a:rPr>
-              <a:t>Controles automatises : completude, coherence, doublons ; referentiels partages. C'est le prerequis des tendances par ligne (B06) : sans qualite, pas d'indicateur fiable.</a:t>
+              <a:t>Contrôles automatisés : complétude, cohérence, doublons ; référentiels partages. C'est le prérequis des tendances par ligne (B06) : sans qualité, pas d'indicateur fiable.</a:t>
             </a:r>
           </a:p>
         </p:txBody>
@@ -11613,7 +11553,7 @@
           <p:cNvPr id="13" name="Rectangle : coins arrondis 12">
             <a:extLst>
               <a:ext uri="{FF2B5EF4-FFF2-40B4-BE49-F238E27FC236}">
-                <a16:creationId xmlns:a16="http://schemas.microsoft.com/office/drawing/2014/main" id="{684D7796-F994-2FD7-DCF5-9F7823B03AB5}"/>
+                <a16:creationId xmlns:a16="http://schemas.microsoft.com/office/drawing/2014/main" id="{3E6B561E-F64A-10FE-29BA-17C0B9F819C5}"/>
               </a:ext>
             </a:extLst>
           </p:cNvPr>
@@ -11681,7 +11621,7 @@
           <p:cNvPr id="14" name="ZoneTexte 13">
             <a:extLst>
               <a:ext uri="{FF2B5EF4-FFF2-40B4-BE49-F238E27FC236}">
-                <a16:creationId xmlns:a16="http://schemas.microsoft.com/office/drawing/2014/main" id="{1656B772-DD2E-6DF9-3A2B-9A9251545443}"/>
+                <a16:creationId xmlns:a16="http://schemas.microsoft.com/office/drawing/2014/main" id="{7C971F6B-38E5-21AC-4AEB-AC19549B2A33}"/>
               </a:ext>
             </a:extLst>
           </p:cNvPr>
@@ -11711,7 +11651,7 @@
                 </a:solidFill>
                 <a:latin typeface="Calibri" panose="020F0502020204030204" pitchFamily="34" charset="0"/>
               </a:rPr>
-              <a:t>DETECTION D'ANOMALIES</a:t>
+              <a:t>DÉTECTION D'ANOMALIES</a:t>
             </a:r>
           </a:p>
         </p:txBody>
@@ -11721,7 +11661,7 @@
           <p:cNvPr id="15" name="ZoneTexte 14">
             <a:extLst>
               <a:ext uri="{FF2B5EF4-FFF2-40B4-BE49-F238E27FC236}">
-                <a16:creationId xmlns:a16="http://schemas.microsoft.com/office/drawing/2014/main" id="{2C5A5CF3-5D2D-8FCC-12E3-12C070809131}"/>
+                <a16:creationId xmlns:a16="http://schemas.microsoft.com/office/drawing/2014/main" id="{B7F18A5E-5185-36F7-23A6-FA81725EF102}"/>
               </a:ext>
             </a:extLst>
           </p:cNvPr>
@@ -11751,7 +11691,7 @@
                 </a:solidFill>
                 <a:latin typeface="Calibri" panose="020F0502020204030204" pitchFamily="34" charset="0"/>
               </a:rPr>
-              <a:t>Modele statistique surveille par le MLOps ; je pilote le reglage des seuils pour reduire les fausses alertes de 28 % a 15 %, condition de la confiance des agents.</a:t>
+              <a:t>Modèle statistique surveillé par le MLOps ; je pilote le réglage des seuils pour réduire les fausses alertes de 28 % à 15 %, condition de la confiance des agents.</a:t>
             </a:r>
           </a:p>
         </p:txBody>
@@ -11761,7 +11701,7 @@
           <p:cNvPr id="16" name="Rectangle : coins arrondis 15">
             <a:extLst>
               <a:ext uri="{FF2B5EF4-FFF2-40B4-BE49-F238E27FC236}">
-                <a16:creationId xmlns:a16="http://schemas.microsoft.com/office/drawing/2014/main" id="{FBD00E47-9FA4-9AD4-B9C3-28092C13E97F}"/>
+                <a16:creationId xmlns:a16="http://schemas.microsoft.com/office/drawing/2014/main" id="{9E7FD0DD-5AC2-C6FD-B8E0-91A13BBB478A}"/>
               </a:ext>
             </a:extLst>
           </p:cNvPr>
@@ -11829,7 +11769,7 @@
           <p:cNvPr id="17" name="ZoneTexte 16">
             <a:extLst>
               <a:ext uri="{FF2B5EF4-FFF2-40B4-BE49-F238E27FC236}">
-                <a16:creationId xmlns:a16="http://schemas.microsoft.com/office/drawing/2014/main" id="{C70F557C-6B61-A13D-55CB-894C34F71E34}"/>
+                <a16:creationId xmlns:a16="http://schemas.microsoft.com/office/drawing/2014/main" id="{B723CCFD-CBA0-5985-4549-930630355A81}"/>
               </a:ext>
             </a:extLst>
           </p:cNvPr>
@@ -11869,7 +11809,7 @@
           <p:cNvPr id="18" name="ZoneTexte 17">
             <a:extLst>
               <a:ext uri="{FF2B5EF4-FFF2-40B4-BE49-F238E27FC236}">
-                <a16:creationId xmlns:a16="http://schemas.microsoft.com/office/drawing/2014/main" id="{A4AAC46E-A140-7636-70F0-42D75D8A53BF}"/>
+                <a16:creationId xmlns:a16="http://schemas.microsoft.com/office/drawing/2014/main" id="{B2F731E9-70D2-07D5-7D71-041AB78A4F8C}"/>
               </a:ext>
             </a:extLst>
           </p:cNvPr>
@@ -11899,7 +11839,7 @@
                 </a:solidFill>
                 <a:latin typeface="Calibri" panose="020F0502020204030204" pitchFamily="34" charset="0"/>
               </a:rPr>
-              <a:t>API de consultation, tableau de bord interne et exports CSV pour les analystes (B05), avec gestion des permissions d'acces.</a:t>
+              <a:t>API de consultation, tableau de bord interne et exports CSV pour les analystes (B05), avec gestion des permissions d'accès.</a:t>
             </a:r>
           </a:p>
         </p:txBody>
@@ -11909,7 +11849,7 @@
           <p:cNvPr id="19" name="Rectangle : coins arrondis 18">
             <a:extLst>
               <a:ext uri="{FF2B5EF4-FFF2-40B4-BE49-F238E27FC236}">
-                <a16:creationId xmlns:a16="http://schemas.microsoft.com/office/drawing/2014/main" id="{2CA8E01B-3E13-844D-48FD-BAB6D9D5FE6F}"/>
+                <a16:creationId xmlns:a16="http://schemas.microsoft.com/office/drawing/2014/main" id="{5DCACBD2-CE5F-316D-3B60-90535BF10597}"/>
               </a:ext>
             </a:extLst>
           </p:cNvPr>
@@ -11977,7 +11917,7 @@
           <p:cNvPr id="20" name="ZoneTexte 19">
             <a:extLst>
               <a:ext uri="{FF2B5EF4-FFF2-40B4-BE49-F238E27FC236}">
-                <a16:creationId xmlns:a16="http://schemas.microsoft.com/office/drawing/2014/main" id="{8436CF15-6B03-564D-1B81-309FCC84917A}"/>
+                <a16:creationId xmlns:a16="http://schemas.microsoft.com/office/drawing/2014/main" id="{854B9463-C182-BB9F-D07E-D43023A9AB57}"/>
               </a:ext>
             </a:extLst>
           </p:cNvPr>
@@ -12017,7 +11957,7 @@
           <p:cNvPr id="21" name="ZoneTexte 20">
             <a:extLst>
               <a:ext uri="{FF2B5EF4-FFF2-40B4-BE49-F238E27FC236}">
-                <a16:creationId xmlns:a16="http://schemas.microsoft.com/office/drawing/2014/main" id="{D4F2821C-BFB1-7000-0FE9-5453C0319226}"/>
+                <a16:creationId xmlns:a16="http://schemas.microsoft.com/office/drawing/2014/main" id="{B5E3EDF8-A202-2358-7267-3326331EAF21}"/>
               </a:ext>
             </a:extLst>
           </p:cNvPr>
@@ -12057,7 +11997,7 @@
           <p:cNvPr id="22" name="Rectangle : coins arrondis 21">
             <a:extLst>
               <a:ext uri="{FF2B5EF4-FFF2-40B4-BE49-F238E27FC236}">
-                <a16:creationId xmlns:a16="http://schemas.microsoft.com/office/drawing/2014/main" id="{13C286CD-378C-1743-1052-9E07AB8DA4C5}"/>
+                <a16:creationId xmlns:a16="http://schemas.microsoft.com/office/drawing/2014/main" id="{94C18112-DA99-E985-5847-79F40344D322}"/>
               </a:ext>
             </a:extLst>
           </p:cNvPr>
@@ -12125,7 +12065,7 @@
           <p:cNvPr id="23" name="ZoneTexte 22">
             <a:extLst>
               <a:ext uri="{FF2B5EF4-FFF2-40B4-BE49-F238E27FC236}">
-                <a16:creationId xmlns:a16="http://schemas.microsoft.com/office/drawing/2014/main" id="{E5D09924-E683-8303-6594-5318EDA827F5}"/>
+                <a16:creationId xmlns:a16="http://schemas.microsoft.com/office/drawing/2014/main" id="{7BCECACB-C405-A7AA-AE0E-348ECEA733F5}"/>
               </a:ext>
             </a:extLst>
           </p:cNvPr>
@@ -12155,7 +12095,7 @@
                 </a:solidFill>
                 <a:latin typeface="Calibri" panose="020F0502020204030204" pitchFamily="34" charset="0"/>
               </a:rPr>
-              <a:t>PERIMETRE ASSUME</a:t>
+              <a:t>PÉRIMÈTRE ASSUMÉ</a:t>
             </a:r>
           </a:p>
         </p:txBody>
@@ -12165,7 +12105,7 @@
           <p:cNvPr id="24" name="ZoneTexte 23">
             <a:extLst>
               <a:ext uri="{FF2B5EF4-FFF2-40B4-BE49-F238E27FC236}">
-                <a16:creationId xmlns:a16="http://schemas.microsoft.com/office/drawing/2014/main" id="{F7B929CB-47CC-5F2B-7BB0-663082077C28}"/>
+                <a16:creationId xmlns:a16="http://schemas.microsoft.com/office/drawing/2014/main" id="{A8B17660-0652-7E5B-8C35-687B2F1FA64C}"/>
               </a:ext>
             </a:extLst>
           </p:cNvPr>
@@ -12195,7 +12135,7 @@
                 </a:solidFill>
                 <a:latin typeface="Calibri" panose="020F0502020204030204" pitchFamily="34" charset="0"/>
               </a:rPr>
-              <a:t>Le developpement releve des epreuves E2/E3. Dans ce projet, je pilote la qualite, la fiabilite et l'exploitation du socle : c'est ce qui fonde ma legitimite sur les indicateurs presentes.</a:t>
+              <a:t>Le developpement relève des épreuves E2/E3. Dans ce projet, je pilote la qualité, la fiabilité et l'exploitation du socle : c'est ce qui fonde ma légitimité sur les indicateurs présentés.</a:t>
             </a:r>
           </a:p>
         </p:txBody>
@@ -12203,7 +12143,7 @@
     </p:spTree>
     <p:extLst>
       <p:ext uri="{BB962C8B-B14F-4D97-AF65-F5344CB8AC3E}">
-        <p14:creationId xmlns:p14="http://schemas.microsoft.com/office/powerpoint/2010/main" val="252329271"/>
+        <p14:creationId xmlns:p14="http://schemas.microsoft.com/office/powerpoint/2010/main" val="506176092"/>
       </p:ext>
     </p:extLst>
   </p:cSld>
